--- a/PLSQL/01장/1장_PLSQL기초.pptx
+++ b/PLSQL/01장/1장_PLSQL기초.pptx
@@ -4,63 +4,66 @@
   <p:sldMasterIdLst>
     <p:sldMasterId id="2147483648" r:id="rId1"/>
   </p:sldMasterIdLst>
+  <p:notesMasterIdLst>
+    <p:notesMasterId r:id="rId56"/>
+  </p:notesMasterIdLst>
   <p:sldIdLst>
-    <p:sldId id="256" r:id="rId7"/>
-    <p:sldId id="257" r:id="rId9"/>
-    <p:sldId id="258" r:id="rId10"/>
-    <p:sldId id="259" r:id="rId11"/>
-    <p:sldId id="260" r:id="rId12"/>
-    <p:sldId id="261" r:id="rId13"/>
-    <p:sldId id="262" r:id="rId14"/>
-    <p:sldId id="263" r:id="rId15"/>
-    <p:sldId id="264" r:id="rId16"/>
-    <p:sldId id="265" r:id="rId17"/>
-    <p:sldId id="266" r:id="rId18"/>
-    <p:sldId id="267" r:id="rId19"/>
-    <p:sldId id="268" r:id="rId20"/>
-    <p:sldId id="269" r:id="rId21"/>
-    <p:sldId id="270" r:id="rId22"/>
-    <p:sldId id="271" r:id="rId23"/>
-    <p:sldId id="272" r:id="rId24"/>
-    <p:sldId id="273" r:id="rId25"/>
-    <p:sldId id="274" r:id="rId26"/>
-    <p:sldId id="275" r:id="rId27"/>
-    <p:sldId id="276" r:id="rId28"/>
-    <p:sldId id="277" r:id="rId29"/>
-    <p:sldId id="278" r:id="rId30"/>
-    <p:sldId id="279" r:id="rId31"/>
-    <p:sldId id="280" r:id="rId32"/>
-    <p:sldId id="281" r:id="rId33"/>
-    <p:sldId id="282" r:id="rId34"/>
-    <p:sldId id="283" r:id="rId35"/>
-    <p:sldId id="284" r:id="rId36"/>
-    <p:sldId id="285" r:id="rId37"/>
-    <p:sldId id="286" r:id="rId38"/>
-    <p:sldId id="287" r:id="rId39"/>
-    <p:sldId id="288" r:id="rId40"/>
-    <p:sldId id="289" r:id="rId41"/>
-    <p:sldId id="290" r:id="rId42"/>
-    <p:sldId id="291" r:id="rId43"/>
-    <p:sldId id="292" r:id="rId44"/>
-    <p:sldId id="293" r:id="rId45"/>
-    <p:sldId id="294" r:id="rId46"/>
-    <p:sldId id="295" r:id="rId47"/>
-    <p:sldId id="296" r:id="rId48"/>
-    <p:sldId id="297" r:id="rId49"/>
-    <p:sldId id="298" r:id="rId50"/>
-    <p:sldId id="299" r:id="rId51"/>
-    <p:sldId id="300" r:id="rId52"/>
-    <p:sldId id="301" r:id="rId53"/>
-    <p:sldId id="302" r:id="rId54"/>
-    <p:sldId id="303" r:id="rId55"/>
-    <p:sldId id="304" r:id="rId56"/>
-    <p:sldId id="305" r:id="rId57"/>
-    <p:sldId id="306" r:id="rId58"/>
-    <p:sldId id="307" r:id="rId59"/>
-    <p:sldId id="308" r:id="rId60"/>
-    <p:sldId id="309" r:id="rId61"/>
+    <p:sldId id="256" r:id="rId2"/>
+    <p:sldId id="257" r:id="rId3"/>
+    <p:sldId id="258" r:id="rId4"/>
+    <p:sldId id="259" r:id="rId5"/>
+    <p:sldId id="260" r:id="rId6"/>
+    <p:sldId id="261" r:id="rId7"/>
+    <p:sldId id="262" r:id="rId8"/>
+    <p:sldId id="263" r:id="rId9"/>
+    <p:sldId id="264" r:id="rId10"/>
+    <p:sldId id="265" r:id="rId11"/>
+    <p:sldId id="266" r:id="rId12"/>
+    <p:sldId id="267" r:id="rId13"/>
+    <p:sldId id="268" r:id="rId14"/>
+    <p:sldId id="269" r:id="rId15"/>
+    <p:sldId id="270" r:id="rId16"/>
+    <p:sldId id="271" r:id="rId17"/>
+    <p:sldId id="272" r:id="rId18"/>
+    <p:sldId id="273" r:id="rId19"/>
+    <p:sldId id="274" r:id="rId20"/>
+    <p:sldId id="275" r:id="rId21"/>
+    <p:sldId id="276" r:id="rId22"/>
+    <p:sldId id="277" r:id="rId23"/>
+    <p:sldId id="278" r:id="rId24"/>
+    <p:sldId id="279" r:id="rId25"/>
+    <p:sldId id="280" r:id="rId26"/>
+    <p:sldId id="281" r:id="rId27"/>
+    <p:sldId id="282" r:id="rId28"/>
+    <p:sldId id="283" r:id="rId29"/>
+    <p:sldId id="284" r:id="rId30"/>
+    <p:sldId id="285" r:id="rId31"/>
+    <p:sldId id="286" r:id="rId32"/>
+    <p:sldId id="287" r:id="rId33"/>
+    <p:sldId id="288" r:id="rId34"/>
+    <p:sldId id="289" r:id="rId35"/>
+    <p:sldId id="290" r:id="rId36"/>
+    <p:sldId id="291" r:id="rId37"/>
+    <p:sldId id="292" r:id="rId38"/>
+    <p:sldId id="293" r:id="rId39"/>
+    <p:sldId id="294" r:id="rId40"/>
+    <p:sldId id="295" r:id="rId41"/>
+    <p:sldId id="296" r:id="rId42"/>
+    <p:sldId id="297" r:id="rId43"/>
+    <p:sldId id="298" r:id="rId44"/>
+    <p:sldId id="299" r:id="rId45"/>
+    <p:sldId id="300" r:id="rId46"/>
+    <p:sldId id="301" r:id="rId47"/>
+    <p:sldId id="302" r:id="rId48"/>
+    <p:sldId id="303" r:id="rId49"/>
+    <p:sldId id="304" r:id="rId50"/>
+    <p:sldId id="305" r:id="rId51"/>
+    <p:sldId id="306" r:id="rId52"/>
+    <p:sldId id="307" r:id="rId53"/>
+    <p:sldId id="308" r:id="rId54"/>
+    <p:sldId id="309" r:id="rId55"/>
   </p:sldIdLst>
-  <p:sldSz cx="12191695" cy="6858000" type="screen4x3"/>
+  <p:sldSz cx="12192000" cy="6858000"/>
   <p:notesSz cx="6858000" cy="9144000"/>
   <p:defaultTextStyle>
     <a:defPPr>
@@ -157,11 +160,27 @@
       </a:defRPr>
     </a:lvl9pPr>
   </p:defaultTextStyle>
+  <p:extLst>
+    <p:ext uri="{EFAFB233-063F-42B5-8137-9DF3F51BA10A}">
+      <p15:sldGuideLst xmlns:p15="http://schemas.microsoft.com/office/powerpoint/2012/main">
+        <p15:guide id="1" orient="horz" pos="2160">
+          <p15:clr>
+            <a:srgbClr val="A4A3A4"/>
+          </p15:clr>
+        </p15:guide>
+        <p15:guide id="2" pos="2880">
+          <p15:clr>
+            <a:srgbClr val="A4A3A4"/>
+          </p15:clr>
+        </p15:guide>
+      </p15:sldGuideLst>
+    </p:ext>
+  </p:extLst>
 </p:presentation>
 </file>
 
 <file path=ppt/notesMasters/notesMaster1.xml><?xml version="1.0" encoding="utf-8"?>
-<p:notesMaster xmlns:a="http://schemas.openxmlformats.org/drawingml/2006/main" xmlns:p="http://schemas.openxmlformats.org/presentationml/2006/main" xmlns:r="http://schemas.openxmlformats.org/officeDocument/2006/relationships">
+<p:notesMaster xmlns:a="http://schemas.openxmlformats.org/drawingml/2006/main" xmlns:r="http://schemas.openxmlformats.org/officeDocument/2006/relationships" xmlns:p="http://schemas.openxmlformats.org/presentationml/2006/main">
   <p:cSld>
     <p:bg>
       <p:bgRef idx="1001">
@@ -182,241 +201,16 @@
           <a:chExt cx="0" cy="0"/>
         </a:xfrm>
       </p:grpSpPr>
-      <p:sp>
-        <p:nvSpPr>
-          <p:cNvPr id="2" name="Header Placeholder 1"/>
-          <p:cNvSpPr>
-            <a:spLocks noGrp="1"/>
-          </p:cNvSpPr>
-          <p:nvPr>
-            <p:ph type="hdr" sz="quarter"/>
-          </p:nvPr>
-        </p:nvSpPr>
-        <p:spPr>
-          <a:xfrm>
-            <a:off x="0" y="0"/>
-            <a:ext cx="2971800" cy="457200"/>
-          </a:xfrm>
-          <a:prstGeom prst="rect">
-            <a:avLst/>
-          </a:prstGeom>
-        </p:spPr>
-        <p:txBody>
-          <a:bodyPr vert="horz" lIns="91440" tIns="45720" rIns="91440" bIns="45720" rtlCol="0"/>
-          <a:lstStyle>
-            <a:lvl1pPr algn="l">
-              <a:defRPr sz="1200"/>
-            </a:lvl1pPr>
-          </a:lstStyle>
-          <a:p>
-            <a:endParaRPr lang="en-US"/>
-          </a:p>
-        </p:txBody>
-      </p:sp>
-      <p:sp>
-        <p:nvSpPr>
-          <p:cNvPr id="3" name="Date Placeholder 2"/>
-          <p:cNvSpPr>
-            <a:spLocks noGrp="1"/>
-          </p:cNvSpPr>
-          <p:nvPr>
-            <p:ph type="dt" idx="1"/>
-          </p:nvPr>
-        </p:nvSpPr>
-        <p:spPr>
-          <a:xfrm>
-            <a:off x="3884613" y="0"/>
-            <a:ext cx="2971800" cy="457200"/>
-          </a:xfrm>
-          <a:prstGeom prst="rect">
-            <a:avLst/>
-          </a:prstGeom>
-        </p:spPr>
-        <p:txBody>
-          <a:bodyPr vert="horz" lIns="91440" tIns="45720" rIns="91440" bIns="45720" rtlCol="0"/>
-          <a:lstStyle>
-            <a:lvl1pPr algn="r">
-              <a:defRPr sz="1200"/>
-            </a:lvl1pPr>
-          </a:lstStyle>
-          <a:p>
-            <a:fld id="{0F89C1C7-3DCD-1040-A9CF-14679D8B5DDD}" type="datetimeFigureOut">
-              <a:rPr lang="en-US" smtClean="0"/>
-              <a:t>10/17/16</a:t>
-            </a:fld>
-            <a:endParaRPr lang="en-US"/>
-          </a:p>
-        </p:txBody>
-      </p:sp>
-      <p:sp>
-        <p:nvSpPr>
-          <p:cNvPr id="4" name="Slide Image Placeholder 3"/>
-          <p:cNvSpPr>
-            <a:spLocks noGrp="1" noRot="1" noChangeAspect="1"/>
-          </p:cNvSpPr>
-          <p:nvPr>
-            <p:ph type="sldImg" idx="2"/>
-          </p:nvPr>
-        </p:nvSpPr>
-        <p:spPr>
-          <a:xfrm>
-            <a:off x="1143000" y="685800"/>
-            <a:ext cx="4572000" cy="3429000"/>
-          </a:xfrm>
-          <a:prstGeom prst="rect">
-            <a:avLst/>
-          </a:prstGeom>
-          <a:noFill/>
-          <a:ln w="12700">
-            <a:solidFill>
-              <a:prstClr val="black"/>
-            </a:solidFill>
-          </a:ln>
-        </p:spPr>
-        <p:txBody>
-          <a:bodyPr vert="horz" lIns="91440" tIns="45720" rIns="91440" bIns="45720" rtlCol="0" anchor="ctr"/>
-          <a:lstStyle/>
-          <a:p>
-            <a:endParaRPr lang="en-US"/>
-          </a:p>
-        </p:txBody>
-      </p:sp>
-      <p:sp>
-        <p:nvSpPr>
-          <p:cNvPr id="5" name="Notes Placeholder 4"/>
-          <p:cNvSpPr>
-            <a:spLocks noGrp="1"/>
-          </p:cNvSpPr>
-          <p:nvPr>
-            <p:ph type="body" sz="quarter" idx="3"/>
-          </p:nvPr>
-        </p:nvSpPr>
-        <p:spPr>
-          <a:xfrm>
-            <a:off x="685800" y="4343400"/>
-            <a:ext cx="5486400" cy="4114800"/>
-          </a:xfrm>
-          <a:prstGeom prst="rect">
-            <a:avLst/>
-          </a:prstGeom>
-        </p:spPr>
-        <p:txBody>
-          <a:bodyPr vert="horz" lIns="91440" tIns="45720" rIns="91440" bIns="45720" rtlCol="0"/>
-          <a:lstStyle/>
-          <a:p>
-            <a:pPr lvl="0"/>
-            <a:r>
-              <a:rPr lang="en-US" smtClean="0"/>
-              <a:t>Click to edit Master text styles</a:t>
-            </a:r>
-          </a:p>
-          <a:p>
-            <a:pPr lvl="1"/>
-            <a:r>
-              <a:rPr lang="en-US" smtClean="0"/>
-              <a:t>Second level</a:t>
-            </a:r>
-          </a:p>
-          <a:p>
-            <a:pPr lvl="2"/>
-            <a:r>
-              <a:rPr lang="en-US" smtClean="0"/>
-              <a:t>Third level</a:t>
-            </a:r>
-          </a:p>
-          <a:p>
-            <a:pPr lvl="3"/>
-            <a:r>
-              <a:rPr lang="en-US" smtClean="0"/>
-              <a:t>Fourth level</a:t>
-            </a:r>
-          </a:p>
-          <a:p>
-            <a:pPr lvl="4"/>
-            <a:r>
-              <a:rPr lang="en-US" smtClean="0"/>
-              <a:t>Fifth level</a:t>
-            </a:r>
-            <a:endParaRPr lang="en-US"/>
-          </a:p>
-        </p:txBody>
-      </p:sp>
-      <p:sp>
-        <p:nvSpPr>
-          <p:cNvPr id="6" name="Footer Placeholder 5"/>
-          <p:cNvSpPr>
-            <a:spLocks noGrp="1"/>
-          </p:cNvSpPr>
-          <p:nvPr>
-            <p:ph type="ftr" sz="quarter" idx="4"/>
-          </p:nvPr>
-        </p:nvSpPr>
-        <p:spPr>
-          <a:xfrm>
-            <a:off x="0" y="8685213"/>
-            <a:ext cx="2971800" cy="457200"/>
-          </a:xfrm>
-          <a:prstGeom prst="rect">
-            <a:avLst/>
-          </a:prstGeom>
-        </p:spPr>
-        <p:txBody>
-          <a:bodyPr vert="horz" lIns="91440" tIns="45720" rIns="91440" bIns="45720" rtlCol="0" anchor="b"/>
-          <a:lstStyle>
-            <a:lvl1pPr algn="l">
-              <a:defRPr sz="1200"/>
-            </a:lvl1pPr>
-          </a:lstStyle>
-          <a:p>
-            <a:endParaRPr lang="en-US"/>
-          </a:p>
-        </p:txBody>
-      </p:sp>
-      <p:sp>
-        <p:nvSpPr>
-          <p:cNvPr id="7" name="Slide Number Placeholder 6"/>
-          <p:cNvSpPr>
-            <a:spLocks noGrp="1"/>
-          </p:cNvSpPr>
-          <p:nvPr>
-            <p:ph type="sldNum" sz="quarter" idx="5"/>
-          </p:nvPr>
-        </p:nvSpPr>
-        <p:spPr>
-          <a:xfrm>
-            <a:off x="3884613" y="8685213"/>
-            <a:ext cx="2971800" cy="457200"/>
-          </a:xfrm>
-          <a:prstGeom prst="rect">
-            <a:avLst/>
-          </a:prstGeom>
-        </p:spPr>
-        <p:txBody>
-          <a:bodyPr vert="horz" lIns="91440" tIns="45720" rIns="91440" bIns="45720" rtlCol="0" anchor="b"/>
-          <a:lstStyle>
-            <a:lvl1pPr algn="r">
-              <a:defRPr sz="1200"/>
-            </a:lvl1pPr>
-          </a:lstStyle>
-          <a:p>
-            <a:fld id="{BB5E49A5-4136-284D-997B-48E1D791AD67}" type="slidenum">
-              <a:rPr lang="en-US" smtClean="0"/>
-              <a:t>‹#›</a:t>
-            </a:fld>
-            <a:endParaRPr lang="en-US"/>
-          </a:p>
-        </p:txBody>
-      </p:sp>
     </p:spTree>
     <p:extLst>
       <p:ext uri="{BB962C8B-B14F-4D97-AF65-F5344CB8AC3E}">
-        <p14:creationId xmlns:p14="http://schemas.microsoft.com/office/powerpoint/2010/main" val="2623252185"/>
+        <p14:creationId xmlns:p14="http://schemas.microsoft.com/office/powerpoint/2010/main" val="2308933398"/>
       </p:ext>
     </p:extLst>
   </p:cSld>
   <p:clrMap bg1="lt1" tx1="dk1" bg2="lt2" tx2="dk2" accent1="accent1" accent2="accent2" accent3="accent3" accent4="accent4" accent5="accent5" accent6="accent6" hlink="hlink" folHlink="folHlink"/>
   <p:notesStyle>
-    <a:lvl1pPr marL="0" algn="l" defTabSz="457200" rtl="0" eaLnBrk="1" latinLnBrk="0" hangingPunct="1">
+    <a:lvl1pPr marL="0" algn="l" defTabSz="914400" rtl="0" eaLnBrk="1" latinLnBrk="1" hangingPunct="1">
       <a:defRPr sz="1200" kern="1200">
         <a:solidFill>
           <a:schemeClr val="tx1"/>
@@ -426,7 +220,7 @@
         <a:cs typeface="+mn-cs"/>
       </a:defRPr>
     </a:lvl1pPr>
-    <a:lvl2pPr marL="457200" algn="l" defTabSz="457200" rtl="0" eaLnBrk="1" latinLnBrk="0" hangingPunct="1">
+    <a:lvl2pPr marL="457200" algn="l" defTabSz="914400" rtl="0" eaLnBrk="1" latinLnBrk="1" hangingPunct="1">
       <a:defRPr sz="1200" kern="1200">
         <a:solidFill>
           <a:schemeClr val="tx1"/>
@@ -436,7 +230,7 @@
         <a:cs typeface="+mn-cs"/>
       </a:defRPr>
     </a:lvl2pPr>
-    <a:lvl3pPr marL="914400" algn="l" defTabSz="457200" rtl="0" eaLnBrk="1" latinLnBrk="0" hangingPunct="1">
+    <a:lvl3pPr marL="914400" algn="l" defTabSz="914400" rtl="0" eaLnBrk="1" latinLnBrk="1" hangingPunct="1">
       <a:defRPr sz="1200" kern="1200">
         <a:solidFill>
           <a:schemeClr val="tx1"/>
@@ -446,7 +240,7 @@
         <a:cs typeface="+mn-cs"/>
       </a:defRPr>
     </a:lvl3pPr>
-    <a:lvl4pPr marL="1371600" algn="l" defTabSz="457200" rtl="0" eaLnBrk="1" latinLnBrk="0" hangingPunct="1">
+    <a:lvl4pPr marL="1371600" algn="l" defTabSz="914400" rtl="0" eaLnBrk="1" latinLnBrk="1" hangingPunct="1">
       <a:defRPr sz="1200" kern="1200">
         <a:solidFill>
           <a:schemeClr val="tx1"/>
@@ -456,7 +250,7 @@
         <a:cs typeface="+mn-cs"/>
       </a:defRPr>
     </a:lvl4pPr>
-    <a:lvl5pPr marL="1828800" algn="l" defTabSz="457200" rtl="0" eaLnBrk="1" latinLnBrk="0" hangingPunct="1">
+    <a:lvl5pPr marL="1828800" algn="l" defTabSz="914400" rtl="0" eaLnBrk="1" latinLnBrk="1" hangingPunct="1">
       <a:defRPr sz="1200" kern="1200">
         <a:solidFill>
           <a:schemeClr val="tx1"/>
@@ -466,7 +260,7 @@
         <a:cs typeface="+mn-cs"/>
       </a:defRPr>
     </a:lvl5pPr>
-    <a:lvl6pPr marL="2286000" algn="l" defTabSz="457200" rtl="0" eaLnBrk="1" latinLnBrk="0" hangingPunct="1">
+    <a:lvl6pPr marL="2286000" algn="l" defTabSz="914400" rtl="0" eaLnBrk="1" latinLnBrk="1" hangingPunct="1">
       <a:defRPr sz="1200" kern="1200">
         <a:solidFill>
           <a:schemeClr val="tx1"/>
@@ -476,7 +270,7 @@
         <a:cs typeface="+mn-cs"/>
       </a:defRPr>
     </a:lvl6pPr>
-    <a:lvl7pPr marL="2743200" algn="l" defTabSz="457200" rtl="0" eaLnBrk="1" latinLnBrk="0" hangingPunct="1">
+    <a:lvl7pPr marL="2743200" algn="l" defTabSz="914400" rtl="0" eaLnBrk="1" latinLnBrk="1" hangingPunct="1">
       <a:defRPr sz="1200" kern="1200">
         <a:solidFill>
           <a:schemeClr val="tx1"/>
@@ -486,7 +280,7 @@
         <a:cs typeface="+mn-cs"/>
       </a:defRPr>
     </a:lvl7pPr>
-    <a:lvl8pPr marL="3200400" algn="l" defTabSz="457200" rtl="0" eaLnBrk="1" latinLnBrk="0" hangingPunct="1">
+    <a:lvl8pPr marL="3200400" algn="l" defTabSz="914400" rtl="0" eaLnBrk="1" latinLnBrk="1" hangingPunct="1">
       <a:defRPr sz="1200" kern="1200">
         <a:solidFill>
           <a:schemeClr val="tx1"/>
@@ -496,7 +290,7 @@
         <a:cs typeface="+mn-cs"/>
       </a:defRPr>
     </a:lvl8pPr>
-    <a:lvl9pPr marL="3657600" algn="l" defTabSz="457200" rtl="0" eaLnBrk="1" latinLnBrk="0" hangingPunct="1">
+    <a:lvl9pPr marL="3657600" algn="l" defTabSz="914400" rtl="0" eaLnBrk="1" latinLnBrk="1" hangingPunct="1">
       <a:defRPr sz="1200" kern="1200">
         <a:solidFill>
           <a:schemeClr val="tx1"/>
@@ -511,7 +305,7 @@
 </file>
 
 <file path=ppt/notesSlides/notesSlide1.xml><?xml version="1.0" encoding="utf-8"?>
-<p:notes xmlns:a="http://schemas.openxmlformats.org/drawingml/2006/main" xmlns:p="http://schemas.openxmlformats.org/presentationml/2006/main" xmlns:r="http://schemas.openxmlformats.org/officeDocument/2006/relationships">
+<p:notes xmlns:a="http://schemas.openxmlformats.org/drawingml/2006/main" xmlns:r="http://schemas.openxmlformats.org/officeDocument/2006/relationships" xmlns:p="http://schemas.openxmlformats.org/presentationml/2006/main">
   <p:cSld>
     <p:spTree>
       <p:nvGrpSpPr>
@@ -531,7 +325,7 @@
         <p:nvSpPr>
           <p:cNvPr id="2" name="Slide Image Placeholder 1"/>
           <p:cNvSpPr>
-            <a:spLocks noGrp="1"/>
+            <a:spLocks noGrp="1" noRot="1" noChangeAspect="1"/>
           </p:cNvSpPr>
           <p:nvPr>
             <p:ph type="sldImg" idx="2"/>
@@ -546,7 +340,7 @@
             <a:spLocks noGrp="1"/>
           </p:cNvSpPr>
           <p:nvPr>
-            <p:ph type="body" idx="3" sz="quarter"/>
+            <p:ph type="body" sz="quarter" idx="3"/>
           </p:nvPr>
         </p:nvSpPr>
         <p:spPr/>
@@ -567,7 +361,7 @@
             <a:spLocks noGrp="1"/>
           </p:cNvSpPr>
           <p:nvPr>
-            <p:ph type="sldNum" idx="5" sz="quarter"/>
+            <p:ph type="sldNum" sz="quarter" idx="5"/>
           </p:nvPr>
         </p:nvSpPr>
         <p:spPr/>
@@ -581,7 +375,7 @@
 </file>
 
 <file path=ppt/notesSlides/notesSlide10.xml><?xml version="1.0" encoding="utf-8"?>
-<p:notes xmlns:a="http://schemas.openxmlformats.org/drawingml/2006/main" xmlns:p="http://schemas.openxmlformats.org/presentationml/2006/main" xmlns:r="http://schemas.openxmlformats.org/officeDocument/2006/relationships">
+<p:notes xmlns:a="http://schemas.openxmlformats.org/drawingml/2006/main" xmlns:r="http://schemas.openxmlformats.org/officeDocument/2006/relationships" xmlns:p="http://schemas.openxmlformats.org/presentationml/2006/main">
   <p:cSld>
     <p:spTree>
       <p:nvGrpSpPr>
@@ -601,7 +395,7 @@
         <p:nvSpPr>
           <p:cNvPr id="2" name="Slide Image Placeholder 1"/>
           <p:cNvSpPr>
-            <a:spLocks noGrp="1"/>
+            <a:spLocks noGrp="1" noRot="1" noChangeAspect="1"/>
           </p:cNvSpPr>
           <p:nvPr>
             <p:ph type="sldImg" idx="2"/>
@@ -616,7 +410,7 @@
             <a:spLocks noGrp="1"/>
           </p:cNvSpPr>
           <p:nvPr>
-            <p:ph type="body" idx="3" sz="quarter"/>
+            <p:ph type="body" sz="quarter" idx="3"/>
           </p:nvPr>
         </p:nvSpPr>
         <p:spPr/>
@@ -637,7 +431,7 @@
             <a:spLocks noGrp="1"/>
           </p:cNvSpPr>
           <p:nvPr>
-            <p:ph type="sldNum" idx="5" sz="quarter"/>
+            <p:ph type="sldNum" sz="quarter" idx="5"/>
           </p:nvPr>
         </p:nvSpPr>
         <p:spPr/>
@@ -651,7 +445,7 @@
 </file>
 
 <file path=ppt/notesSlides/notesSlide11.xml><?xml version="1.0" encoding="utf-8"?>
-<p:notes xmlns:a="http://schemas.openxmlformats.org/drawingml/2006/main" xmlns:p="http://schemas.openxmlformats.org/presentationml/2006/main" xmlns:r="http://schemas.openxmlformats.org/officeDocument/2006/relationships">
+<p:notes xmlns:a="http://schemas.openxmlformats.org/drawingml/2006/main" xmlns:r="http://schemas.openxmlformats.org/officeDocument/2006/relationships" xmlns:p="http://schemas.openxmlformats.org/presentationml/2006/main">
   <p:cSld>
     <p:spTree>
       <p:nvGrpSpPr>
@@ -671,7 +465,7 @@
         <p:nvSpPr>
           <p:cNvPr id="2" name="Slide Image Placeholder 1"/>
           <p:cNvSpPr>
-            <a:spLocks noGrp="1"/>
+            <a:spLocks noGrp="1" noRot="1" noChangeAspect="1"/>
           </p:cNvSpPr>
           <p:nvPr>
             <p:ph type="sldImg" idx="2"/>
@@ -686,7 +480,7 @@
             <a:spLocks noGrp="1"/>
           </p:cNvSpPr>
           <p:nvPr>
-            <p:ph type="body" idx="3" sz="quarter"/>
+            <p:ph type="body" sz="quarter" idx="3"/>
           </p:nvPr>
         </p:nvSpPr>
         <p:spPr/>
@@ -707,7 +501,7 @@
             <a:spLocks noGrp="1"/>
           </p:cNvSpPr>
           <p:nvPr>
-            <p:ph type="sldNum" idx="5" sz="quarter"/>
+            <p:ph type="sldNum" sz="quarter" idx="5"/>
           </p:nvPr>
         </p:nvSpPr>
         <p:spPr/>
@@ -721,7 +515,7 @@
 </file>
 
 <file path=ppt/notesSlides/notesSlide12.xml><?xml version="1.0" encoding="utf-8"?>
-<p:notes xmlns:a="http://schemas.openxmlformats.org/drawingml/2006/main" xmlns:p="http://schemas.openxmlformats.org/presentationml/2006/main" xmlns:r="http://schemas.openxmlformats.org/officeDocument/2006/relationships">
+<p:notes xmlns:a="http://schemas.openxmlformats.org/drawingml/2006/main" xmlns:r="http://schemas.openxmlformats.org/officeDocument/2006/relationships" xmlns:p="http://schemas.openxmlformats.org/presentationml/2006/main">
   <p:cSld>
     <p:spTree>
       <p:nvGrpSpPr>
@@ -741,7 +535,7 @@
         <p:nvSpPr>
           <p:cNvPr id="2" name="Slide Image Placeholder 1"/>
           <p:cNvSpPr>
-            <a:spLocks noGrp="1"/>
+            <a:spLocks noGrp="1" noRot="1" noChangeAspect="1"/>
           </p:cNvSpPr>
           <p:nvPr>
             <p:ph type="sldImg" idx="2"/>
@@ -756,7 +550,7 @@
             <a:spLocks noGrp="1"/>
           </p:cNvSpPr>
           <p:nvPr>
-            <p:ph type="body" idx="3" sz="quarter"/>
+            <p:ph type="body" sz="quarter" idx="3"/>
           </p:nvPr>
         </p:nvSpPr>
         <p:spPr/>
@@ -777,7 +571,7 @@
             <a:spLocks noGrp="1"/>
           </p:cNvSpPr>
           <p:nvPr>
-            <p:ph type="sldNum" idx="5" sz="quarter"/>
+            <p:ph type="sldNum" sz="quarter" idx="5"/>
           </p:nvPr>
         </p:nvSpPr>
         <p:spPr/>
@@ -791,7 +585,7 @@
 </file>
 
 <file path=ppt/notesSlides/notesSlide13.xml><?xml version="1.0" encoding="utf-8"?>
-<p:notes xmlns:a="http://schemas.openxmlformats.org/drawingml/2006/main" xmlns:p="http://schemas.openxmlformats.org/presentationml/2006/main" xmlns:r="http://schemas.openxmlformats.org/officeDocument/2006/relationships">
+<p:notes xmlns:a="http://schemas.openxmlformats.org/drawingml/2006/main" xmlns:r="http://schemas.openxmlformats.org/officeDocument/2006/relationships" xmlns:p="http://schemas.openxmlformats.org/presentationml/2006/main">
   <p:cSld>
     <p:spTree>
       <p:nvGrpSpPr>
@@ -811,7 +605,7 @@
         <p:nvSpPr>
           <p:cNvPr id="2" name="Slide Image Placeholder 1"/>
           <p:cNvSpPr>
-            <a:spLocks noGrp="1"/>
+            <a:spLocks noGrp="1" noRot="1" noChangeAspect="1"/>
           </p:cNvSpPr>
           <p:nvPr>
             <p:ph type="sldImg" idx="2"/>
@@ -826,7 +620,7 @@
             <a:spLocks noGrp="1"/>
           </p:cNvSpPr>
           <p:nvPr>
-            <p:ph type="body" idx="3" sz="quarter"/>
+            <p:ph type="body" sz="quarter" idx="3"/>
           </p:nvPr>
         </p:nvSpPr>
         <p:spPr/>
@@ -847,7 +641,7 @@
             <a:spLocks noGrp="1"/>
           </p:cNvSpPr>
           <p:nvPr>
-            <p:ph type="sldNum" idx="5" sz="quarter"/>
+            <p:ph type="sldNum" sz="quarter" idx="5"/>
           </p:nvPr>
         </p:nvSpPr>
         <p:spPr/>
@@ -861,7 +655,7 @@
 </file>
 
 <file path=ppt/notesSlides/notesSlide14.xml><?xml version="1.0" encoding="utf-8"?>
-<p:notes xmlns:a="http://schemas.openxmlformats.org/drawingml/2006/main" xmlns:p="http://schemas.openxmlformats.org/presentationml/2006/main" xmlns:r="http://schemas.openxmlformats.org/officeDocument/2006/relationships">
+<p:notes xmlns:a="http://schemas.openxmlformats.org/drawingml/2006/main" xmlns:r="http://schemas.openxmlformats.org/officeDocument/2006/relationships" xmlns:p="http://schemas.openxmlformats.org/presentationml/2006/main">
   <p:cSld>
     <p:spTree>
       <p:nvGrpSpPr>
@@ -881,7 +675,7 @@
         <p:nvSpPr>
           <p:cNvPr id="2" name="Slide Image Placeholder 1"/>
           <p:cNvSpPr>
-            <a:spLocks noGrp="1"/>
+            <a:spLocks noGrp="1" noRot="1" noChangeAspect="1"/>
           </p:cNvSpPr>
           <p:nvPr>
             <p:ph type="sldImg" idx="2"/>
@@ -896,7 +690,7 @@
             <a:spLocks noGrp="1"/>
           </p:cNvSpPr>
           <p:nvPr>
-            <p:ph type="body" idx="3" sz="quarter"/>
+            <p:ph type="body" sz="quarter" idx="3"/>
           </p:nvPr>
         </p:nvSpPr>
         <p:spPr/>
@@ -917,7 +711,7 @@
             <a:spLocks noGrp="1"/>
           </p:cNvSpPr>
           <p:nvPr>
-            <p:ph type="sldNum" idx="5" sz="quarter"/>
+            <p:ph type="sldNum" sz="quarter" idx="5"/>
           </p:nvPr>
         </p:nvSpPr>
         <p:spPr/>
@@ -931,7 +725,7 @@
 </file>
 
 <file path=ppt/notesSlides/notesSlide15.xml><?xml version="1.0" encoding="utf-8"?>
-<p:notes xmlns:a="http://schemas.openxmlformats.org/drawingml/2006/main" xmlns:p="http://schemas.openxmlformats.org/presentationml/2006/main" xmlns:r="http://schemas.openxmlformats.org/officeDocument/2006/relationships">
+<p:notes xmlns:a="http://schemas.openxmlformats.org/drawingml/2006/main" xmlns:r="http://schemas.openxmlformats.org/officeDocument/2006/relationships" xmlns:p="http://schemas.openxmlformats.org/presentationml/2006/main">
   <p:cSld>
     <p:spTree>
       <p:nvGrpSpPr>
@@ -951,7 +745,7 @@
         <p:nvSpPr>
           <p:cNvPr id="2" name="Slide Image Placeholder 1"/>
           <p:cNvSpPr>
-            <a:spLocks noGrp="1"/>
+            <a:spLocks noGrp="1" noRot="1" noChangeAspect="1"/>
           </p:cNvSpPr>
           <p:nvPr>
             <p:ph type="sldImg" idx="2"/>
@@ -966,7 +760,7 @@
             <a:spLocks noGrp="1"/>
           </p:cNvSpPr>
           <p:nvPr>
-            <p:ph type="body" idx="3" sz="quarter"/>
+            <p:ph type="body" sz="quarter" idx="3"/>
           </p:nvPr>
         </p:nvSpPr>
         <p:spPr/>
@@ -987,7 +781,7 @@
             <a:spLocks noGrp="1"/>
           </p:cNvSpPr>
           <p:nvPr>
-            <p:ph type="sldNum" idx="5" sz="quarter"/>
+            <p:ph type="sldNum" sz="quarter" idx="5"/>
           </p:nvPr>
         </p:nvSpPr>
         <p:spPr/>
@@ -1001,7 +795,7 @@
 </file>
 
 <file path=ppt/notesSlides/notesSlide16.xml><?xml version="1.0" encoding="utf-8"?>
-<p:notes xmlns:a="http://schemas.openxmlformats.org/drawingml/2006/main" xmlns:p="http://schemas.openxmlformats.org/presentationml/2006/main" xmlns:r="http://schemas.openxmlformats.org/officeDocument/2006/relationships">
+<p:notes xmlns:a="http://schemas.openxmlformats.org/drawingml/2006/main" xmlns:r="http://schemas.openxmlformats.org/officeDocument/2006/relationships" xmlns:p="http://schemas.openxmlformats.org/presentationml/2006/main">
   <p:cSld>
     <p:spTree>
       <p:nvGrpSpPr>
@@ -1021,7 +815,7 @@
         <p:nvSpPr>
           <p:cNvPr id="2" name="Slide Image Placeholder 1"/>
           <p:cNvSpPr>
-            <a:spLocks noGrp="1"/>
+            <a:spLocks noGrp="1" noRot="1" noChangeAspect="1"/>
           </p:cNvSpPr>
           <p:nvPr>
             <p:ph type="sldImg" idx="2"/>
@@ -1036,7 +830,7 @@
             <a:spLocks noGrp="1"/>
           </p:cNvSpPr>
           <p:nvPr>
-            <p:ph type="body" idx="3" sz="quarter"/>
+            <p:ph type="body" sz="quarter" idx="3"/>
           </p:nvPr>
         </p:nvSpPr>
         <p:spPr/>
@@ -1057,7 +851,7 @@
             <a:spLocks noGrp="1"/>
           </p:cNvSpPr>
           <p:nvPr>
-            <p:ph type="sldNum" idx="5" sz="quarter"/>
+            <p:ph type="sldNum" sz="quarter" idx="5"/>
           </p:nvPr>
         </p:nvSpPr>
         <p:spPr/>
@@ -1071,7 +865,7 @@
 </file>
 
 <file path=ppt/notesSlides/notesSlide17.xml><?xml version="1.0" encoding="utf-8"?>
-<p:notes xmlns:a="http://schemas.openxmlformats.org/drawingml/2006/main" xmlns:p="http://schemas.openxmlformats.org/presentationml/2006/main" xmlns:r="http://schemas.openxmlformats.org/officeDocument/2006/relationships">
+<p:notes xmlns:a="http://schemas.openxmlformats.org/drawingml/2006/main" xmlns:r="http://schemas.openxmlformats.org/officeDocument/2006/relationships" xmlns:p="http://schemas.openxmlformats.org/presentationml/2006/main">
   <p:cSld>
     <p:spTree>
       <p:nvGrpSpPr>
@@ -1091,7 +885,7 @@
         <p:nvSpPr>
           <p:cNvPr id="2" name="Slide Image Placeholder 1"/>
           <p:cNvSpPr>
-            <a:spLocks noGrp="1"/>
+            <a:spLocks noGrp="1" noRot="1" noChangeAspect="1"/>
           </p:cNvSpPr>
           <p:nvPr>
             <p:ph type="sldImg" idx="2"/>
@@ -1106,7 +900,7 @@
             <a:spLocks noGrp="1"/>
           </p:cNvSpPr>
           <p:nvPr>
-            <p:ph type="body" idx="3" sz="quarter"/>
+            <p:ph type="body" sz="quarter" idx="3"/>
           </p:nvPr>
         </p:nvSpPr>
         <p:spPr/>
@@ -1127,7 +921,7 @@
             <a:spLocks noGrp="1"/>
           </p:cNvSpPr>
           <p:nvPr>
-            <p:ph type="sldNum" idx="5" sz="quarter"/>
+            <p:ph type="sldNum" sz="quarter" idx="5"/>
           </p:nvPr>
         </p:nvSpPr>
         <p:spPr/>
@@ -1141,7 +935,7 @@
 </file>
 
 <file path=ppt/notesSlides/notesSlide18.xml><?xml version="1.0" encoding="utf-8"?>
-<p:notes xmlns:a="http://schemas.openxmlformats.org/drawingml/2006/main" xmlns:p="http://schemas.openxmlformats.org/presentationml/2006/main" xmlns:r="http://schemas.openxmlformats.org/officeDocument/2006/relationships">
+<p:notes xmlns:a="http://schemas.openxmlformats.org/drawingml/2006/main" xmlns:r="http://schemas.openxmlformats.org/officeDocument/2006/relationships" xmlns:p="http://schemas.openxmlformats.org/presentationml/2006/main">
   <p:cSld>
     <p:spTree>
       <p:nvGrpSpPr>
@@ -1161,7 +955,7 @@
         <p:nvSpPr>
           <p:cNvPr id="2" name="Slide Image Placeholder 1"/>
           <p:cNvSpPr>
-            <a:spLocks noGrp="1"/>
+            <a:spLocks noGrp="1" noRot="1" noChangeAspect="1"/>
           </p:cNvSpPr>
           <p:nvPr>
             <p:ph type="sldImg" idx="2"/>
@@ -1176,7 +970,7 @@
             <a:spLocks noGrp="1"/>
           </p:cNvSpPr>
           <p:nvPr>
-            <p:ph type="body" idx="3" sz="quarter"/>
+            <p:ph type="body" sz="quarter" idx="3"/>
           </p:nvPr>
         </p:nvSpPr>
         <p:spPr/>
@@ -1197,7 +991,7 @@
             <a:spLocks noGrp="1"/>
           </p:cNvSpPr>
           <p:nvPr>
-            <p:ph type="sldNum" idx="5" sz="quarter"/>
+            <p:ph type="sldNum" sz="quarter" idx="5"/>
           </p:nvPr>
         </p:nvSpPr>
         <p:spPr/>
@@ -1211,7 +1005,7 @@
 </file>
 
 <file path=ppt/notesSlides/notesSlide19.xml><?xml version="1.0" encoding="utf-8"?>
-<p:notes xmlns:a="http://schemas.openxmlformats.org/drawingml/2006/main" xmlns:p="http://schemas.openxmlformats.org/presentationml/2006/main" xmlns:r="http://schemas.openxmlformats.org/officeDocument/2006/relationships">
+<p:notes xmlns:a="http://schemas.openxmlformats.org/drawingml/2006/main" xmlns:r="http://schemas.openxmlformats.org/officeDocument/2006/relationships" xmlns:p="http://schemas.openxmlformats.org/presentationml/2006/main">
   <p:cSld>
     <p:spTree>
       <p:nvGrpSpPr>
@@ -1231,7 +1025,7 @@
         <p:nvSpPr>
           <p:cNvPr id="2" name="Slide Image Placeholder 1"/>
           <p:cNvSpPr>
-            <a:spLocks noGrp="1"/>
+            <a:spLocks noGrp="1" noRot="1" noChangeAspect="1"/>
           </p:cNvSpPr>
           <p:nvPr>
             <p:ph type="sldImg" idx="2"/>
@@ -1246,7 +1040,7 @@
             <a:spLocks noGrp="1"/>
           </p:cNvSpPr>
           <p:nvPr>
-            <p:ph type="body" idx="3" sz="quarter"/>
+            <p:ph type="body" sz="quarter" idx="3"/>
           </p:nvPr>
         </p:nvSpPr>
         <p:spPr/>
@@ -1267,7 +1061,7 @@
             <a:spLocks noGrp="1"/>
           </p:cNvSpPr>
           <p:nvPr>
-            <p:ph type="sldNum" idx="5" sz="quarter"/>
+            <p:ph type="sldNum" sz="quarter" idx="5"/>
           </p:nvPr>
         </p:nvSpPr>
         <p:spPr/>
@@ -1281,7 +1075,7 @@
 </file>
 
 <file path=ppt/notesSlides/notesSlide2.xml><?xml version="1.0" encoding="utf-8"?>
-<p:notes xmlns:a="http://schemas.openxmlformats.org/drawingml/2006/main" xmlns:p="http://schemas.openxmlformats.org/presentationml/2006/main" xmlns:r="http://schemas.openxmlformats.org/officeDocument/2006/relationships">
+<p:notes xmlns:a="http://schemas.openxmlformats.org/drawingml/2006/main" xmlns:r="http://schemas.openxmlformats.org/officeDocument/2006/relationships" xmlns:p="http://schemas.openxmlformats.org/presentationml/2006/main">
   <p:cSld>
     <p:spTree>
       <p:nvGrpSpPr>
@@ -1301,7 +1095,7 @@
         <p:nvSpPr>
           <p:cNvPr id="2" name="Slide Image Placeholder 1"/>
           <p:cNvSpPr>
-            <a:spLocks noGrp="1"/>
+            <a:spLocks noGrp="1" noRot="1" noChangeAspect="1"/>
           </p:cNvSpPr>
           <p:nvPr>
             <p:ph type="sldImg" idx="2"/>
@@ -1316,7 +1110,7 @@
             <a:spLocks noGrp="1"/>
           </p:cNvSpPr>
           <p:nvPr>
-            <p:ph type="body" idx="3" sz="quarter"/>
+            <p:ph type="body" sz="quarter" idx="3"/>
           </p:nvPr>
         </p:nvSpPr>
         <p:spPr/>
@@ -1337,7 +1131,7 @@
             <a:spLocks noGrp="1"/>
           </p:cNvSpPr>
           <p:nvPr>
-            <p:ph type="sldNum" idx="5" sz="quarter"/>
+            <p:ph type="sldNum" sz="quarter" idx="5"/>
           </p:nvPr>
         </p:nvSpPr>
         <p:spPr/>
@@ -1351,7 +1145,7 @@
 </file>
 
 <file path=ppt/notesSlides/notesSlide20.xml><?xml version="1.0" encoding="utf-8"?>
-<p:notes xmlns:a="http://schemas.openxmlformats.org/drawingml/2006/main" xmlns:p="http://schemas.openxmlformats.org/presentationml/2006/main" xmlns:r="http://schemas.openxmlformats.org/officeDocument/2006/relationships">
+<p:notes xmlns:a="http://schemas.openxmlformats.org/drawingml/2006/main" xmlns:r="http://schemas.openxmlformats.org/officeDocument/2006/relationships" xmlns:p="http://schemas.openxmlformats.org/presentationml/2006/main">
   <p:cSld>
     <p:spTree>
       <p:nvGrpSpPr>
@@ -1371,7 +1165,7 @@
         <p:nvSpPr>
           <p:cNvPr id="2" name="Slide Image Placeholder 1"/>
           <p:cNvSpPr>
-            <a:spLocks noGrp="1"/>
+            <a:spLocks noGrp="1" noRot="1" noChangeAspect="1"/>
           </p:cNvSpPr>
           <p:nvPr>
             <p:ph type="sldImg" idx="2"/>
@@ -1386,7 +1180,7 @@
             <a:spLocks noGrp="1"/>
           </p:cNvSpPr>
           <p:nvPr>
-            <p:ph type="body" idx="3" sz="quarter"/>
+            <p:ph type="body" sz="quarter" idx="3"/>
           </p:nvPr>
         </p:nvSpPr>
         <p:spPr/>
@@ -1407,7 +1201,7 @@
             <a:spLocks noGrp="1"/>
           </p:cNvSpPr>
           <p:nvPr>
-            <p:ph type="sldNum" idx="5" sz="quarter"/>
+            <p:ph type="sldNum" sz="quarter" idx="5"/>
           </p:nvPr>
         </p:nvSpPr>
         <p:spPr/>
@@ -1421,7 +1215,7 @@
 </file>
 
 <file path=ppt/notesSlides/notesSlide21.xml><?xml version="1.0" encoding="utf-8"?>
-<p:notes xmlns:a="http://schemas.openxmlformats.org/drawingml/2006/main" xmlns:p="http://schemas.openxmlformats.org/presentationml/2006/main" xmlns:r="http://schemas.openxmlformats.org/officeDocument/2006/relationships">
+<p:notes xmlns:a="http://schemas.openxmlformats.org/drawingml/2006/main" xmlns:r="http://schemas.openxmlformats.org/officeDocument/2006/relationships" xmlns:p="http://schemas.openxmlformats.org/presentationml/2006/main">
   <p:cSld>
     <p:spTree>
       <p:nvGrpSpPr>
@@ -1441,7 +1235,7 @@
         <p:nvSpPr>
           <p:cNvPr id="2" name="Slide Image Placeholder 1"/>
           <p:cNvSpPr>
-            <a:spLocks noGrp="1"/>
+            <a:spLocks noGrp="1" noRot="1" noChangeAspect="1"/>
           </p:cNvSpPr>
           <p:nvPr>
             <p:ph type="sldImg" idx="2"/>
@@ -1456,7 +1250,7 @@
             <a:spLocks noGrp="1"/>
           </p:cNvSpPr>
           <p:nvPr>
-            <p:ph type="body" idx="3" sz="quarter"/>
+            <p:ph type="body" sz="quarter" idx="3"/>
           </p:nvPr>
         </p:nvSpPr>
         <p:spPr/>
@@ -1477,7 +1271,7 @@
             <a:spLocks noGrp="1"/>
           </p:cNvSpPr>
           <p:nvPr>
-            <p:ph type="sldNum" idx="5" sz="quarter"/>
+            <p:ph type="sldNum" sz="quarter" idx="5"/>
           </p:nvPr>
         </p:nvSpPr>
         <p:spPr/>
@@ -1491,7 +1285,7 @@
 </file>
 
 <file path=ppt/notesSlides/notesSlide22.xml><?xml version="1.0" encoding="utf-8"?>
-<p:notes xmlns:a="http://schemas.openxmlformats.org/drawingml/2006/main" xmlns:p="http://schemas.openxmlformats.org/presentationml/2006/main" xmlns:r="http://schemas.openxmlformats.org/officeDocument/2006/relationships">
+<p:notes xmlns:a="http://schemas.openxmlformats.org/drawingml/2006/main" xmlns:r="http://schemas.openxmlformats.org/officeDocument/2006/relationships" xmlns:p="http://schemas.openxmlformats.org/presentationml/2006/main">
   <p:cSld>
     <p:spTree>
       <p:nvGrpSpPr>
@@ -1511,7 +1305,7 @@
         <p:nvSpPr>
           <p:cNvPr id="2" name="Slide Image Placeholder 1"/>
           <p:cNvSpPr>
-            <a:spLocks noGrp="1"/>
+            <a:spLocks noGrp="1" noRot="1" noChangeAspect="1"/>
           </p:cNvSpPr>
           <p:nvPr>
             <p:ph type="sldImg" idx="2"/>
@@ -1526,7 +1320,7 @@
             <a:spLocks noGrp="1"/>
           </p:cNvSpPr>
           <p:nvPr>
-            <p:ph type="body" idx="3" sz="quarter"/>
+            <p:ph type="body" sz="quarter" idx="3"/>
           </p:nvPr>
         </p:nvSpPr>
         <p:spPr/>
@@ -1547,7 +1341,7 @@
             <a:spLocks noGrp="1"/>
           </p:cNvSpPr>
           <p:nvPr>
-            <p:ph type="sldNum" idx="5" sz="quarter"/>
+            <p:ph type="sldNum" sz="quarter" idx="5"/>
           </p:nvPr>
         </p:nvSpPr>
         <p:spPr/>
@@ -1561,7 +1355,7 @@
 </file>
 
 <file path=ppt/notesSlides/notesSlide23.xml><?xml version="1.0" encoding="utf-8"?>
-<p:notes xmlns:a="http://schemas.openxmlformats.org/drawingml/2006/main" xmlns:p="http://schemas.openxmlformats.org/presentationml/2006/main" xmlns:r="http://schemas.openxmlformats.org/officeDocument/2006/relationships">
+<p:notes xmlns:a="http://schemas.openxmlformats.org/drawingml/2006/main" xmlns:r="http://schemas.openxmlformats.org/officeDocument/2006/relationships" xmlns:p="http://schemas.openxmlformats.org/presentationml/2006/main">
   <p:cSld>
     <p:spTree>
       <p:nvGrpSpPr>
@@ -1581,7 +1375,7 @@
         <p:nvSpPr>
           <p:cNvPr id="2" name="Slide Image Placeholder 1"/>
           <p:cNvSpPr>
-            <a:spLocks noGrp="1"/>
+            <a:spLocks noGrp="1" noRot="1" noChangeAspect="1"/>
           </p:cNvSpPr>
           <p:nvPr>
             <p:ph type="sldImg" idx="2"/>
@@ -1596,7 +1390,7 @@
             <a:spLocks noGrp="1"/>
           </p:cNvSpPr>
           <p:nvPr>
-            <p:ph type="body" idx="3" sz="quarter"/>
+            <p:ph type="body" sz="quarter" idx="3"/>
           </p:nvPr>
         </p:nvSpPr>
         <p:spPr/>
@@ -1617,7 +1411,7 @@
             <a:spLocks noGrp="1"/>
           </p:cNvSpPr>
           <p:nvPr>
-            <p:ph type="sldNum" idx="5" sz="quarter"/>
+            <p:ph type="sldNum" sz="quarter" idx="5"/>
           </p:nvPr>
         </p:nvSpPr>
         <p:spPr/>
@@ -1631,7 +1425,7 @@
 </file>
 
 <file path=ppt/notesSlides/notesSlide24.xml><?xml version="1.0" encoding="utf-8"?>
-<p:notes xmlns:a="http://schemas.openxmlformats.org/drawingml/2006/main" xmlns:p="http://schemas.openxmlformats.org/presentationml/2006/main" xmlns:r="http://schemas.openxmlformats.org/officeDocument/2006/relationships">
+<p:notes xmlns:a="http://schemas.openxmlformats.org/drawingml/2006/main" xmlns:r="http://schemas.openxmlformats.org/officeDocument/2006/relationships" xmlns:p="http://schemas.openxmlformats.org/presentationml/2006/main">
   <p:cSld>
     <p:spTree>
       <p:nvGrpSpPr>
@@ -1651,7 +1445,7 @@
         <p:nvSpPr>
           <p:cNvPr id="2" name="Slide Image Placeholder 1"/>
           <p:cNvSpPr>
-            <a:spLocks noGrp="1"/>
+            <a:spLocks noGrp="1" noRot="1" noChangeAspect="1"/>
           </p:cNvSpPr>
           <p:nvPr>
             <p:ph type="sldImg" idx="2"/>
@@ -1666,7 +1460,7 @@
             <a:spLocks noGrp="1"/>
           </p:cNvSpPr>
           <p:nvPr>
-            <p:ph type="body" idx="3" sz="quarter"/>
+            <p:ph type="body" sz="quarter" idx="3"/>
           </p:nvPr>
         </p:nvSpPr>
         <p:spPr/>
@@ -1687,7 +1481,7 @@
             <a:spLocks noGrp="1"/>
           </p:cNvSpPr>
           <p:nvPr>
-            <p:ph type="sldNum" idx="5" sz="quarter"/>
+            <p:ph type="sldNum" sz="quarter" idx="5"/>
           </p:nvPr>
         </p:nvSpPr>
         <p:spPr/>
@@ -1701,7 +1495,7 @@
 </file>
 
 <file path=ppt/notesSlides/notesSlide25.xml><?xml version="1.0" encoding="utf-8"?>
-<p:notes xmlns:a="http://schemas.openxmlformats.org/drawingml/2006/main" xmlns:p="http://schemas.openxmlformats.org/presentationml/2006/main" xmlns:r="http://schemas.openxmlformats.org/officeDocument/2006/relationships">
+<p:notes xmlns:a="http://schemas.openxmlformats.org/drawingml/2006/main" xmlns:r="http://schemas.openxmlformats.org/officeDocument/2006/relationships" xmlns:p="http://schemas.openxmlformats.org/presentationml/2006/main">
   <p:cSld>
     <p:spTree>
       <p:nvGrpSpPr>
@@ -1721,7 +1515,7 @@
         <p:nvSpPr>
           <p:cNvPr id="2" name="Slide Image Placeholder 1"/>
           <p:cNvSpPr>
-            <a:spLocks noGrp="1"/>
+            <a:spLocks noGrp="1" noRot="1" noChangeAspect="1"/>
           </p:cNvSpPr>
           <p:nvPr>
             <p:ph type="sldImg" idx="2"/>
@@ -1736,7 +1530,7 @@
             <a:spLocks noGrp="1"/>
           </p:cNvSpPr>
           <p:nvPr>
-            <p:ph type="body" idx="3" sz="quarter"/>
+            <p:ph type="body" sz="quarter" idx="3"/>
           </p:nvPr>
         </p:nvSpPr>
         <p:spPr/>
@@ -1757,7 +1551,7 @@
             <a:spLocks noGrp="1"/>
           </p:cNvSpPr>
           <p:nvPr>
-            <p:ph type="sldNum" idx="5" sz="quarter"/>
+            <p:ph type="sldNum" sz="quarter" idx="5"/>
           </p:nvPr>
         </p:nvSpPr>
         <p:spPr/>
@@ -1771,7 +1565,7 @@
 </file>
 
 <file path=ppt/notesSlides/notesSlide26.xml><?xml version="1.0" encoding="utf-8"?>
-<p:notes xmlns:a="http://schemas.openxmlformats.org/drawingml/2006/main" xmlns:p="http://schemas.openxmlformats.org/presentationml/2006/main" xmlns:r="http://schemas.openxmlformats.org/officeDocument/2006/relationships">
+<p:notes xmlns:a="http://schemas.openxmlformats.org/drawingml/2006/main" xmlns:r="http://schemas.openxmlformats.org/officeDocument/2006/relationships" xmlns:p="http://schemas.openxmlformats.org/presentationml/2006/main">
   <p:cSld>
     <p:spTree>
       <p:nvGrpSpPr>
@@ -1791,7 +1585,7 @@
         <p:nvSpPr>
           <p:cNvPr id="2" name="Slide Image Placeholder 1"/>
           <p:cNvSpPr>
-            <a:spLocks noGrp="1"/>
+            <a:spLocks noGrp="1" noRot="1" noChangeAspect="1"/>
           </p:cNvSpPr>
           <p:nvPr>
             <p:ph type="sldImg" idx="2"/>
@@ -1806,7 +1600,7 @@
             <a:spLocks noGrp="1"/>
           </p:cNvSpPr>
           <p:nvPr>
-            <p:ph type="body" idx="3" sz="quarter"/>
+            <p:ph type="body" sz="quarter" idx="3"/>
           </p:nvPr>
         </p:nvSpPr>
         <p:spPr/>
@@ -1827,7 +1621,7 @@
             <a:spLocks noGrp="1"/>
           </p:cNvSpPr>
           <p:nvPr>
-            <p:ph type="sldNum" idx="5" sz="quarter"/>
+            <p:ph type="sldNum" sz="quarter" idx="5"/>
           </p:nvPr>
         </p:nvSpPr>
         <p:spPr/>
@@ -1841,7 +1635,7 @@
 </file>
 
 <file path=ppt/notesSlides/notesSlide27.xml><?xml version="1.0" encoding="utf-8"?>
-<p:notes xmlns:a="http://schemas.openxmlformats.org/drawingml/2006/main" xmlns:p="http://schemas.openxmlformats.org/presentationml/2006/main" xmlns:r="http://schemas.openxmlformats.org/officeDocument/2006/relationships">
+<p:notes xmlns:a="http://schemas.openxmlformats.org/drawingml/2006/main" xmlns:r="http://schemas.openxmlformats.org/officeDocument/2006/relationships" xmlns:p="http://schemas.openxmlformats.org/presentationml/2006/main">
   <p:cSld>
     <p:spTree>
       <p:nvGrpSpPr>
@@ -1861,7 +1655,7 @@
         <p:nvSpPr>
           <p:cNvPr id="2" name="Slide Image Placeholder 1"/>
           <p:cNvSpPr>
-            <a:spLocks noGrp="1"/>
+            <a:spLocks noGrp="1" noRot="1" noChangeAspect="1"/>
           </p:cNvSpPr>
           <p:nvPr>
             <p:ph type="sldImg" idx="2"/>
@@ -1876,7 +1670,7 @@
             <a:spLocks noGrp="1"/>
           </p:cNvSpPr>
           <p:nvPr>
-            <p:ph type="body" idx="3" sz="quarter"/>
+            <p:ph type="body" sz="quarter" idx="3"/>
           </p:nvPr>
         </p:nvSpPr>
         <p:spPr/>
@@ -1897,7 +1691,7 @@
             <a:spLocks noGrp="1"/>
           </p:cNvSpPr>
           <p:nvPr>
-            <p:ph type="sldNum" idx="5" sz="quarter"/>
+            <p:ph type="sldNum" sz="quarter" idx="5"/>
           </p:nvPr>
         </p:nvSpPr>
         <p:spPr/>
@@ -1911,7 +1705,7 @@
 </file>
 
 <file path=ppt/notesSlides/notesSlide28.xml><?xml version="1.0" encoding="utf-8"?>
-<p:notes xmlns:a="http://schemas.openxmlformats.org/drawingml/2006/main" xmlns:p="http://schemas.openxmlformats.org/presentationml/2006/main" xmlns:r="http://schemas.openxmlformats.org/officeDocument/2006/relationships">
+<p:notes xmlns:a="http://schemas.openxmlformats.org/drawingml/2006/main" xmlns:r="http://schemas.openxmlformats.org/officeDocument/2006/relationships" xmlns:p="http://schemas.openxmlformats.org/presentationml/2006/main">
   <p:cSld>
     <p:spTree>
       <p:nvGrpSpPr>
@@ -1931,7 +1725,7 @@
         <p:nvSpPr>
           <p:cNvPr id="2" name="Slide Image Placeholder 1"/>
           <p:cNvSpPr>
-            <a:spLocks noGrp="1"/>
+            <a:spLocks noGrp="1" noRot="1" noChangeAspect="1"/>
           </p:cNvSpPr>
           <p:nvPr>
             <p:ph type="sldImg" idx="2"/>
@@ -1946,7 +1740,7 @@
             <a:spLocks noGrp="1"/>
           </p:cNvSpPr>
           <p:nvPr>
-            <p:ph type="body" idx="3" sz="quarter"/>
+            <p:ph type="body" sz="quarter" idx="3"/>
           </p:nvPr>
         </p:nvSpPr>
         <p:spPr/>
@@ -1967,7 +1761,7 @@
             <a:spLocks noGrp="1"/>
           </p:cNvSpPr>
           <p:nvPr>
-            <p:ph type="sldNum" idx="5" sz="quarter"/>
+            <p:ph type="sldNum" sz="quarter" idx="5"/>
           </p:nvPr>
         </p:nvSpPr>
         <p:spPr/>
@@ -1981,7 +1775,7 @@
 </file>
 
 <file path=ppt/notesSlides/notesSlide29.xml><?xml version="1.0" encoding="utf-8"?>
-<p:notes xmlns:a="http://schemas.openxmlformats.org/drawingml/2006/main" xmlns:p="http://schemas.openxmlformats.org/presentationml/2006/main" xmlns:r="http://schemas.openxmlformats.org/officeDocument/2006/relationships">
+<p:notes xmlns:a="http://schemas.openxmlformats.org/drawingml/2006/main" xmlns:r="http://schemas.openxmlformats.org/officeDocument/2006/relationships" xmlns:p="http://schemas.openxmlformats.org/presentationml/2006/main">
   <p:cSld>
     <p:spTree>
       <p:nvGrpSpPr>
@@ -2001,7 +1795,7 @@
         <p:nvSpPr>
           <p:cNvPr id="2" name="Slide Image Placeholder 1"/>
           <p:cNvSpPr>
-            <a:spLocks noGrp="1"/>
+            <a:spLocks noGrp="1" noRot="1" noChangeAspect="1"/>
           </p:cNvSpPr>
           <p:nvPr>
             <p:ph type="sldImg" idx="2"/>
@@ -2016,7 +1810,7 @@
             <a:spLocks noGrp="1"/>
           </p:cNvSpPr>
           <p:nvPr>
-            <p:ph type="body" idx="3" sz="quarter"/>
+            <p:ph type="body" sz="quarter" idx="3"/>
           </p:nvPr>
         </p:nvSpPr>
         <p:spPr/>
@@ -2037,7 +1831,7 @@
             <a:spLocks noGrp="1"/>
           </p:cNvSpPr>
           <p:nvPr>
-            <p:ph type="sldNum" idx="5" sz="quarter"/>
+            <p:ph type="sldNum" sz="quarter" idx="5"/>
           </p:nvPr>
         </p:nvSpPr>
         <p:spPr/>
@@ -2051,7 +1845,7 @@
 </file>
 
 <file path=ppt/notesSlides/notesSlide3.xml><?xml version="1.0" encoding="utf-8"?>
-<p:notes xmlns:a="http://schemas.openxmlformats.org/drawingml/2006/main" xmlns:p="http://schemas.openxmlformats.org/presentationml/2006/main" xmlns:r="http://schemas.openxmlformats.org/officeDocument/2006/relationships">
+<p:notes xmlns:a="http://schemas.openxmlformats.org/drawingml/2006/main" xmlns:r="http://schemas.openxmlformats.org/officeDocument/2006/relationships" xmlns:p="http://schemas.openxmlformats.org/presentationml/2006/main">
   <p:cSld>
     <p:spTree>
       <p:nvGrpSpPr>
@@ -2071,7 +1865,7 @@
         <p:nvSpPr>
           <p:cNvPr id="2" name="Slide Image Placeholder 1"/>
           <p:cNvSpPr>
-            <a:spLocks noGrp="1"/>
+            <a:spLocks noGrp="1" noRot="1" noChangeAspect="1"/>
           </p:cNvSpPr>
           <p:nvPr>
             <p:ph type="sldImg" idx="2"/>
@@ -2086,7 +1880,7 @@
             <a:spLocks noGrp="1"/>
           </p:cNvSpPr>
           <p:nvPr>
-            <p:ph type="body" idx="3" sz="quarter"/>
+            <p:ph type="body" sz="quarter" idx="3"/>
           </p:nvPr>
         </p:nvSpPr>
         <p:spPr/>
@@ -2107,7 +1901,7 @@
             <a:spLocks noGrp="1"/>
           </p:cNvSpPr>
           <p:nvPr>
-            <p:ph type="sldNum" idx="5" sz="quarter"/>
+            <p:ph type="sldNum" sz="quarter" idx="5"/>
           </p:nvPr>
         </p:nvSpPr>
         <p:spPr/>
@@ -2121,7 +1915,7 @@
 </file>
 
 <file path=ppt/notesSlides/notesSlide30.xml><?xml version="1.0" encoding="utf-8"?>
-<p:notes xmlns:a="http://schemas.openxmlformats.org/drawingml/2006/main" xmlns:p="http://schemas.openxmlformats.org/presentationml/2006/main" xmlns:r="http://schemas.openxmlformats.org/officeDocument/2006/relationships">
+<p:notes xmlns:a="http://schemas.openxmlformats.org/drawingml/2006/main" xmlns:r="http://schemas.openxmlformats.org/officeDocument/2006/relationships" xmlns:p="http://schemas.openxmlformats.org/presentationml/2006/main">
   <p:cSld>
     <p:spTree>
       <p:nvGrpSpPr>
@@ -2141,7 +1935,7 @@
         <p:nvSpPr>
           <p:cNvPr id="2" name="Slide Image Placeholder 1"/>
           <p:cNvSpPr>
-            <a:spLocks noGrp="1"/>
+            <a:spLocks noGrp="1" noRot="1" noChangeAspect="1"/>
           </p:cNvSpPr>
           <p:nvPr>
             <p:ph type="sldImg" idx="2"/>
@@ -2156,7 +1950,7 @@
             <a:spLocks noGrp="1"/>
           </p:cNvSpPr>
           <p:nvPr>
-            <p:ph type="body" idx="3" sz="quarter"/>
+            <p:ph type="body" sz="quarter" idx="3"/>
           </p:nvPr>
         </p:nvSpPr>
         <p:spPr/>
@@ -2177,7 +1971,7 @@
             <a:spLocks noGrp="1"/>
           </p:cNvSpPr>
           <p:nvPr>
-            <p:ph type="sldNum" idx="5" sz="quarter"/>
+            <p:ph type="sldNum" sz="quarter" idx="5"/>
           </p:nvPr>
         </p:nvSpPr>
         <p:spPr/>
@@ -2191,7 +1985,7 @@
 </file>
 
 <file path=ppt/notesSlides/notesSlide31.xml><?xml version="1.0" encoding="utf-8"?>
-<p:notes xmlns:a="http://schemas.openxmlformats.org/drawingml/2006/main" xmlns:p="http://schemas.openxmlformats.org/presentationml/2006/main" xmlns:r="http://schemas.openxmlformats.org/officeDocument/2006/relationships">
+<p:notes xmlns:a="http://schemas.openxmlformats.org/drawingml/2006/main" xmlns:r="http://schemas.openxmlformats.org/officeDocument/2006/relationships" xmlns:p="http://schemas.openxmlformats.org/presentationml/2006/main">
   <p:cSld>
     <p:spTree>
       <p:nvGrpSpPr>
@@ -2211,7 +2005,7 @@
         <p:nvSpPr>
           <p:cNvPr id="2" name="Slide Image Placeholder 1"/>
           <p:cNvSpPr>
-            <a:spLocks noGrp="1"/>
+            <a:spLocks noGrp="1" noRot="1" noChangeAspect="1"/>
           </p:cNvSpPr>
           <p:nvPr>
             <p:ph type="sldImg" idx="2"/>
@@ -2226,7 +2020,7 @@
             <a:spLocks noGrp="1"/>
           </p:cNvSpPr>
           <p:nvPr>
-            <p:ph type="body" idx="3" sz="quarter"/>
+            <p:ph type="body" sz="quarter" idx="3"/>
           </p:nvPr>
         </p:nvSpPr>
         <p:spPr/>
@@ -2247,7 +2041,7 @@
             <a:spLocks noGrp="1"/>
           </p:cNvSpPr>
           <p:nvPr>
-            <p:ph type="sldNum" idx="5" sz="quarter"/>
+            <p:ph type="sldNum" sz="quarter" idx="5"/>
           </p:nvPr>
         </p:nvSpPr>
         <p:spPr/>
@@ -2261,7 +2055,7 @@
 </file>
 
 <file path=ppt/notesSlides/notesSlide32.xml><?xml version="1.0" encoding="utf-8"?>
-<p:notes xmlns:a="http://schemas.openxmlformats.org/drawingml/2006/main" xmlns:p="http://schemas.openxmlformats.org/presentationml/2006/main" xmlns:r="http://schemas.openxmlformats.org/officeDocument/2006/relationships">
+<p:notes xmlns:a="http://schemas.openxmlformats.org/drawingml/2006/main" xmlns:r="http://schemas.openxmlformats.org/officeDocument/2006/relationships" xmlns:p="http://schemas.openxmlformats.org/presentationml/2006/main">
   <p:cSld>
     <p:spTree>
       <p:nvGrpSpPr>
@@ -2281,7 +2075,7 @@
         <p:nvSpPr>
           <p:cNvPr id="2" name="Slide Image Placeholder 1"/>
           <p:cNvSpPr>
-            <a:spLocks noGrp="1"/>
+            <a:spLocks noGrp="1" noRot="1" noChangeAspect="1"/>
           </p:cNvSpPr>
           <p:nvPr>
             <p:ph type="sldImg" idx="2"/>
@@ -2296,7 +2090,7 @@
             <a:spLocks noGrp="1"/>
           </p:cNvSpPr>
           <p:nvPr>
-            <p:ph type="body" idx="3" sz="quarter"/>
+            <p:ph type="body" sz="quarter" idx="3"/>
           </p:nvPr>
         </p:nvSpPr>
         <p:spPr/>
@@ -2317,7 +2111,7 @@
             <a:spLocks noGrp="1"/>
           </p:cNvSpPr>
           <p:nvPr>
-            <p:ph type="sldNum" idx="5" sz="quarter"/>
+            <p:ph type="sldNum" sz="quarter" idx="5"/>
           </p:nvPr>
         </p:nvSpPr>
         <p:spPr/>
@@ -2331,7 +2125,7 @@
 </file>
 
 <file path=ppt/notesSlides/notesSlide33.xml><?xml version="1.0" encoding="utf-8"?>
-<p:notes xmlns:a="http://schemas.openxmlformats.org/drawingml/2006/main" xmlns:p="http://schemas.openxmlformats.org/presentationml/2006/main" xmlns:r="http://schemas.openxmlformats.org/officeDocument/2006/relationships">
+<p:notes xmlns:a="http://schemas.openxmlformats.org/drawingml/2006/main" xmlns:r="http://schemas.openxmlformats.org/officeDocument/2006/relationships" xmlns:p="http://schemas.openxmlformats.org/presentationml/2006/main">
   <p:cSld>
     <p:spTree>
       <p:nvGrpSpPr>
@@ -2351,7 +2145,7 @@
         <p:nvSpPr>
           <p:cNvPr id="2" name="Slide Image Placeholder 1"/>
           <p:cNvSpPr>
-            <a:spLocks noGrp="1"/>
+            <a:spLocks noGrp="1" noRot="1" noChangeAspect="1"/>
           </p:cNvSpPr>
           <p:nvPr>
             <p:ph type="sldImg" idx="2"/>
@@ -2366,7 +2160,7 @@
             <a:spLocks noGrp="1"/>
           </p:cNvSpPr>
           <p:nvPr>
-            <p:ph type="body" idx="3" sz="quarter"/>
+            <p:ph type="body" sz="quarter" idx="3"/>
           </p:nvPr>
         </p:nvSpPr>
         <p:spPr/>
@@ -2387,7 +2181,7 @@
             <a:spLocks noGrp="1"/>
           </p:cNvSpPr>
           <p:nvPr>
-            <p:ph type="sldNum" idx="5" sz="quarter"/>
+            <p:ph type="sldNum" sz="quarter" idx="5"/>
           </p:nvPr>
         </p:nvSpPr>
         <p:spPr/>
@@ -2401,7 +2195,7 @@
 </file>
 
 <file path=ppt/notesSlides/notesSlide34.xml><?xml version="1.0" encoding="utf-8"?>
-<p:notes xmlns:a="http://schemas.openxmlformats.org/drawingml/2006/main" xmlns:p="http://schemas.openxmlformats.org/presentationml/2006/main" xmlns:r="http://schemas.openxmlformats.org/officeDocument/2006/relationships">
+<p:notes xmlns:a="http://schemas.openxmlformats.org/drawingml/2006/main" xmlns:r="http://schemas.openxmlformats.org/officeDocument/2006/relationships" xmlns:p="http://schemas.openxmlformats.org/presentationml/2006/main">
   <p:cSld>
     <p:spTree>
       <p:nvGrpSpPr>
@@ -2421,7 +2215,7 @@
         <p:nvSpPr>
           <p:cNvPr id="2" name="Slide Image Placeholder 1"/>
           <p:cNvSpPr>
-            <a:spLocks noGrp="1"/>
+            <a:spLocks noGrp="1" noRot="1" noChangeAspect="1"/>
           </p:cNvSpPr>
           <p:nvPr>
             <p:ph type="sldImg" idx="2"/>
@@ -2436,7 +2230,7 @@
             <a:spLocks noGrp="1"/>
           </p:cNvSpPr>
           <p:nvPr>
-            <p:ph type="body" idx="3" sz="quarter"/>
+            <p:ph type="body" sz="quarter" idx="3"/>
           </p:nvPr>
         </p:nvSpPr>
         <p:spPr/>
@@ -2457,7 +2251,7 @@
             <a:spLocks noGrp="1"/>
           </p:cNvSpPr>
           <p:nvPr>
-            <p:ph type="sldNum" idx="5" sz="quarter"/>
+            <p:ph type="sldNum" sz="quarter" idx="5"/>
           </p:nvPr>
         </p:nvSpPr>
         <p:spPr/>
@@ -2471,7 +2265,7 @@
 </file>
 
 <file path=ppt/notesSlides/notesSlide35.xml><?xml version="1.0" encoding="utf-8"?>
-<p:notes xmlns:a="http://schemas.openxmlformats.org/drawingml/2006/main" xmlns:p="http://schemas.openxmlformats.org/presentationml/2006/main" xmlns:r="http://schemas.openxmlformats.org/officeDocument/2006/relationships">
+<p:notes xmlns:a="http://schemas.openxmlformats.org/drawingml/2006/main" xmlns:r="http://schemas.openxmlformats.org/officeDocument/2006/relationships" xmlns:p="http://schemas.openxmlformats.org/presentationml/2006/main">
   <p:cSld>
     <p:spTree>
       <p:nvGrpSpPr>
@@ -2491,7 +2285,7 @@
         <p:nvSpPr>
           <p:cNvPr id="2" name="Slide Image Placeholder 1"/>
           <p:cNvSpPr>
-            <a:spLocks noGrp="1"/>
+            <a:spLocks noGrp="1" noRot="1" noChangeAspect="1"/>
           </p:cNvSpPr>
           <p:nvPr>
             <p:ph type="sldImg" idx="2"/>
@@ -2506,7 +2300,7 @@
             <a:spLocks noGrp="1"/>
           </p:cNvSpPr>
           <p:nvPr>
-            <p:ph type="body" idx="3" sz="quarter"/>
+            <p:ph type="body" sz="quarter" idx="3"/>
           </p:nvPr>
         </p:nvSpPr>
         <p:spPr/>
@@ -2527,7 +2321,7 @@
             <a:spLocks noGrp="1"/>
           </p:cNvSpPr>
           <p:nvPr>
-            <p:ph type="sldNum" idx="5" sz="quarter"/>
+            <p:ph type="sldNum" sz="quarter" idx="5"/>
           </p:nvPr>
         </p:nvSpPr>
         <p:spPr/>
@@ -2541,7 +2335,7 @@
 </file>
 
 <file path=ppt/notesSlides/notesSlide36.xml><?xml version="1.0" encoding="utf-8"?>
-<p:notes xmlns:a="http://schemas.openxmlformats.org/drawingml/2006/main" xmlns:p="http://schemas.openxmlformats.org/presentationml/2006/main" xmlns:r="http://schemas.openxmlformats.org/officeDocument/2006/relationships">
+<p:notes xmlns:a="http://schemas.openxmlformats.org/drawingml/2006/main" xmlns:r="http://schemas.openxmlformats.org/officeDocument/2006/relationships" xmlns:p="http://schemas.openxmlformats.org/presentationml/2006/main">
   <p:cSld>
     <p:spTree>
       <p:nvGrpSpPr>
@@ -2561,7 +2355,7 @@
         <p:nvSpPr>
           <p:cNvPr id="2" name="Slide Image Placeholder 1"/>
           <p:cNvSpPr>
-            <a:spLocks noGrp="1"/>
+            <a:spLocks noGrp="1" noRot="1" noChangeAspect="1"/>
           </p:cNvSpPr>
           <p:nvPr>
             <p:ph type="sldImg" idx="2"/>
@@ -2576,7 +2370,7 @@
             <a:spLocks noGrp="1"/>
           </p:cNvSpPr>
           <p:nvPr>
-            <p:ph type="body" idx="3" sz="quarter"/>
+            <p:ph type="body" sz="quarter" idx="3"/>
           </p:nvPr>
         </p:nvSpPr>
         <p:spPr/>
@@ -2597,7 +2391,7 @@
             <a:spLocks noGrp="1"/>
           </p:cNvSpPr>
           <p:nvPr>
-            <p:ph type="sldNum" idx="5" sz="quarter"/>
+            <p:ph type="sldNum" sz="quarter" idx="5"/>
           </p:nvPr>
         </p:nvSpPr>
         <p:spPr/>
@@ -2611,7 +2405,7 @@
 </file>
 
 <file path=ppt/notesSlides/notesSlide37.xml><?xml version="1.0" encoding="utf-8"?>
-<p:notes xmlns:a="http://schemas.openxmlformats.org/drawingml/2006/main" xmlns:p="http://schemas.openxmlformats.org/presentationml/2006/main" xmlns:r="http://schemas.openxmlformats.org/officeDocument/2006/relationships">
+<p:notes xmlns:a="http://schemas.openxmlformats.org/drawingml/2006/main" xmlns:r="http://schemas.openxmlformats.org/officeDocument/2006/relationships" xmlns:p="http://schemas.openxmlformats.org/presentationml/2006/main">
   <p:cSld>
     <p:spTree>
       <p:nvGrpSpPr>
@@ -2631,7 +2425,7 @@
         <p:nvSpPr>
           <p:cNvPr id="2" name="Slide Image Placeholder 1"/>
           <p:cNvSpPr>
-            <a:spLocks noGrp="1"/>
+            <a:spLocks noGrp="1" noRot="1" noChangeAspect="1"/>
           </p:cNvSpPr>
           <p:nvPr>
             <p:ph type="sldImg" idx="2"/>
@@ -2646,7 +2440,7 @@
             <a:spLocks noGrp="1"/>
           </p:cNvSpPr>
           <p:nvPr>
-            <p:ph type="body" idx="3" sz="quarter"/>
+            <p:ph type="body" sz="quarter" idx="3"/>
           </p:nvPr>
         </p:nvSpPr>
         <p:spPr/>
@@ -2667,7 +2461,7 @@
             <a:spLocks noGrp="1"/>
           </p:cNvSpPr>
           <p:nvPr>
-            <p:ph type="sldNum" idx="5" sz="quarter"/>
+            <p:ph type="sldNum" sz="quarter" idx="5"/>
           </p:nvPr>
         </p:nvSpPr>
         <p:spPr/>
@@ -2681,7 +2475,7 @@
 </file>
 
 <file path=ppt/notesSlides/notesSlide38.xml><?xml version="1.0" encoding="utf-8"?>
-<p:notes xmlns:a="http://schemas.openxmlformats.org/drawingml/2006/main" xmlns:p="http://schemas.openxmlformats.org/presentationml/2006/main" xmlns:r="http://schemas.openxmlformats.org/officeDocument/2006/relationships">
+<p:notes xmlns:a="http://schemas.openxmlformats.org/drawingml/2006/main" xmlns:r="http://schemas.openxmlformats.org/officeDocument/2006/relationships" xmlns:p="http://schemas.openxmlformats.org/presentationml/2006/main">
   <p:cSld>
     <p:spTree>
       <p:nvGrpSpPr>
@@ -2701,7 +2495,7 @@
         <p:nvSpPr>
           <p:cNvPr id="2" name="Slide Image Placeholder 1"/>
           <p:cNvSpPr>
-            <a:spLocks noGrp="1"/>
+            <a:spLocks noGrp="1" noRot="1" noChangeAspect="1"/>
           </p:cNvSpPr>
           <p:nvPr>
             <p:ph type="sldImg" idx="2"/>
@@ -2716,7 +2510,7 @@
             <a:spLocks noGrp="1"/>
           </p:cNvSpPr>
           <p:nvPr>
-            <p:ph type="body" idx="3" sz="quarter"/>
+            <p:ph type="body" sz="quarter" idx="3"/>
           </p:nvPr>
         </p:nvSpPr>
         <p:spPr/>
@@ -2737,7 +2531,7 @@
             <a:spLocks noGrp="1"/>
           </p:cNvSpPr>
           <p:nvPr>
-            <p:ph type="sldNum" idx="5" sz="quarter"/>
+            <p:ph type="sldNum" sz="quarter" idx="5"/>
           </p:nvPr>
         </p:nvSpPr>
         <p:spPr/>
@@ -2751,7 +2545,7 @@
 </file>
 
 <file path=ppt/notesSlides/notesSlide39.xml><?xml version="1.0" encoding="utf-8"?>
-<p:notes xmlns:a="http://schemas.openxmlformats.org/drawingml/2006/main" xmlns:p="http://schemas.openxmlformats.org/presentationml/2006/main" xmlns:r="http://schemas.openxmlformats.org/officeDocument/2006/relationships">
+<p:notes xmlns:a="http://schemas.openxmlformats.org/drawingml/2006/main" xmlns:r="http://schemas.openxmlformats.org/officeDocument/2006/relationships" xmlns:p="http://schemas.openxmlformats.org/presentationml/2006/main">
   <p:cSld>
     <p:spTree>
       <p:nvGrpSpPr>
@@ -2771,7 +2565,7 @@
         <p:nvSpPr>
           <p:cNvPr id="2" name="Slide Image Placeholder 1"/>
           <p:cNvSpPr>
-            <a:spLocks noGrp="1"/>
+            <a:spLocks noGrp="1" noRot="1" noChangeAspect="1"/>
           </p:cNvSpPr>
           <p:nvPr>
             <p:ph type="sldImg" idx="2"/>
@@ -2786,7 +2580,7 @@
             <a:spLocks noGrp="1"/>
           </p:cNvSpPr>
           <p:nvPr>
-            <p:ph type="body" idx="3" sz="quarter"/>
+            <p:ph type="body" sz="quarter" idx="3"/>
           </p:nvPr>
         </p:nvSpPr>
         <p:spPr/>
@@ -2807,7 +2601,7 @@
             <a:spLocks noGrp="1"/>
           </p:cNvSpPr>
           <p:nvPr>
-            <p:ph type="sldNum" idx="5" sz="quarter"/>
+            <p:ph type="sldNum" sz="quarter" idx="5"/>
           </p:nvPr>
         </p:nvSpPr>
         <p:spPr/>
@@ -2821,7 +2615,7 @@
 </file>
 
 <file path=ppt/notesSlides/notesSlide4.xml><?xml version="1.0" encoding="utf-8"?>
-<p:notes xmlns:a="http://schemas.openxmlformats.org/drawingml/2006/main" xmlns:p="http://schemas.openxmlformats.org/presentationml/2006/main" xmlns:r="http://schemas.openxmlformats.org/officeDocument/2006/relationships">
+<p:notes xmlns:a="http://schemas.openxmlformats.org/drawingml/2006/main" xmlns:r="http://schemas.openxmlformats.org/officeDocument/2006/relationships" xmlns:p="http://schemas.openxmlformats.org/presentationml/2006/main">
   <p:cSld>
     <p:spTree>
       <p:nvGrpSpPr>
@@ -2841,7 +2635,7 @@
         <p:nvSpPr>
           <p:cNvPr id="2" name="Slide Image Placeholder 1"/>
           <p:cNvSpPr>
-            <a:spLocks noGrp="1"/>
+            <a:spLocks noGrp="1" noRot="1" noChangeAspect="1"/>
           </p:cNvSpPr>
           <p:nvPr>
             <p:ph type="sldImg" idx="2"/>
@@ -2856,7 +2650,7 @@
             <a:spLocks noGrp="1"/>
           </p:cNvSpPr>
           <p:nvPr>
-            <p:ph type="body" idx="3" sz="quarter"/>
+            <p:ph type="body" sz="quarter" idx="3"/>
           </p:nvPr>
         </p:nvSpPr>
         <p:spPr/>
@@ -2877,7 +2671,7 @@
             <a:spLocks noGrp="1"/>
           </p:cNvSpPr>
           <p:nvPr>
-            <p:ph type="sldNum" idx="5" sz="quarter"/>
+            <p:ph type="sldNum" sz="quarter" idx="5"/>
           </p:nvPr>
         </p:nvSpPr>
         <p:spPr/>
@@ -2891,7 +2685,7 @@
 </file>
 
 <file path=ppt/notesSlides/notesSlide40.xml><?xml version="1.0" encoding="utf-8"?>
-<p:notes xmlns:a="http://schemas.openxmlformats.org/drawingml/2006/main" xmlns:p="http://schemas.openxmlformats.org/presentationml/2006/main" xmlns:r="http://schemas.openxmlformats.org/officeDocument/2006/relationships">
+<p:notes xmlns:a="http://schemas.openxmlformats.org/drawingml/2006/main" xmlns:r="http://schemas.openxmlformats.org/officeDocument/2006/relationships" xmlns:p="http://schemas.openxmlformats.org/presentationml/2006/main">
   <p:cSld>
     <p:spTree>
       <p:nvGrpSpPr>
@@ -2911,7 +2705,7 @@
         <p:nvSpPr>
           <p:cNvPr id="2" name="Slide Image Placeholder 1"/>
           <p:cNvSpPr>
-            <a:spLocks noGrp="1"/>
+            <a:spLocks noGrp="1" noRot="1" noChangeAspect="1"/>
           </p:cNvSpPr>
           <p:nvPr>
             <p:ph type="sldImg" idx="2"/>
@@ -2926,7 +2720,7 @@
             <a:spLocks noGrp="1"/>
           </p:cNvSpPr>
           <p:nvPr>
-            <p:ph type="body" idx="3" sz="quarter"/>
+            <p:ph type="body" sz="quarter" idx="3"/>
           </p:nvPr>
         </p:nvSpPr>
         <p:spPr/>
@@ -2947,7 +2741,7 @@
             <a:spLocks noGrp="1"/>
           </p:cNvSpPr>
           <p:nvPr>
-            <p:ph type="sldNum" idx="5" sz="quarter"/>
+            <p:ph type="sldNum" sz="quarter" idx="5"/>
           </p:nvPr>
         </p:nvSpPr>
         <p:spPr/>
@@ -2961,7 +2755,7 @@
 </file>
 
 <file path=ppt/notesSlides/notesSlide41.xml><?xml version="1.0" encoding="utf-8"?>
-<p:notes xmlns:a="http://schemas.openxmlformats.org/drawingml/2006/main" xmlns:p="http://schemas.openxmlformats.org/presentationml/2006/main" xmlns:r="http://schemas.openxmlformats.org/officeDocument/2006/relationships">
+<p:notes xmlns:a="http://schemas.openxmlformats.org/drawingml/2006/main" xmlns:r="http://schemas.openxmlformats.org/officeDocument/2006/relationships" xmlns:p="http://schemas.openxmlformats.org/presentationml/2006/main">
   <p:cSld>
     <p:spTree>
       <p:nvGrpSpPr>
@@ -2981,7 +2775,7 @@
         <p:nvSpPr>
           <p:cNvPr id="2" name="Slide Image Placeholder 1"/>
           <p:cNvSpPr>
-            <a:spLocks noGrp="1"/>
+            <a:spLocks noGrp="1" noRot="1" noChangeAspect="1"/>
           </p:cNvSpPr>
           <p:nvPr>
             <p:ph type="sldImg" idx="2"/>
@@ -2996,7 +2790,7 @@
             <a:spLocks noGrp="1"/>
           </p:cNvSpPr>
           <p:nvPr>
-            <p:ph type="body" idx="3" sz="quarter"/>
+            <p:ph type="body" sz="quarter" idx="3"/>
           </p:nvPr>
         </p:nvSpPr>
         <p:spPr/>
@@ -3017,7 +2811,7 @@
             <a:spLocks noGrp="1"/>
           </p:cNvSpPr>
           <p:nvPr>
-            <p:ph type="sldNum" idx="5" sz="quarter"/>
+            <p:ph type="sldNum" sz="quarter" idx="5"/>
           </p:nvPr>
         </p:nvSpPr>
         <p:spPr/>
@@ -3031,7 +2825,7 @@
 </file>
 
 <file path=ppt/notesSlides/notesSlide42.xml><?xml version="1.0" encoding="utf-8"?>
-<p:notes xmlns:a="http://schemas.openxmlformats.org/drawingml/2006/main" xmlns:p="http://schemas.openxmlformats.org/presentationml/2006/main" xmlns:r="http://schemas.openxmlformats.org/officeDocument/2006/relationships">
+<p:notes xmlns:a="http://schemas.openxmlformats.org/drawingml/2006/main" xmlns:r="http://schemas.openxmlformats.org/officeDocument/2006/relationships" xmlns:p="http://schemas.openxmlformats.org/presentationml/2006/main">
   <p:cSld>
     <p:spTree>
       <p:nvGrpSpPr>
@@ -3051,7 +2845,7 @@
         <p:nvSpPr>
           <p:cNvPr id="2" name="Slide Image Placeholder 1"/>
           <p:cNvSpPr>
-            <a:spLocks noGrp="1"/>
+            <a:spLocks noGrp="1" noRot="1" noChangeAspect="1"/>
           </p:cNvSpPr>
           <p:nvPr>
             <p:ph type="sldImg" idx="2"/>
@@ -3066,7 +2860,7 @@
             <a:spLocks noGrp="1"/>
           </p:cNvSpPr>
           <p:nvPr>
-            <p:ph type="body" idx="3" sz="quarter"/>
+            <p:ph type="body" sz="quarter" idx="3"/>
           </p:nvPr>
         </p:nvSpPr>
         <p:spPr/>
@@ -3087,7 +2881,7 @@
             <a:spLocks noGrp="1"/>
           </p:cNvSpPr>
           <p:nvPr>
-            <p:ph type="sldNum" idx="5" sz="quarter"/>
+            <p:ph type="sldNum" sz="quarter" idx="5"/>
           </p:nvPr>
         </p:nvSpPr>
         <p:spPr/>
@@ -3101,7 +2895,7 @@
 </file>
 
 <file path=ppt/notesSlides/notesSlide43.xml><?xml version="1.0" encoding="utf-8"?>
-<p:notes xmlns:a="http://schemas.openxmlformats.org/drawingml/2006/main" xmlns:p="http://schemas.openxmlformats.org/presentationml/2006/main" xmlns:r="http://schemas.openxmlformats.org/officeDocument/2006/relationships">
+<p:notes xmlns:a="http://schemas.openxmlformats.org/drawingml/2006/main" xmlns:r="http://schemas.openxmlformats.org/officeDocument/2006/relationships" xmlns:p="http://schemas.openxmlformats.org/presentationml/2006/main">
   <p:cSld>
     <p:spTree>
       <p:nvGrpSpPr>
@@ -3121,7 +2915,7 @@
         <p:nvSpPr>
           <p:cNvPr id="2" name="Slide Image Placeholder 1"/>
           <p:cNvSpPr>
-            <a:spLocks noGrp="1"/>
+            <a:spLocks noGrp="1" noRot="1" noChangeAspect="1"/>
           </p:cNvSpPr>
           <p:nvPr>
             <p:ph type="sldImg" idx="2"/>
@@ -3136,7 +2930,7 @@
             <a:spLocks noGrp="1"/>
           </p:cNvSpPr>
           <p:nvPr>
-            <p:ph type="body" idx="3" sz="quarter"/>
+            <p:ph type="body" sz="quarter" idx="3"/>
           </p:nvPr>
         </p:nvSpPr>
         <p:spPr/>
@@ -3157,7 +2951,7 @@
             <a:spLocks noGrp="1"/>
           </p:cNvSpPr>
           <p:nvPr>
-            <p:ph type="sldNum" idx="5" sz="quarter"/>
+            <p:ph type="sldNum" sz="quarter" idx="5"/>
           </p:nvPr>
         </p:nvSpPr>
         <p:spPr/>
@@ -3171,7 +2965,7 @@
 </file>
 
 <file path=ppt/notesSlides/notesSlide44.xml><?xml version="1.0" encoding="utf-8"?>
-<p:notes xmlns:a="http://schemas.openxmlformats.org/drawingml/2006/main" xmlns:p="http://schemas.openxmlformats.org/presentationml/2006/main" xmlns:r="http://schemas.openxmlformats.org/officeDocument/2006/relationships">
+<p:notes xmlns:a="http://schemas.openxmlformats.org/drawingml/2006/main" xmlns:r="http://schemas.openxmlformats.org/officeDocument/2006/relationships" xmlns:p="http://schemas.openxmlformats.org/presentationml/2006/main">
   <p:cSld>
     <p:spTree>
       <p:nvGrpSpPr>
@@ -3191,7 +2985,7 @@
         <p:nvSpPr>
           <p:cNvPr id="2" name="Slide Image Placeholder 1"/>
           <p:cNvSpPr>
-            <a:spLocks noGrp="1"/>
+            <a:spLocks noGrp="1" noRot="1" noChangeAspect="1"/>
           </p:cNvSpPr>
           <p:nvPr>
             <p:ph type="sldImg" idx="2"/>
@@ -3206,7 +3000,7 @@
             <a:spLocks noGrp="1"/>
           </p:cNvSpPr>
           <p:nvPr>
-            <p:ph type="body" idx="3" sz="quarter"/>
+            <p:ph type="body" sz="quarter" idx="3"/>
           </p:nvPr>
         </p:nvSpPr>
         <p:spPr/>
@@ -3227,7 +3021,7 @@
             <a:spLocks noGrp="1"/>
           </p:cNvSpPr>
           <p:nvPr>
-            <p:ph type="sldNum" idx="5" sz="quarter"/>
+            <p:ph type="sldNum" sz="quarter" idx="5"/>
           </p:nvPr>
         </p:nvSpPr>
         <p:spPr/>
@@ -3241,7 +3035,7 @@
 </file>
 
 <file path=ppt/notesSlides/notesSlide45.xml><?xml version="1.0" encoding="utf-8"?>
-<p:notes xmlns:a="http://schemas.openxmlformats.org/drawingml/2006/main" xmlns:p="http://schemas.openxmlformats.org/presentationml/2006/main" xmlns:r="http://schemas.openxmlformats.org/officeDocument/2006/relationships">
+<p:notes xmlns:a="http://schemas.openxmlformats.org/drawingml/2006/main" xmlns:r="http://schemas.openxmlformats.org/officeDocument/2006/relationships" xmlns:p="http://schemas.openxmlformats.org/presentationml/2006/main">
   <p:cSld>
     <p:spTree>
       <p:nvGrpSpPr>
@@ -3261,7 +3055,7 @@
         <p:nvSpPr>
           <p:cNvPr id="2" name="Slide Image Placeholder 1"/>
           <p:cNvSpPr>
-            <a:spLocks noGrp="1"/>
+            <a:spLocks noGrp="1" noRot="1" noChangeAspect="1"/>
           </p:cNvSpPr>
           <p:nvPr>
             <p:ph type="sldImg" idx="2"/>
@@ -3276,7 +3070,7 @@
             <a:spLocks noGrp="1"/>
           </p:cNvSpPr>
           <p:nvPr>
-            <p:ph type="body" idx="3" sz="quarter"/>
+            <p:ph type="body" sz="quarter" idx="3"/>
           </p:nvPr>
         </p:nvSpPr>
         <p:spPr/>
@@ -3297,7 +3091,7 @@
             <a:spLocks noGrp="1"/>
           </p:cNvSpPr>
           <p:nvPr>
-            <p:ph type="sldNum" idx="5" sz="quarter"/>
+            <p:ph type="sldNum" sz="quarter" idx="5"/>
           </p:nvPr>
         </p:nvSpPr>
         <p:spPr/>
@@ -3311,7 +3105,7 @@
 </file>
 
 <file path=ppt/notesSlides/notesSlide46.xml><?xml version="1.0" encoding="utf-8"?>
-<p:notes xmlns:a="http://schemas.openxmlformats.org/drawingml/2006/main" xmlns:p="http://schemas.openxmlformats.org/presentationml/2006/main" xmlns:r="http://schemas.openxmlformats.org/officeDocument/2006/relationships">
+<p:notes xmlns:a="http://schemas.openxmlformats.org/drawingml/2006/main" xmlns:r="http://schemas.openxmlformats.org/officeDocument/2006/relationships" xmlns:p="http://schemas.openxmlformats.org/presentationml/2006/main">
   <p:cSld>
     <p:spTree>
       <p:nvGrpSpPr>
@@ -3331,7 +3125,7 @@
         <p:nvSpPr>
           <p:cNvPr id="2" name="Slide Image Placeholder 1"/>
           <p:cNvSpPr>
-            <a:spLocks noGrp="1"/>
+            <a:spLocks noGrp="1" noRot="1" noChangeAspect="1"/>
           </p:cNvSpPr>
           <p:nvPr>
             <p:ph type="sldImg" idx="2"/>
@@ -3346,7 +3140,7 @@
             <a:spLocks noGrp="1"/>
           </p:cNvSpPr>
           <p:nvPr>
-            <p:ph type="body" idx="3" sz="quarter"/>
+            <p:ph type="body" sz="quarter" idx="3"/>
           </p:nvPr>
         </p:nvSpPr>
         <p:spPr/>
@@ -3367,7 +3161,7 @@
             <a:spLocks noGrp="1"/>
           </p:cNvSpPr>
           <p:nvPr>
-            <p:ph type="sldNum" idx="5" sz="quarter"/>
+            <p:ph type="sldNum" sz="quarter" idx="5"/>
           </p:nvPr>
         </p:nvSpPr>
         <p:spPr/>
@@ -3381,7 +3175,7 @@
 </file>
 
 <file path=ppt/notesSlides/notesSlide47.xml><?xml version="1.0" encoding="utf-8"?>
-<p:notes xmlns:a="http://schemas.openxmlformats.org/drawingml/2006/main" xmlns:p="http://schemas.openxmlformats.org/presentationml/2006/main" xmlns:r="http://schemas.openxmlformats.org/officeDocument/2006/relationships">
+<p:notes xmlns:a="http://schemas.openxmlformats.org/drawingml/2006/main" xmlns:r="http://schemas.openxmlformats.org/officeDocument/2006/relationships" xmlns:p="http://schemas.openxmlformats.org/presentationml/2006/main">
   <p:cSld>
     <p:spTree>
       <p:nvGrpSpPr>
@@ -3401,7 +3195,7 @@
         <p:nvSpPr>
           <p:cNvPr id="2" name="Slide Image Placeholder 1"/>
           <p:cNvSpPr>
-            <a:spLocks noGrp="1"/>
+            <a:spLocks noGrp="1" noRot="1" noChangeAspect="1"/>
           </p:cNvSpPr>
           <p:nvPr>
             <p:ph type="sldImg" idx="2"/>
@@ -3416,7 +3210,7 @@
             <a:spLocks noGrp="1"/>
           </p:cNvSpPr>
           <p:nvPr>
-            <p:ph type="body" idx="3" sz="quarter"/>
+            <p:ph type="body" sz="quarter" idx="3"/>
           </p:nvPr>
         </p:nvSpPr>
         <p:spPr/>
@@ -3437,7 +3231,7 @@
             <a:spLocks noGrp="1"/>
           </p:cNvSpPr>
           <p:nvPr>
-            <p:ph type="sldNum" idx="5" sz="quarter"/>
+            <p:ph type="sldNum" sz="quarter" idx="5"/>
           </p:nvPr>
         </p:nvSpPr>
         <p:spPr/>
@@ -3451,7 +3245,7 @@
 </file>
 
 <file path=ppt/notesSlides/notesSlide48.xml><?xml version="1.0" encoding="utf-8"?>
-<p:notes xmlns:a="http://schemas.openxmlformats.org/drawingml/2006/main" xmlns:p="http://schemas.openxmlformats.org/presentationml/2006/main" xmlns:r="http://schemas.openxmlformats.org/officeDocument/2006/relationships">
+<p:notes xmlns:a="http://schemas.openxmlformats.org/drawingml/2006/main" xmlns:r="http://schemas.openxmlformats.org/officeDocument/2006/relationships" xmlns:p="http://schemas.openxmlformats.org/presentationml/2006/main">
   <p:cSld>
     <p:spTree>
       <p:nvGrpSpPr>
@@ -3471,7 +3265,7 @@
         <p:nvSpPr>
           <p:cNvPr id="2" name="Slide Image Placeholder 1"/>
           <p:cNvSpPr>
-            <a:spLocks noGrp="1"/>
+            <a:spLocks noGrp="1" noRot="1" noChangeAspect="1"/>
           </p:cNvSpPr>
           <p:nvPr>
             <p:ph type="sldImg" idx="2"/>
@@ -3486,7 +3280,7 @@
             <a:spLocks noGrp="1"/>
           </p:cNvSpPr>
           <p:nvPr>
-            <p:ph type="body" idx="3" sz="quarter"/>
+            <p:ph type="body" sz="quarter" idx="3"/>
           </p:nvPr>
         </p:nvSpPr>
         <p:spPr/>
@@ -3507,7 +3301,7 @@
             <a:spLocks noGrp="1"/>
           </p:cNvSpPr>
           <p:nvPr>
-            <p:ph type="sldNum" idx="5" sz="quarter"/>
+            <p:ph type="sldNum" sz="quarter" idx="5"/>
           </p:nvPr>
         </p:nvSpPr>
         <p:spPr/>
@@ -3521,7 +3315,7 @@
 </file>
 
 <file path=ppt/notesSlides/notesSlide49.xml><?xml version="1.0" encoding="utf-8"?>
-<p:notes xmlns:a="http://schemas.openxmlformats.org/drawingml/2006/main" xmlns:p="http://schemas.openxmlformats.org/presentationml/2006/main" xmlns:r="http://schemas.openxmlformats.org/officeDocument/2006/relationships">
+<p:notes xmlns:a="http://schemas.openxmlformats.org/drawingml/2006/main" xmlns:r="http://schemas.openxmlformats.org/officeDocument/2006/relationships" xmlns:p="http://schemas.openxmlformats.org/presentationml/2006/main">
   <p:cSld>
     <p:spTree>
       <p:nvGrpSpPr>
@@ -3541,7 +3335,7 @@
         <p:nvSpPr>
           <p:cNvPr id="2" name="Slide Image Placeholder 1"/>
           <p:cNvSpPr>
-            <a:spLocks noGrp="1"/>
+            <a:spLocks noGrp="1" noRot="1" noChangeAspect="1"/>
           </p:cNvSpPr>
           <p:nvPr>
             <p:ph type="sldImg" idx="2"/>
@@ -3556,7 +3350,7 @@
             <a:spLocks noGrp="1"/>
           </p:cNvSpPr>
           <p:nvPr>
-            <p:ph type="body" idx="3" sz="quarter"/>
+            <p:ph type="body" sz="quarter" idx="3"/>
           </p:nvPr>
         </p:nvSpPr>
         <p:spPr/>
@@ -3577,7 +3371,7 @@
             <a:spLocks noGrp="1"/>
           </p:cNvSpPr>
           <p:nvPr>
-            <p:ph type="sldNum" idx="5" sz="quarter"/>
+            <p:ph type="sldNum" sz="quarter" idx="5"/>
           </p:nvPr>
         </p:nvSpPr>
         <p:spPr/>
@@ -3591,7 +3385,7 @@
 </file>
 
 <file path=ppt/notesSlides/notesSlide5.xml><?xml version="1.0" encoding="utf-8"?>
-<p:notes xmlns:a="http://schemas.openxmlformats.org/drawingml/2006/main" xmlns:p="http://schemas.openxmlformats.org/presentationml/2006/main" xmlns:r="http://schemas.openxmlformats.org/officeDocument/2006/relationships">
+<p:notes xmlns:a="http://schemas.openxmlformats.org/drawingml/2006/main" xmlns:r="http://schemas.openxmlformats.org/officeDocument/2006/relationships" xmlns:p="http://schemas.openxmlformats.org/presentationml/2006/main">
   <p:cSld>
     <p:spTree>
       <p:nvGrpSpPr>
@@ -3611,7 +3405,7 @@
         <p:nvSpPr>
           <p:cNvPr id="2" name="Slide Image Placeholder 1"/>
           <p:cNvSpPr>
-            <a:spLocks noGrp="1"/>
+            <a:spLocks noGrp="1" noRot="1" noChangeAspect="1"/>
           </p:cNvSpPr>
           <p:nvPr>
             <p:ph type="sldImg" idx="2"/>
@@ -3626,7 +3420,7 @@
             <a:spLocks noGrp="1"/>
           </p:cNvSpPr>
           <p:nvPr>
-            <p:ph type="body" idx="3" sz="quarter"/>
+            <p:ph type="body" sz="quarter" idx="3"/>
           </p:nvPr>
         </p:nvSpPr>
         <p:spPr/>
@@ -3647,7 +3441,7 @@
             <a:spLocks noGrp="1"/>
           </p:cNvSpPr>
           <p:nvPr>
-            <p:ph type="sldNum" idx="5" sz="quarter"/>
+            <p:ph type="sldNum" sz="quarter" idx="5"/>
           </p:nvPr>
         </p:nvSpPr>
         <p:spPr/>
@@ -3661,7 +3455,7 @@
 </file>
 
 <file path=ppt/notesSlides/notesSlide50.xml><?xml version="1.0" encoding="utf-8"?>
-<p:notes xmlns:a="http://schemas.openxmlformats.org/drawingml/2006/main" xmlns:p="http://schemas.openxmlformats.org/presentationml/2006/main" xmlns:r="http://schemas.openxmlformats.org/officeDocument/2006/relationships">
+<p:notes xmlns:a="http://schemas.openxmlformats.org/drawingml/2006/main" xmlns:r="http://schemas.openxmlformats.org/officeDocument/2006/relationships" xmlns:p="http://schemas.openxmlformats.org/presentationml/2006/main">
   <p:cSld>
     <p:spTree>
       <p:nvGrpSpPr>
@@ -3681,7 +3475,7 @@
         <p:nvSpPr>
           <p:cNvPr id="2" name="Slide Image Placeholder 1"/>
           <p:cNvSpPr>
-            <a:spLocks noGrp="1"/>
+            <a:spLocks noGrp="1" noRot="1" noChangeAspect="1"/>
           </p:cNvSpPr>
           <p:nvPr>
             <p:ph type="sldImg" idx="2"/>
@@ -3696,7 +3490,7 @@
             <a:spLocks noGrp="1"/>
           </p:cNvSpPr>
           <p:nvPr>
-            <p:ph type="body" idx="3" sz="quarter"/>
+            <p:ph type="body" sz="quarter" idx="3"/>
           </p:nvPr>
         </p:nvSpPr>
         <p:spPr/>
@@ -3717,7 +3511,7 @@
             <a:spLocks noGrp="1"/>
           </p:cNvSpPr>
           <p:nvPr>
-            <p:ph type="sldNum" idx="5" sz="quarter"/>
+            <p:ph type="sldNum" sz="quarter" idx="5"/>
           </p:nvPr>
         </p:nvSpPr>
         <p:spPr/>
@@ -3731,7 +3525,7 @@
 </file>
 
 <file path=ppt/notesSlides/notesSlide51.xml><?xml version="1.0" encoding="utf-8"?>
-<p:notes xmlns:a="http://schemas.openxmlformats.org/drawingml/2006/main" xmlns:p="http://schemas.openxmlformats.org/presentationml/2006/main" xmlns:r="http://schemas.openxmlformats.org/officeDocument/2006/relationships">
+<p:notes xmlns:a="http://schemas.openxmlformats.org/drawingml/2006/main" xmlns:r="http://schemas.openxmlformats.org/officeDocument/2006/relationships" xmlns:p="http://schemas.openxmlformats.org/presentationml/2006/main">
   <p:cSld>
     <p:spTree>
       <p:nvGrpSpPr>
@@ -3751,7 +3545,7 @@
         <p:nvSpPr>
           <p:cNvPr id="2" name="Slide Image Placeholder 1"/>
           <p:cNvSpPr>
-            <a:spLocks noGrp="1"/>
+            <a:spLocks noGrp="1" noRot="1" noChangeAspect="1"/>
           </p:cNvSpPr>
           <p:nvPr>
             <p:ph type="sldImg" idx="2"/>
@@ -3766,7 +3560,7 @@
             <a:spLocks noGrp="1"/>
           </p:cNvSpPr>
           <p:nvPr>
-            <p:ph type="body" idx="3" sz="quarter"/>
+            <p:ph type="body" sz="quarter" idx="3"/>
           </p:nvPr>
         </p:nvSpPr>
         <p:spPr/>
@@ -3787,7 +3581,7 @@
             <a:spLocks noGrp="1"/>
           </p:cNvSpPr>
           <p:nvPr>
-            <p:ph type="sldNum" idx="5" sz="quarter"/>
+            <p:ph type="sldNum" sz="quarter" idx="5"/>
           </p:nvPr>
         </p:nvSpPr>
         <p:spPr/>
@@ -3801,7 +3595,7 @@
 </file>
 
 <file path=ppt/notesSlides/notesSlide52.xml><?xml version="1.0" encoding="utf-8"?>
-<p:notes xmlns:a="http://schemas.openxmlformats.org/drawingml/2006/main" xmlns:p="http://schemas.openxmlformats.org/presentationml/2006/main" xmlns:r="http://schemas.openxmlformats.org/officeDocument/2006/relationships">
+<p:notes xmlns:a="http://schemas.openxmlformats.org/drawingml/2006/main" xmlns:r="http://schemas.openxmlformats.org/officeDocument/2006/relationships" xmlns:p="http://schemas.openxmlformats.org/presentationml/2006/main">
   <p:cSld>
     <p:spTree>
       <p:nvGrpSpPr>
@@ -3821,7 +3615,7 @@
         <p:nvSpPr>
           <p:cNvPr id="2" name="Slide Image Placeholder 1"/>
           <p:cNvSpPr>
-            <a:spLocks noGrp="1"/>
+            <a:spLocks noGrp="1" noRot="1" noChangeAspect="1"/>
           </p:cNvSpPr>
           <p:nvPr>
             <p:ph type="sldImg" idx="2"/>
@@ -3836,7 +3630,7 @@
             <a:spLocks noGrp="1"/>
           </p:cNvSpPr>
           <p:nvPr>
-            <p:ph type="body" idx="3" sz="quarter"/>
+            <p:ph type="body" sz="quarter" idx="3"/>
           </p:nvPr>
         </p:nvSpPr>
         <p:spPr/>
@@ -3857,7 +3651,7 @@
             <a:spLocks noGrp="1"/>
           </p:cNvSpPr>
           <p:nvPr>
-            <p:ph type="sldNum" idx="5" sz="quarter"/>
+            <p:ph type="sldNum" sz="quarter" idx="5"/>
           </p:nvPr>
         </p:nvSpPr>
         <p:spPr/>
@@ -3871,7 +3665,7 @@
 </file>
 
 <file path=ppt/notesSlides/notesSlide53.xml><?xml version="1.0" encoding="utf-8"?>
-<p:notes xmlns:a="http://schemas.openxmlformats.org/drawingml/2006/main" xmlns:p="http://schemas.openxmlformats.org/presentationml/2006/main" xmlns:r="http://schemas.openxmlformats.org/officeDocument/2006/relationships">
+<p:notes xmlns:a="http://schemas.openxmlformats.org/drawingml/2006/main" xmlns:r="http://schemas.openxmlformats.org/officeDocument/2006/relationships" xmlns:p="http://schemas.openxmlformats.org/presentationml/2006/main">
   <p:cSld>
     <p:spTree>
       <p:nvGrpSpPr>
@@ -3891,7 +3685,7 @@
         <p:nvSpPr>
           <p:cNvPr id="2" name="Slide Image Placeholder 1"/>
           <p:cNvSpPr>
-            <a:spLocks noGrp="1"/>
+            <a:spLocks noGrp="1" noRot="1" noChangeAspect="1"/>
           </p:cNvSpPr>
           <p:nvPr>
             <p:ph type="sldImg" idx="2"/>
@@ -3906,7 +3700,7 @@
             <a:spLocks noGrp="1"/>
           </p:cNvSpPr>
           <p:nvPr>
-            <p:ph type="body" idx="3" sz="quarter"/>
+            <p:ph type="body" sz="quarter" idx="3"/>
           </p:nvPr>
         </p:nvSpPr>
         <p:spPr/>
@@ -3927,7 +3721,7 @@
             <a:spLocks noGrp="1"/>
           </p:cNvSpPr>
           <p:nvPr>
-            <p:ph type="sldNum" idx="5" sz="quarter"/>
+            <p:ph type="sldNum" sz="quarter" idx="5"/>
           </p:nvPr>
         </p:nvSpPr>
         <p:spPr/>
@@ -3941,7 +3735,7 @@
 </file>
 
 <file path=ppt/notesSlides/notesSlide54.xml><?xml version="1.0" encoding="utf-8"?>
-<p:notes xmlns:a="http://schemas.openxmlformats.org/drawingml/2006/main" xmlns:p="http://schemas.openxmlformats.org/presentationml/2006/main" xmlns:r="http://schemas.openxmlformats.org/officeDocument/2006/relationships">
+<p:notes xmlns:a="http://schemas.openxmlformats.org/drawingml/2006/main" xmlns:r="http://schemas.openxmlformats.org/officeDocument/2006/relationships" xmlns:p="http://schemas.openxmlformats.org/presentationml/2006/main">
   <p:cSld>
     <p:spTree>
       <p:nvGrpSpPr>
@@ -3961,7 +3755,7 @@
         <p:nvSpPr>
           <p:cNvPr id="2" name="Slide Image Placeholder 1"/>
           <p:cNvSpPr>
-            <a:spLocks noGrp="1"/>
+            <a:spLocks noGrp="1" noRot="1" noChangeAspect="1"/>
           </p:cNvSpPr>
           <p:nvPr>
             <p:ph type="sldImg" idx="2"/>
@@ -3976,7 +3770,7 @@
             <a:spLocks noGrp="1"/>
           </p:cNvSpPr>
           <p:nvPr>
-            <p:ph type="body" idx="3" sz="quarter"/>
+            <p:ph type="body" sz="quarter" idx="3"/>
           </p:nvPr>
         </p:nvSpPr>
         <p:spPr/>
@@ -3997,7 +3791,7 @@
             <a:spLocks noGrp="1"/>
           </p:cNvSpPr>
           <p:nvPr>
-            <p:ph type="sldNum" idx="5" sz="quarter"/>
+            <p:ph type="sldNum" sz="quarter" idx="5"/>
           </p:nvPr>
         </p:nvSpPr>
         <p:spPr/>
@@ -4011,7 +3805,7 @@
 </file>
 
 <file path=ppt/notesSlides/notesSlide6.xml><?xml version="1.0" encoding="utf-8"?>
-<p:notes xmlns:a="http://schemas.openxmlformats.org/drawingml/2006/main" xmlns:p="http://schemas.openxmlformats.org/presentationml/2006/main" xmlns:r="http://schemas.openxmlformats.org/officeDocument/2006/relationships">
+<p:notes xmlns:a="http://schemas.openxmlformats.org/drawingml/2006/main" xmlns:r="http://schemas.openxmlformats.org/officeDocument/2006/relationships" xmlns:p="http://schemas.openxmlformats.org/presentationml/2006/main">
   <p:cSld>
     <p:spTree>
       <p:nvGrpSpPr>
@@ -4031,7 +3825,7 @@
         <p:nvSpPr>
           <p:cNvPr id="2" name="Slide Image Placeholder 1"/>
           <p:cNvSpPr>
-            <a:spLocks noGrp="1"/>
+            <a:spLocks noGrp="1" noRot="1" noChangeAspect="1"/>
           </p:cNvSpPr>
           <p:nvPr>
             <p:ph type="sldImg" idx="2"/>
@@ -4046,7 +3840,7 @@
             <a:spLocks noGrp="1"/>
           </p:cNvSpPr>
           <p:nvPr>
-            <p:ph type="body" idx="3" sz="quarter"/>
+            <p:ph type="body" sz="quarter" idx="3"/>
           </p:nvPr>
         </p:nvSpPr>
         <p:spPr/>
@@ -4067,7 +3861,7 @@
             <a:spLocks noGrp="1"/>
           </p:cNvSpPr>
           <p:nvPr>
-            <p:ph type="sldNum" idx="5" sz="quarter"/>
+            <p:ph type="sldNum" sz="quarter" idx="5"/>
           </p:nvPr>
         </p:nvSpPr>
         <p:spPr/>
@@ -4081,7 +3875,7 @@
 </file>
 
 <file path=ppt/notesSlides/notesSlide7.xml><?xml version="1.0" encoding="utf-8"?>
-<p:notes xmlns:a="http://schemas.openxmlformats.org/drawingml/2006/main" xmlns:p="http://schemas.openxmlformats.org/presentationml/2006/main" xmlns:r="http://schemas.openxmlformats.org/officeDocument/2006/relationships">
+<p:notes xmlns:a="http://schemas.openxmlformats.org/drawingml/2006/main" xmlns:r="http://schemas.openxmlformats.org/officeDocument/2006/relationships" xmlns:p="http://schemas.openxmlformats.org/presentationml/2006/main">
   <p:cSld>
     <p:spTree>
       <p:nvGrpSpPr>
@@ -4101,7 +3895,7 @@
         <p:nvSpPr>
           <p:cNvPr id="2" name="Slide Image Placeholder 1"/>
           <p:cNvSpPr>
-            <a:spLocks noGrp="1"/>
+            <a:spLocks noGrp="1" noRot="1" noChangeAspect="1"/>
           </p:cNvSpPr>
           <p:nvPr>
             <p:ph type="sldImg" idx="2"/>
@@ -4116,7 +3910,7 @@
             <a:spLocks noGrp="1"/>
           </p:cNvSpPr>
           <p:nvPr>
-            <p:ph type="body" idx="3" sz="quarter"/>
+            <p:ph type="body" sz="quarter" idx="3"/>
           </p:nvPr>
         </p:nvSpPr>
         <p:spPr/>
@@ -4137,7 +3931,7 @@
             <a:spLocks noGrp="1"/>
           </p:cNvSpPr>
           <p:nvPr>
-            <p:ph type="sldNum" idx="5" sz="quarter"/>
+            <p:ph type="sldNum" sz="quarter" idx="5"/>
           </p:nvPr>
         </p:nvSpPr>
         <p:spPr/>
@@ -4151,7 +3945,7 @@
 </file>
 
 <file path=ppt/notesSlides/notesSlide8.xml><?xml version="1.0" encoding="utf-8"?>
-<p:notes xmlns:a="http://schemas.openxmlformats.org/drawingml/2006/main" xmlns:p="http://schemas.openxmlformats.org/presentationml/2006/main" xmlns:r="http://schemas.openxmlformats.org/officeDocument/2006/relationships">
+<p:notes xmlns:a="http://schemas.openxmlformats.org/drawingml/2006/main" xmlns:r="http://schemas.openxmlformats.org/officeDocument/2006/relationships" xmlns:p="http://schemas.openxmlformats.org/presentationml/2006/main">
   <p:cSld>
     <p:spTree>
       <p:nvGrpSpPr>
@@ -4171,7 +3965,7 @@
         <p:nvSpPr>
           <p:cNvPr id="2" name="Slide Image Placeholder 1"/>
           <p:cNvSpPr>
-            <a:spLocks noGrp="1"/>
+            <a:spLocks noGrp="1" noRot="1" noChangeAspect="1"/>
           </p:cNvSpPr>
           <p:nvPr>
             <p:ph type="sldImg" idx="2"/>
@@ -4186,7 +3980,7 @@
             <a:spLocks noGrp="1"/>
           </p:cNvSpPr>
           <p:nvPr>
-            <p:ph type="body" idx="3" sz="quarter"/>
+            <p:ph type="body" sz="quarter" idx="3"/>
           </p:nvPr>
         </p:nvSpPr>
         <p:spPr/>
@@ -4207,7 +4001,7 @@
             <a:spLocks noGrp="1"/>
           </p:cNvSpPr>
           <p:nvPr>
-            <p:ph type="sldNum" idx="5" sz="quarter"/>
+            <p:ph type="sldNum" sz="quarter" idx="5"/>
           </p:nvPr>
         </p:nvSpPr>
         <p:spPr/>
@@ -4221,7 +4015,7 @@
 </file>
 
 <file path=ppt/notesSlides/notesSlide9.xml><?xml version="1.0" encoding="utf-8"?>
-<p:notes xmlns:a="http://schemas.openxmlformats.org/drawingml/2006/main" xmlns:p="http://schemas.openxmlformats.org/presentationml/2006/main" xmlns:r="http://schemas.openxmlformats.org/officeDocument/2006/relationships">
+<p:notes xmlns:a="http://schemas.openxmlformats.org/drawingml/2006/main" xmlns:r="http://schemas.openxmlformats.org/officeDocument/2006/relationships" xmlns:p="http://schemas.openxmlformats.org/presentationml/2006/main">
   <p:cSld>
     <p:spTree>
       <p:nvGrpSpPr>
@@ -4241,7 +4035,7 @@
         <p:nvSpPr>
           <p:cNvPr id="2" name="Slide Image Placeholder 1"/>
           <p:cNvSpPr>
-            <a:spLocks noGrp="1"/>
+            <a:spLocks noGrp="1" noRot="1" noChangeAspect="1"/>
           </p:cNvSpPr>
           <p:nvPr>
             <p:ph type="sldImg" idx="2"/>
@@ -4256,7 +4050,7 @@
             <a:spLocks noGrp="1"/>
           </p:cNvSpPr>
           <p:nvPr>
-            <p:ph type="body" idx="3" sz="quarter"/>
+            <p:ph type="body" sz="quarter" idx="3"/>
           </p:nvPr>
         </p:nvSpPr>
         <p:spPr/>
@@ -4277,7 +4071,7 @@
             <a:spLocks noGrp="1"/>
           </p:cNvSpPr>
           <p:nvPr>
-            <p:ph type="sldNum" idx="5" sz="quarter"/>
+            <p:ph type="sldNum" sz="quarter" idx="5"/>
           </p:nvPr>
         </p:nvSpPr>
         <p:spPr/>
@@ -4328,10 +4122,9 @@
           <a:lstStyle/>
           <a:p>
             <a:r>
-              <a:rPr lang="en-US" smtClean="0"/>
+              <a:rPr lang="en-US"/>
               <a:t>Click to edit Master title style</a:t>
             </a:r>
-            <a:endParaRPr lang="en-US"/>
           </a:p>
         </p:txBody>
       </p:sp>
@@ -4447,10 +4240,9 @@
           </a:lstStyle>
           <a:p>
             <a:r>
-              <a:rPr lang="en-US" smtClean="0"/>
+              <a:rPr lang="en-US"/>
               <a:t>Click to edit Master subtitle style</a:t>
             </a:r>
-            <a:endParaRPr lang="en-US"/>
           </a:p>
         </p:txBody>
       </p:sp>
@@ -4471,7 +4263,7 @@
           <a:p>
             <a:fld id="{5BCAD085-E8A6-8845-BD4E-CB4CCA059FC4}" type="datetimeFigureOut">
               <a:rPr lang="en-US" smtClean="0"/>
-              <a:t>1/27/13</a:t>
+              <a:t>8/20/2026</a:t>
             </a:fld>
             <a:endParaRPr lang="en-US"/>
           </a:p>
@@ -4565,10 +4357,9 @@
           <a:lstStyle/>
           <a:p>
             <a:r>
-              <a:rPr lang="en-US" smtClean="0"/>
+              <a:rPr lang="en-US"/>
               <a:t>Click to edit Master title style</a:t>
             </a:r>
-            <a:endParaRPr lang="en-US"/>
           </a:p>
         </p:txBody>
       </p:sp>
@@ -4589,38 +4380,37 @@
           <a:p>
             <a:pPr lvl="0"/>
             <a:r>
-              <a:rPr lang="en-US" smtClean="0"/>
+              <a:rPr lang="en-US"/>
               <a:t>Click to edit Master text styles</a:t>
             </a:r>
           </a:p>
           <a:p>
             <a:pPr lvl="1"/>
             <a:r>
-              <a:rPr lang="en-US" smtClean="0"/>
+              <a:rPr lang="en-US"/>
               <a:t>Second level</a:t>
             </a:r>
           </a:p>
           <a:p>
             <a:pPr lvl="2"/>
             <a:r>
-              <a:rPr lang="en-US" smtClean="0"/>
+              <a:rPr lang="en-US"/>
               <a:t>Third level</a:t>
             </a:r>
           </a:p>
           <a:p>
             <a:pPr lvl="3"/>
             <a:r>
-              <a:rPr lang="en-US" smtClean="0"/>
+              <a:rPr lang="en-US"/>
               <a:t>Fourth level</a:t>
             </a:r>
           </a:p>
           <a:p>
             <a:pPr lvl="4"/>
             <a:r>
-              <a:rPr lang="en-US" smtClean="0"/>
+              <a:rPr lang="en-US"/>
               <a:t>Fifth level</a:t>
             </a:r>
-            <a:endParaRPr lang="en-US"/>
           </a:p>
         </p:txBody>
       </p:sp>
@@ -4641,7 +4431,7 @@
           <a:p>
             <a:fld id="{5BCAD085-E8A6-8845-BD4E-CB4CCA059FC4}" type="datetimeFigureOut">
               <a:rPr lang="en-US" smtClean="0"/>
-              <a:t>1/27/13</a:t>
+              <a:t>8/20/2026</a:t>
             </a:fld>
             <a:endParaRPr lang="en-US"/>
           </a:p>
@@ -4740,10 +4530,9 @@
           <a:lstStyle/>
           <a:p>
             <a:r>
-              <a:rPr lang="en-US" smtClean="0"/>
+              <a:rPr lang="en-US"/>
               <a:t>Click to edit Master title style</a:t>
             </a:r>
-            <a:endParaRPr lang="en-US"/>
           </a:p>
         </p:txBody>
       </p:sp>
@@ -4769,38 +4558,37 @@
           <a:p>
             <a:pPr lvl="0"/>
             <a:r>
-              <a:rPr lang="en-US" smtClean="0"/>
+              <a:rPr lang="en-US"/>
               <a:t>Click to edit Master text styles</a:t>
             </a:r>
           </a:p>
           <a:p>
             <a:pPr lvl="1"/>
             <a:r>
-              <a:rPr lang="en-US" smtClean="0"/>
+              <a:rPr lang="en-US"/>
               <a:t>Second level</a:t>
             </a:r>
           </a:p>
           <a:p>
             <a:pPr lvl="2"/>
             <a:r>
-              <a:rPr lang="en-US" smtClean="0"/>
+              <a:rPr lang="en-US"/>
               <a:t>Third level</a:t>
             </a:r>
           </a:p>
           <a:p>
             <a:pPr lvl="3"/>
             <a:r>
-              <a:rPr lang="en-US" smtClean="0"/>
+              <a:rPr lang="en-US"/>
               <a:t>Fourth level</a:t>
             </a:r>
           </a:p>
           <a:p>
             <a:pPr lvl="4"/>
             <a:r>
-              <a:rPr lang="en-US" smtClean="0"/>
+              <a:rPr lang="en-US"/>
               <a:t>Fifth level</a:t>
             </a:r>
-            <a:endParaRPr lang="en-US"/>
           </a:p>
         </p:txBody>
       </p:sp>
@@ -4821,7 +4609,7 @@
           <a:p>
             <a:fld id="{5BCAD085-E8A6-8845-BD4E-CB4CCA059FC4}" type="datetimeFigureOut">
               <a:rPr lang="en-US" smtClean="0"/>
-              <a:t>1/27/13</a:t>
+              <a:t>8/20/2026</a:t>
             </a:fld>
             <a:endParaRPr lang="en-US"/>
           </a:p>
@@ -4915,10 +4703,9 @@
           <a:lstStyle/>
           <a:p>
             <a:r>
-              <a:rPr lang="en-US" smtClean="0"/>
+              <a:rPr lang="en-US"/>
               <a:t>Click to edit Master title style</a:t>
             </a:r>
-            <a:endParaRPr lang="en-US"/>
           </a:p>
         </p:txBody>
       </p:sp>
@@ -4939,38 +4726,37 @@
           <a:p>
             <a:pPr lvl="0"/>
             <a:r>
-              <a:rPr lang="en-US" smtClean="0"/>
+              <a:rPr lang="en-US"/>
               <a:t>Click to edit Master text styles</a:t>
             </a:r>
           </a:p>
           <a:p>
             <a:pPr lvl="1"/>
             <a:r>
-              <a:rPr lang="en-US" smtClean="0"/>
+              <a:rPr lang="en-US"/>
               <a:t>Second level</a:t>
             </a:r>
           </a:p>
           <a:p>
             <a:pPr lvl="2"/>
             <a:r>
-              <a:rPr lang="en-US" smtClean="0"/>
+              <a:rPr lang="en-US"/>
               <a:t>Third level</a:t>
             </a:r>
           </a:p>
           <a:p>
             <a:pPr lvl="3"/>
             <a:r>
-              <a:rPr lang="en-US" smtClean="0"/>
+              <a:rPr lang="en-US"/>
               <a:t>Fourth level</a:t>
             </a:r>
           </a:p>
           <a:p>
             <a:pPr lvl="4"/>
             <a:r>
-              <a:rPr lang="en-US" smtClean="0"/>
+              <a:rPr lang="en-US"/>
               <a:t>Fifth level</a:t>
             </a:r>
-            <a:endParaRPr lang="en-US"/>
           </a:p>
         </p:txBody>
       </p:sp>
@@ -4991,7 +4777,7 @@
           <a:p>
             <a:fld id="{5BCAD085-E8A6-8845-BD4E-CB4CCA059FC4}" type="datetimeFigureOut">
               <a:rPr lang="en-US" smtClean="0"/>
-              <a:t>1/27/13</a:t>
+              <a:t>8/20/2026</a:t>
             </a:fld>
             <a:endParaRPr lang="en-US"/>
           </a:p>
@@ -5094,10 +4880,9 @@
           </a:lstStyle>
           <a:p>
             <a:r>
-              <a:rPr lang="en-US" smtClean="0"/>
+              <a:rPr lang="en-US"/>
               <a:t>Click to edit Master title style</a:t>
             </a:r>
-            <a:endParaRPr lang="en-US"/>
           </a:p>
         </p:txBody>
       </p:sp>
@@ -5214,7 +4999,7 @@
           <a:p>
             <a:pPr lvl="0"/>
             <a:r>
-              <a:rPr lang="en-US" smtClean="0"/>
+              <a:rPr lang="en-US"/>
               <a:t>Click to edit Master text styles</a:t>
             </a:r>
           </a:p>
@@ -5237,7 +5022,7 @@
           <a:p>
             <a:fld id="{5BCAD085-E8A6-8845-BD4E-CB4CCA059FC4}" type="datetimeFigureOut">
               <a:rPr lang="en-US" smtClean="0"/>
-              <a:t>1/27/13</a:t>
+              <a:t>8/20/2026</a:t>
             </a:fld>
             <a:endParaRPr lang="en-US"/>
           </a:p>
@@ -5331,10 +5116,9 @@
           <a:lstStyle/>
           <a:p>
             <a:r>
-              <a:rPr lang="en-US" smtClean="0"/>
+              <a:rPr lang="en-US"/>
               <a:t>Click to edit Master title style</a:t>
             </a:r>
-            <a:endParaRPr lang="en-US"/>
           </a:p>
         </p:txBody>
       </p:sp>
@@ -5388,38 +5172,37 @@
           <a:p>
             <a:pPr lvl="0"/>
             <a:r>
-              <a:rPr lang="en-US" smtClean="0"/>
+              <a:rPr lang="en-US"/>
               <a:t>Click to edit Master text styles</a:t>
             </a:r>
           </a:p>
           <a:p>
             <a:pPr lvl="1"/>
             <a:r>
-              <a:rPr lang="en-US" smtClean="0"/>
+              <a:rPr lang="en-US"/>
               <a:t>Second level</a:t>
             </a:r>
           </a:p>
           <a:p>
             <a:pPr lvl="2"/>
             <a:r>
-              <a:rPr lang="en-US" smtClean="0"/>
+              <a:rPr lang="en-US"/>
               <a:t>Third level</a:t>
             </a:r>
           </a:p>
           <a:p>
             <a:pPr lvl="3"/>
             <a:r>
-              <a:rPr lang="en-US" smtClean="0"/>
+              <a:rPr lang="en-US"/>
               <a:t>Fourth level</a:t>
             </a:r>
           </a:p>
           <a:p>
             <a:pPr lvl="4"/>
             <a:r>
-              <a:rPr lang="en-US" smtClean="0"/>
+              <a:rPr lang="en-US"/>
               <a:t>Fifth level</a:t>
             </a:r>
-            <a:endParaRPr lang="en-US"/>
           </a:p>
         </p:txBody>
       </p:sp>
@@ -5473,38 +5256,37 @@
           <a:p>
             <a:pPr lvl="0"/>
             <a:r>
-              <a:rPr lang="en-US" smtClean="0"/>
+              <a:rPr lang="en-US"/>
               <a:t>Click to edit Master text styles</a:t>
             </a:r>
           </a:p>
           <a:p>
             <a:pPr lvl="1"/>
             <a:r>
-              <a:rPr lang="en-US" smtClean="0"/>
+              <a:rPr lang="en-US"/>
               <a:t>Second level</a:t>
             </a:r>
           </a:p>
           <a:p>
             <a:pPr lvl="2"/>
             <a:r>
-              <a:rPr lang="en-US" smtClean="0"/>
+              <a:rPr lang="en-US"/>
               <a:t>Third level</a:t>
             </a:r>
           </a:p>
           <a:p>
             <a:pPr lvl="3"/>
             <a:r>
-              <a:rPr lang="en-US" smtClean="0"/>
+              <a:rPr lang="en-US"/>
               <a:t>Fourth level</a:t>
             </a:r>
           </a:p>
           <a:p>
             <a:pPr lvl="4"/>
             <a:r>
-              <a:rPr lang="en-US" smtClean="0"/>
+              <a:rPr lang="en-US"/>
               <a:t>Fifth level</a:t>
             </a:r>
-            <a:endParaRPr lang="en-US"/>
           </a:p>
         </p:txBody>
       </p:sp>
@@ -5525,7 +5307,7 @@
           <a:p>
             <a:fld id="{5BCAD085-E8A6-8845-BD4E-CB4CCA059FC4}" type="datetimeFigureOut">
               <a:rPr lang="en-US" smtClean="0"/>
-              <a:t>1/27/13</a:t>
+              <a:t>8/20/2026</a:t>
             </a:fld>
             <a:endParaRPr lang="en-US"/>
           </a:p>
@@ -5623,10 +5405,9 @@
           </a:lstStyle>
           <a:p>
             <a:r>
-              <a:rPr lang="en-US" smtClean="0"/>
+              <a:rPr lang="en-US"/>
               <a:t>Click to edit Master title style</a:t>
             </a:r>
-            <a:endParaRPr lang="en-US"/>
           </a:p>
         </p:txBody>
       </p:sp>
@@ -5689,7 +5470,7 @@
           <a:p>
             <a:pPr lvl="0"/>
             <a:r>
-              <a:rPr lang="en-US" smtClean="0"/>
+              <a:rPr lang="en-US"/>
               <a:t>Click to edit Master text styles</a:t>
             </a:r>
           </a:p>
@@ -5745,38 +5526,37 @@
           <a:p>
             <a:pPr lvl="0"/>
             <a:r>
-              <a:rPr lang="en-US" smtClean="0"/>
+              <a:rPr lang="en-US"/>
               <a:t>Click to edit Master text styles</a:t>
             </a:r>
           </a:p>
           <a:p>
             <a:pPr lvl="1"/>
             <a:r>
-              <a:rPr lang="en-US" smtClean="0"/>
+              <a:rPr lang="en-US"/>
               <a:t>Second level</a:t>
             </a:r>
           </a:p>
           <a:p>
             <a:pPr lvl="2"/>
             <a:r>
-              <a:rPr lang="en-US" smtClean="0"/>
+              <a:rPr lang="en-US"/>
               <a:t>Third level</a:t>
             </a:r>
           </a:p>
           <a:p>
             <a:pPr lvl="3"/>
             <a:r>
-              <a:rPr lang="en-US" smtClean="0"/>
+              <a:rPr lang="en-US"/>
               <a:t>Fourth level</a:t>
             </a:r>
           </a:p>
           <a:p>
             <a:pPr lvl="4"/>
             <a:r>
-              <a:rPr lang="en-US" smtClean="0"/>
+              <a:rPr lang="en-US"/>
               <a:t>Fifth level</a:t>
             </a:r>
-            <a:endParaRPr lang="en-US"/>
           </a:p>
         </p:txBody>
       </p:sp>
@@ -5839,7 +5619,7 @@
           <a:p>
             <a:pPr lvl="0"/>
             <a:r>
-              <a:rPr lang="en-US" smtClean="0"/>
+              <a:rPr lang="en-US"/>
               <a:t>Click to edit Master text styles</a:t>
             </a:r>
           </a:p>
@@ -5895,38 +5675,37 @@
           <a:p>
             <a:pPr lvl="0"/>
             <a:r>
-              <a:rPr lang="en-US" smtClean="0"/>
+              <a:rPr lang="en-US"/>
               <a:t>Click to edit Master text styles</a:t>
             </a:r>
           </a:p>
           <a:p>
             <a:pPr lvl="1"/>
             <a:r>
-              <a:rPr lang="en-US" smtClean="0"/>
+              <a:rPr lang="en-US"/>
               <a:t>Second level</a:t>
             </a:r>
           </a:p>
           <a:p>
             <a:pPr lvl="2"/>
             <a:r>
-              <a:rPr lang="en-US" smtClean="0"/>
+              <a:rPr lang="en-US"/>
               <a:t>Third level</a:t>
             </a:r>
           </a:p>
           <a:p>
             <a:pPr lvl="3"/>
             <a:r>
-              <a:rPr lang="en-US" smtClean="0"/>
+              <a:rPr lang="en-US"/>
               <a:t>Fourth level</a:t>
             </a:r>
           </a:p>
           <a:p>
             <a:pPr lvl="4"/>
             <a:r>
-              <a:rPr lang="en-US" smtClean="0"/>
+              <a:rPr lang="en-US"/>
               <a:t>Fifth level</a:t>
             </a:r>
-            <a:endParaRPr lang="en-US"/>
           </a:p>
         </p:txBody>
       </p:sp>
@@ -5947,7 +5726,7 @@
           <a:p>
             <a:fld id="{5BCAD085-E8A6-8845-BD4E-CB4CCA059FC4}" type="datetimeFigureOut">
               <a:rPr lang="en-US" smtClean="0"/>
-              <a:t>1/27/13</a:t>
+              <a:t>8/20/2026</a:t>
             </a:fld>
             <a:endParaRPr lang="en-US"/>
           </a:p>
@@ -6041,10 +5820,9 @@
           <a:lstStyle/>
           <a:p>
             <a:r>
-              <a:rPr lang="en-US" smtClean="0"/>
+              <a:rPr lang="en-US"/>
               <a:t>Click to edit Master title style</a:t>
             </a:r>
-            <a:endParaRPr lang="en-US"/>
           </a:p>
         </p:txBody>
       </p:sp>
@@ -6065,7 +5843,7 @@
           <a:p>
             <a:fld id="{5BCAD085-E8A6-8845-BD4E-CB4CCA059FC4}" type="datetimeFigureOut">
               <a:rPr lang="en-US" smtClean="0"/>
-              <a:t>1/27/13</a:t>
+              <a:t>8/20/2026</a:t>
             </a:fld>
             <a:endParaRPr lang="en-US"/>
           </a:p>
@@ -6160,7 +5938,7 @@
           <a:p>
             <a:fld id="{5BCAD085-E8A6-8845-BD4E-CB4CCA059FC4}" type="datetimeFigureOut">
               <a:rPr lang="en-US" smtClean="0"/>
-              <a:t>1/27/13</a:t>
+              <a:t>8/20/2026</a:t>
             </a:fld>
             <a:endParaRPr lang="en-US"/>
           </a:p>
@@ -6263,10 +6041,9 @@
           </a:lstStyle>
           <a:p>
             <a:r>
-              <a:rPr lang="en-US" smtClean="0"/>
+              <a:rPr lang="en-US"/>
               <a:t>Click to edit Master title style</a:t>
             </a:r>
-            <a:endParaRPr lang="en-US"/>
           </a:p>
         </p:txBody>
       </p:sp>
@@ -6320,38 +6097,37 @@
           <a:p>
             <a:pPr lvl="0"/>
             <a:r>
-              <a:rPr lang="en-US" smtClean="0"/>
+              <a:rPr lang="en-US"/>
               <a:t>Click to edit Master text styles</a:t>
             </a:r>
           </a:p>
           <a:p>
             <a:pPr lvl="1"/>
             <a:r>
-              <a:rPr lang="en-US" smtClean="0"/>
+              <a:rPr lang="en-US"/>
               <a:t>Second level</a:t>
             </a:r>
           </a:p>
           <a:p>
             <a:pPr lvl="2"/>
             <a:r>
-              <a:rPr lang="en-US" smtClean="0"/>
+              <a:rPr lang="en-US"/>
               <a:t>Third level</a:t>
             </a:r>
           </a:p>
           <a:p>
             <a:pPr lvl="3"/>
             <a:r>
-              <a:rPr lang="en-US" smtClean="0"/>
+              <a:rPr lang="en-US"/>
               <a:t>Fourth level</a:t>
             </a:r>
           </a:p>
           <a:p>
             <a:pPr lvl="4"/>
             <a:r>
-              <a:rPr lang="en-US" smtClean="0"/>
+              <a:rPr lang="en-US"/>
               <a:t>Fifth level</a:t>
             </a:r>
-            <a:endParaRPr lang="en-US"/>
           </a:p>
         </p:txBody>
       </p:sp>
@@ -6414,7 +6190,7 @@
           <a:p>
             <a:pPr lvl="0"/>
             <a:r>
-              <a:rPr lang="en-US" smtClean="0"/>
+              <a:rPr lang="en-US"/>
               <a:t>Click to edit Master text styles</a:t>
             </a:r>
           </a:p>
@@ -6437,7 +6213,7 @@
           <a:p>
             <a:fld id="{5BCAD085-E8A6-8845-BD4E-CB4CCA059FC4}" type="datetimeFigureOut">
               <a:rPr lang="en-US" smtClean="0"/>
-              <a:t>1/27/13</a:t>
+              <a:t>8/20/2026</a:t>
             </a:fld>
             <a:endParaRPr lang="en-US"/>
           </a:p>
@@ -6540,10 +6316,9 @@
           </a:lstStyle>
           <a:p>
             <a:r>
-              <a:rPr lang="en-US" smtClean="0"/>
+              <a:rPr lang="en-US"/>
               <a:t>Click to edit Master title style</a:t>
             </a:r>
-            <a:endParaRPr lang="en-US"/>
           </a:p>
         </p:txBody>
       </p:sp>
@@ -6667,7 +6442,7 @@
           <a:p>
             <a:pPr lvl="0"/>
             <a:r>
-              <a:rPr lang="en-US" smtClean="0"/>
+              <a:rPr lang="en-US"/>
               <a:t>Click to edit Master text styles</a:t>
             </a:r>
           </a:p>
@@ -6690,7 +6465,7 @@
           <a:p>
             <a:fld id="{5BCAD085-E8A6-8845-BD4E-CB4CCA059FC4}" type="datetimeFigureOut">
               <a:rPr lang="en-US" smtClean="0"/>
-              <a:t>1/27/13</a:t>
+              <a:t>8/20/2026</a:t>
             </a:fld>
             <a:endParaRPr lang="en-US"/>
           </a:p>
@@ -6799,10 +6574,9 @@
           <a:lstStyle/>
           <a:p>
             <a:r>
-              <a:rPr lang="en-US" smtClean="0"/>
+              <a:rPr lang="en-US"/>
               <a:t>Click to edit Master title style</a:t>
             </a:r>
-            <a:endParaRPr lang="en-US"/>
           </a:p>
         </p:txBody>
       </p:sp>
@@ -6833,38 +6607,37 @@
           <a:p>
             <a:pPr lvl="0"/>
             <a:r>
-              <a:rPr lang="en-US" smtClean="0"/>
+              <a:rPr lang="en-US"/>
               <a:t>Click to edit Master text styles</a:t>
             </a:r>
           </a:p>
           <a:p>
             <a:pPr lvl="1"/>
             <a:r>
-              <a:rPr lang="en-US" smtClean="0"/>
+              <a:rPr lang="en-US"/>
               <a:t>Second level</a:t>
             </a:r>
           </a:p>
           <a:p>
             <a:pPr lvl="2"/>
             <a:r>
-              <a:rPr lang="en-US" smtClean="0"/>
+              <a:rPr lang="en-US"/>
               <a:t>Third level</a:t>
             </a:r>
           </a:p>
           <a:p>
             <a:pPr lvl="3"/>
             <a:r>
-              <a:rPr lang="en-US" smtClean="0"/>
+              <a:rPr lang="en-US"/>
               <a:t>Fourth level</a:t>
             </a:r>
           </a:p>
           <a:p>
             <a:pPr lvl="4"/>
             <a:r>
-              <a:rPr lang="en-US" smtClean="0"/>
+              <a:rPr lang="en-US"/>
               <a:t>Fifth level</a:t>
             </a:r>
-            <a:endParaRPr lang="en-US"/>
           </a:p>
         </p:txBody>
       </p:sp>
@@ -6903,7 +6676,7 @@
           <a:p>
             <a:fld id="{5BCAD085-E8A6-8845-BD4E-CB4CCA059FC4}" type="datetimeFigureOut">
               <a:rPr lang="en-US" smtClean="0"/>
-              <a:t>1/27/13</a:t>
+              <a:t>8/20/2026</a:t>
             </a:fld>
             <a:endParaRPr lang="en-US"/>
           </a:p>
@@ -7262,7 +7035,7 @@
 </file>
 
 <file path=ppt/slides/slide1.xml><?xml version="1.0" encoding="utf-8"?>
-<p:sld xmlns:a="http://schemas.openxmlformats.org/drawingml/2006/main" xmlns:p="http://schemas.openxmlformats.org/presentationml/2006/main" xmlns:r="http://schemas.openxmlformats.org/officeDocument/2006/relationships">
+<p:sld xmlns:a="http://schemas.openxmlformats.org/drawingml/2006/main" xmlns:r="http://schemas.openxmlformats.org/officeDocument/2006/relationships" xmlns:p="http://schemas.openxmlformats.org/presentationml/2006/main">
   <p:cSld>
     <p:bg>
       <p:bgPr>
@@ -7278,7 +7051,14 @@
         <p:cNvGrpSpPr/>
         <p:nvPr/>
       </p:nvGrpSpPr>
-      <p:grpSpPr/>
+      <p:grpSpPr>
+        <a:xfrm>
+          <a:off x="0" y="0"/>
+          <a:ext cx="0" cy="0"/>
+          <a:chOff x="0" y="0"/>
+          <a:chExt cx="0" cy="0"/>
+        </a:xfrm>
+      </p:grpSpPr>
       <p:sp>
         <p:nvSpPr>
           <p:cNvPr id="2" name="Rectangle 1"/>
@@ -7320,6 +7100,7 @@
           <a:lstStyle/>
           <a:p>
             <a:pPr algn="ctr"/>
+            <a:endParaRPr/>
           </a:p>
         </p:txBody>
       </p:sp>
@@ -7332,7 +7113,7 @@
         <p:spPr>
           <a:xfrm>
             <a:off x="1188720" y="1463040"/>
-            <a:ext cx="10058400" cy="548640"/>
+            <a:ext cx="10058400" cy="369332"/>
           </a:xfrm>
           <a:prstGeom prst="rect">
             <a:avLst/>
@@ -7357,7 +7138,61 @@
                 </a:solidFill>
                 <a:latin typeface="Malgun Gothic"/>
               </a:rPr>
-              <a:t>Oracle PL/SQL 7일 실무·DBA 운영자동화 과정  ·  제1장</a:t>
+              <a:t>Oracle PL/SQL </a:t>
+            </a:r>
+            <a:r>
+              <a:rPr sz="1800" b="1" dirty="0" err="1">
+                <a:solidFill>
+                  <a:srgbClr val="C0392B"/>
+                </a:solidFill>
+                <a:latin typeface="Malgun Gothic"/>
+              </a:rPr>
+              <a:t>실무·DBA</a:t>
+            </a:r>
+            <a:r>
+              <a:rPr sz="1800" b="1" dirty="0">
+                <a:solidFill>
+                  <a:srgbClr val="C0392B"/>
+                </a:solidFill>
+                <a:latin typeface="Malgun Gothic"/>
+              </a:rPr>
+              <a:t> </a:t>
+            </a:r>
+            <a:r>
+              <a:rPr sz="1800" b="1" dirty="0" err="1">
+                <a:solidFill>
+                  <a:srgbClr val="C0392B"/>
+                </a:solidFill>
+                <a:latin typeface="Malgun Gothic"/>
+              </a:rPr>
+              <a:t>운영자동화</a:t>
+            </a:r>
+            <a:r>
+              <a:rPr sz="1800" b="1" dirty="0">
+                <a:solidFill>
+                  <a:srgbClr val="C0392B"/>
+                </a:solidFill>
+                <a:latin typeface="Malgun Gothic"/>
+              </a:rPr>
+              <a:t> </a:t>
+            </a:r>
+            <a:r>
+              <a:rPr sz="1800" b="1" dirty="0" err="1">
+                <a:solidFill>
+                  <a:srgbClr val="C0392B"/>
+                </a:solidFill>
+                <a:latin typeface="Malgun Gothic"/>
+              </a:rPr>
+              <a:t>과정</a:t>
+            </a:r>
+            <a:r>
+              <a:rPr sz="1800" b="1" dirty="0">
+                <a:solidFill>
+                  <a:srgbClr val="C0392B"/>
+                </a:solidFill>
+                <a:latin typeface="Malgun Gothic"/>
+              </a:rPr>
+              <a:t>  ·  제1장</a:t>
             </a:r>
           </a:p>
         </p:txBody>
@@ -7449,7 +7284,7 @@
 </file>
 
 <file path=ppt/slides/slide10.xml><?xml version="1.0" encoding="utf-8"?>
-<p:sld xmlns:a="http://schemas.openxmlformats.org/drawingml/2006/main" xmlns:p="http://schemas.openxmlformats.org/presentationml/2006/main" xmlns:r="http://schemas.openxmlformats.org/officeDocument/2006/relationships">
+<p:sld xmlns:a="http://schemas.openxmlformats.org/drawingml/2006/main" xmlns:r="http://schemas.openxmlformats.org/officeDocument/2006/relationships" xmlns:p="http://schemas.openxmlformats.org/presentationml/2006/main">
   <p:cSld>
     <p:bg>
       <p:bgPr>
@@ -7465,7 +7300,14 @@
         <p:cNvGrpSpPr/>
         <p:nvPr/>
       </p:nvGrpSpPr>
-      <p:grpSpPr/>
+      <p:grpSpPr>
+        <a:xfrm>
+          <a:off x="0" y="0"/>
+          <a:ext cx="0" cy="0"/>
+          <a:chOff x="0" y="0"/>
+          <a:chExt cx="0" cy="0"/>
+        </a:xfrm>
+      </p:grpSpPr>
       <p:sp>
         <p:nvSpPr>
           <p:cNvPr id="2" name="Rectangle 1"/>
@@ -7507,6 +7349,7 @@
           <a:lstStyle/>
           <a:p>
             <a:pPr algn="ctr"/>
+            <a:endParaRPr/>
           </a:p>
         </p:txBody>
       </p:sp>
@@ -7629,6 +7472,7 @@
           <a:lstStyle/>
           <a:p>
             <a:pPr algn="ctr"/>
+            <a:endParaRPr/>
           </a:p>
         </p:txBody>
       </p:sp>
@@ -7936,7 +7780,7 @@
 </file>
 
 <file path=ppt/slides/slide11.xml><?xml version="1.0" encoding="utf-8"?>
-<p:sld xmlns:a="http://schemas.openxmlformats.org/drawingml/2006/main" xmlns:p="http://schemas.openxmlformats.org/presentationml/2006/main" xmlns:r="http://schemas.openxmlformats.org/officeDocument/2006/relationships">
+<p:sld xmlns:a="http://schemas.openxmlformats.org/drawingml/2006/main" xmlns:r="http://schemas.openxmlformats.org/officeDocument/2006/relationships" xmlns:p="http://schemas.openxmlformats.org/presentationml/2006/main">
   <p:cSld>
     <p:bg>
       <p:bgPr>
@@ -7952,7 +7796,14 @@
         <p:cNvGrpSpPr/>
         <p:nvPr/>
       </p:nvGrpSpPr>
-      <p:grpSpPr/>
+      <p:grpSpPr>
+        <a:xfrm>
+          <a:off x="0" y="0"/>
+          <a:ext cx="0" cy="0"/>
+          <a:chOff x="0" y="0"/>
+          <a:chExt cx="0" cy="0"/>
+        </a:xfrm>
+      </p:grpSpPr>
       <p:sp>
         <p:nvSpPr>
           <p:cNvPr id="2" name="Rectangle 1"/>
@@ -7994,6 +7845,7 @@
           <a:lstStyle/>
           <a:p>
             <a:pPr algn="ctr"/>
+            <a:endParaRPr/>
           </a:p>
         </p:txBody>
       </p:sp>
@@ -8212,6 +8064,7 @@
           <a:lstStyle/>
           <a:p>
             <a:pPr algn="ctr"/>
+            <a:endParaRPr/>
           </a:p>
         </p:txBody>
       </p:sp>
@@ -8256,6 +8109,7 @@
           <a:lstStyle/>
           <a:p>
             <a:pPr algn="ctr"/>
+            <a:endParaRPr/>
           </a:p>
         </p:txBody>
       </p:sp>
@@ -8311,7 +8165,7 @@
 </file>
 
 <file path=ppt/slides/slide12.xml><?xml version="1.0" encoding="utf-8"?>
-<p:sld xmlns:a="http://schemas.openxmlformats.org/drawingml/2006/main" xmlns:p="http://schemas.openxmlformats.org/presentationml/2006/main" xmlns:r="http://schemas.openxmlformats.org/officeDocument/2006/relationships">
+<p:sld xmlns:a="http://schemas.openxmlformats.org/drawingml/2006/main" xmlns:r="http://schemas.openxmlformats.org/officeDocument/2006/relationships" xmlns:p="http://schemas.openxmlformats.org/presentationml/2006/main">
   <p:cSld>
     <p:bg>
       <p:bgPr>
@@ -8327,7 +8181,14 @@
         <p:cNvGrpSpPr/>
         <p:nvPr/>
       </p:nvGrpSpPr>
-      <p:grpSpPr/>
+      <p:grpSpPr>
+        <a:xfrm>
+          <a:off x="0" y="0"/>
+          <a:ext cx="0" cy="0"/>
+          <a:chOff x="0" y="0"/>
+          <a:chExt cx="0" cy="0"/>
+        </a:xfrm>
+      </p:grpSpPr>
       <p:sp>
         <p:nvSpPr>
           <p:cNvPr id="2" name="Rectangle 1"/>
@@ -8369,6 +8230,7 @@
           <a:lstStyle/>
           <a:p>
             <a:pPr algn="ctr"/>
+            <a:endParaRPr/>
           </a:p>
         </p:txBody>
       </p:sp>
@@ -8491,6 +8353,7 @@
           <a:lstStyle/>
           <a:p>
             <a:pPr algn="ctr"/>
+            <a:endParaRPr/>
           </a:p>
         </p:txBody>
       </p:sp>
@@ -8862,7 +8725,7 @@
 </file>
 
 <file path=ppt/slides/slide13.xml><?xml version="1.0" encoding="utf-8"?>
-<p:sld xmlns:a="http://schemas.openxmlformats.org/drawingml/2006/main" xmlns:p="http://schemas.openxmlformats.org/presentationml/2006/main" xmlns:r="http://schemas.openxmlformats.org/officeDocument/2006/relationships">
+<p:sld xmlns:a="http://schemas.openxmlformats.org/drawingml/2006/main" xmlns:r="http://schemas.openxmlformats.org/officeDocument/2006/relationships" xmlns:p="http://schemas.openxmlformats.org/presentationml/2006/main">
   <p:cSld>
     <p:bg>
       <p:bgPr>
@@ -8878,7 +8741,14 @@
         <p:cNvGrpSpPr/>
         <p:nvPr/>
       </p:nvGrpSpPr>
-      <p:grpSpPr/>
+      <p:grpSpPr>
+        <a:xfrm>
+          <a:off x="0" y="0"/>
+          <a:ext cx="0" cy="0"/>
+          <a:chOff x="0" y="0"/>
+          <a:chExt cx="0" cy="0"/>
+        </a:xfrm>
+      </p:grpSpPr>
       <p:sp>
         <p:nvSpPr>
           <p:cNvPr id="2" name="Rectangle 1"/>
@@ -8920,6 +8790,7 @@
           <a:lstStyle/>
           <a:p>
             <a:pPr algn="ctr"/>
+            <a:endParaRPr/>
           </a:p>
         </p:txBody>
       </p:sp>
@@ -9138,6 +9009,7 @@
           <a:lstStyle/>
           <a:p>
             <a:pPr algn="ctr"/>
+            <a:endParaRPr/>
           </a:p>
         </p:txBody>
       </p:sp>
@@ -9182,6 +9054,7 @@
           <a:lstStyle/>
           <a:p>
             <a:pPr algn="ctr"/>
+            <a:endParaRPr/>
           </a:p>
         </p:txBody>
       </p:sp>
@@ -9237,7 +9110,7 @@
 </file>
 
 <file path=ppt/slides/slide14.xml><?xml version="1.0" encoding="utf-8"?>
-<p:sld xmlns:a="http://schemas.openxmlformats.org/drawingml/2006/main" xmlns:p="http://schemas.openxmlformats.org/presentationml/2006/main" xmlns:r="http://schemas.openxmlformats.org/officeDocument/2006/relationships">
+<p:sld xmlns:a="http://schemas.openxmlformats.org/drawingml/2006/main" xmlns:r="http://schemas.openxmlformats.org/officeDocument/2006/relationships" xmlns:p="http://schemas.openxmlformats.org/presentationml/2006/main">
   <p:cSld>
     <p:bg>
       <p:bgPr>
@@ -9253,7 +9126,14 @@
         <p:cNvGrpSpPr/>
         <p:nvPr/>
       </p:nvGrpSpPr>
-      <p:grpSpPr/>
+      <p:grpSpPr>
+        <a:xfrm>
+          <a:off x="0" y="0"/>
+          <a:ext cx="0" cy="0"/>
+          <a:chOff x="0" y="0"/>
+          <a:chExt cx="0" cy="0"/>
+        </a:xfrm>
+      </p:grpSpPr>
       <p:sp>
         <p:nvSpPr>
           <p:cNvPr id="2" name="Rectangle 1"/>
@@ -9295,6 +9175,7 @@
           <a:lstStyle/>
           <a:p>
             <a:pPr algn="ctr"/>
+            <a:endParaRPr/>
           </a:p>
         </p:txBody>
       </p:sp>
@@ -9417,6 +9298,7 @@
           <a:lstStyle/>
           <a:p>
             <a:pPr algn="ctr"/>
+            <a:endParaRPr/>
           </a:p>
         </p:txBody>
       </p:sp>
@@ -9772,7 +9654,7 @@
 </file>
 
 <file path=ppt/slides/slide15.xml><?xml version="1.0" encoding="utf-8"?>
-<p:sld xmlns:a="http://schemas.openxmlformats.org/drawingml/2006/main" xmlns:p="http://schemas.openxmlformats.org/presentationml/2006/main" xmlns:r="http://schemas.openxmlformats.org/officeDocument/2006/relationships">
+<p:sld xmlns:a="http://schemas.openxmlformats.org/drawingml/2006/main" xmlns:r="http://schemas.openxmlformats.org/officeDocument/2006/relationships" xmlns:p="http://schemas.openxmlformats.org/presentationml/2006/main">
   <p:cSld>
     <p:bg>
       <p:bgPr>
@@ -9788,7 +9670,14 @@
         <p:cNvGrpSpPr/>
         <p:nvPr/>
       </p:nvGrpSpPr>
-      <p:grpSpPr/>
+      <p:grpSpPr>
+        <a:xfrm>
+          <a:off x="0" y="0"/>
+          <a:ext cx="0" cy="0"/>
+          <a:chOff x="0" y="0"/>
+          <a:chExt cx="0" cy="0"/>
+        </a:xfrm>
+      </p:grpSpPr>
       <p:sp>
         <p:nvSpPr>
           <p:cNvPr id="2" name="TextBox 1"/>
@@ -9798,7 +9687,7 @@
         <p:spPr>
           <a:xfrm>
             <a:off x="822960" y="1371600"/>
-            <a:ext cx="2743200" cy="1371600"/>
+            <a:ext cx="3351876" cy="1107996"/>
           </a:xfrm>
           <a:prstGeom prst="rect">
             <a:avLst/>
@@ -9817,7 +9706,7 @@
               </a:spcBef>
             </a:pPr>
             <a:r>
-              <a:rPr sz="6600" b="1">
+              <a:rPr sz="6600" b="1" dirty="0">
                 <a:solidFill>
                   <a:srgbClr val="C0392B"/>
                 </a:solidFill>
@@ -9908,6 +9797,7 @@
           <a:lstStyle/>
           <a:p>
             <a:pPr algn="ctr"/>
+            <a:endParaRPr/>
           </a:p>
         </p:txBody>
       </p:sp>
@@ -9991,7 +9881,7 @@
 </file>
 
 <file path=ppt/slides/slide16.xml><?xml version="1.0" encoding="utf-8"?>
-<p:sld xmlns:a="http://schemas.openxmlformats.org/drawingml/2006/main" xmlns:p="http://schemas.openxmlformats.org/presentationml/2006/main" xmlns:r="http://schemas.openxmlformats.org/officeDocument/2006/relationships">
+<p:sld xmlns:a="http://schemas.openxmlformats.org/drawingml/2006/main" xmlns:r="http://schemas.openxmlformats.org/officeDocument/2006/relationships" xmlns:p="http://schemas.openxmlformats.org/presentationml/2006/main">
   <p:cSld>
     <p:bg>
       <p:bgPr>
@@ -10007,7 +9897,14 @@
         <p:cNvGrpSpPr/>
         <p:nvPr/>
       </p:nvGrpSpPr>
-      <p:grpSpPr/>
+      <p:grpSpPr>
+        <a:xfrm>
+          <a:off x="0" y="0"/>
+          <a:ext cx="0" cy="0"/>
+          <a:chOff x="0" y="0"/>
+          <a:chExt cx="0" cy="0"/>
+        </a:xfrm>
+      </p:grpSpPr>
       <p:sp>
         <p:nvSpPr>
           <p:cNvPr id="2" name="Rectangle 1"/>
@@ -10049,6 +9946,7 @@
           <a:lstStyle/>
           <a:p>
             <a:pPr algn="ctr"/>
+            <a:endParaRPr/>
           </a:p>
         </p:txBody>
       </p:sp>
@@ -10267,6 +10165,7 @@
           <a:lstStyle/>
           <a:p>
             <a:pPr algn="ctr"/>
+            <a:endParaRPr/>
           </a:p>
         </p:txBody>
       </p:sp>
@@ -10311,6 +10210,7 @@
           <a:lstStyle/>
           <a:p>
             <a:pPr algn="ctr"/>
+            <a:endParaRPr/>
           </a:p>
         </p:txBody>
       </p:sp>
@@ -10366,7 +10266,7 @@
 </file>
 
 <file path=ppt/slides/slide17.xml><?xml version="1.0" encoding="utf-8"?>
-<p:sld xmlns:a="http://schemas.openxmlformats.org/drawingml/2006/main" xmlns:p="http://schemas.openxmlformats.org/presentationml/2006/main" xmlns:r="http://schemas.openxmlformats.org/officeDocument/2006/relationships">
+<p:sld xmlns:a="http://schemas.openxmlformats.org/drawingml/2006/main" xmlns:r="http://schemas.openxmlformats.org/officeDocument/2006/relationships" xmlns:p="http://schemas.openxmlformats.org/presentationml/2006/main">
   <p:cSld>
     <p:bg>
       <p:bgPr>
@@ -10382,7 +10282,14 @@
         <p:cNvGrpSpPr/>
         <p:nvPr/>
       </p:nvGrpSpPr>
-      <p:grpSpPr/>
+      <p:grpSpPr>
+        <a:xfrm>
+          <a:off x="0" y="0"/>
+          <a:ext cx="0" cy="0"/>
+          <a:chOff x="0" y="0"/>
+          <a:chExt cx="0" cy="0"/>
+        </a:xfrm>
+      </p:grpSpPr>
       <p:sp>
         <p:nvSpPr>
           <p:cNvPr id="2" name="Rectangle 1"/>
@@ -10424,6 +10331,7 @@
           <a:lstStyle/>
           <a:p>
             <a:pPr algn="ctr"/>
+            <a:endParaRPr/>
           </a:p>
         </p:txBody>
       </p:sp>
@@ -10546,6 +10454,7 @@
           <a:lstStyle/>
           <a:p>
             <a:pPr algn="ctr"/>
+            <a:endParaRPr/>
           </a:p>
         </p:txBody>
       </p:sp>
@@ -10853,7 +10762,7 @@
 </file>
 
 <file path=ppt/slides/slide18.xml><?xml version="1.0" encoding="utf-8"?>
-<p:sld xmlns:a="http://schemas.openxmlformats.org/drawingml/2006/main" xmlns:p="http://schemas.openxmlformats.org/presentationml/2006/main" xmlns:r="http://schemas.openxmlformats.org/officeDocument/2006/relationships">
+<p:sld xmlns:a="http://schemas.openxmlformats.org/drawingml/2006/main" xmlns:r="http://schemas.openxmlformats.org/officeDocument/2006/relationships" xmlns:p="http://schemas.openxmlformats.org/presentationml/2006/main">
   <p:cSld>
     <p:bg>
       <p:bgPr>
@@ -10869,7 +10778,14 @@
         <p:cNvGrpSpPr/>
         <p:nvPr/>
       </p:nvGrpSpPr>
-      <p:grpSpPr/>
+      <p:grpSpPr>
+        <a:xfrm>
+          <a:off x="0" y="0"/>
+          <a:ext cx="0" cy="0"/>
+          <a:chOff x="0" y="0"/>
+          <a:chExt cx="0" cy="0"/>
+        </a:xfrm>
+      </p:grpSpPr>
       <p:sp>
         <p:nvSpPr>
           <p:cNvPr id="2" name="Rectangle 1"/>
@@ -10911,6 +10827,7 @@
           <a:lstStyle/>
           <a:p>
             <a:pPr algn="ctr"/>
+            <a:endParaRPr/>
           </a:p>
         </p:txBody>
       </p:sp>
@@ -11145,6 +11062,7 @@
           <a:lstStyle/>
           <a:p>
             <a:pPr algn="ctr"/>
+            <a:endParaRPr/>
           </a:p>
         </p:txBody>
       </p:sp>
@@ -11189,6 +11107,7 @@
           <a:lstStyle/>
           <a:p>
             <a:pPr algn="ctr"/>
+            <a:endParaRPr/>
           </a:p>
         </p:txBody>
       </p:sp>
@@ -11244,7 +11163,7 @@
 </file>
 
 <file path=ppt/slides/slide19.xml><?xml version="1.0" encoding="utf-8"?>
-<p:sld xmlns:a="http://schemas.openxmlformats.org/drawingml/2006/main" xmlns:p="http://schemas.openxmlformats.org/presentationml/2006/main" xmlns:r="http://schemas.openxmlformats.org/officeDocument/2006/relationships">
+<p:sld xmlns:a="http://schemas.openxmlformats.org/drawingml/2006/main" xmlns:r="http://schemas.openxmlformats.org/officeDocument/2006/relationships" xmlns:p="http://schemas.openxmlformats.org/presentationml/2006/main">
   <p:cSld>
     <p:bg>
       <p:bgPr>
@@ -11260,7 +11179,14 @@
         <p:cNvGrpSpPr/>
         <p:nvPr/>
       </p:nvGrpSpPr>
-      <p:grpSpPr/>
+      <p:grpSpPr>
+        <a:xfrm>
+          <a:off x="0" y="0"/>
+          <a:ext cx="0" cy="0"/>
+          <a:chOff x="0" y="0"/>
+          <a:chExt cx="0" cy="0"/>
+        </a:xfrm>
+      </p:grpSpPr>
       <p:sp>
         <p:nvSpPr>
           <p:cNvPr id="2" name="Rectangle 1"/>
@@ -11302,6 +11228,7 @@
           <a:lstStyle/>
           <a:p>
             <a:pPr algn="ctr"/>
+            <a:endParaRPr/>
           </a:p>
         </p:txBody>
       </p:sp>
@@ -11488,7 +11415,7 @@
 </file>
 
 <file path=ppt/slides/slide2.xml><?xml version="1.0" encoding="utf-8"?>
-<p:sld xmlns:a="http://schemas.openxmlformats.org/drawingml/2006/main" xmlns:p="http://schemas.openxmlformats.org/presentationml/2006/main" xmlns:r="http://schemas.openxmlformats.org/officeDocument/2006/relationships">
+<p:sld xmlns:a="http://schemas.openxmlformats.org/drawingml/2006/main" xmlns:r="http://schemas.openxmlformats.org/officeDocument/2006/relationships" xmlns:p="http://schemas.openxmlformats.org/presentationml/2006/main">
   <p:cSld>
     <p:bg>
       <p:bgPr>
@@ -11504,7 +11431,14 @@
         <p:cNvGrpSpPr/>
         <p:nvPr/>
       </p:nvGrpSpPr>
-      <p:grpSpPr/>
+      <p:grpSpPr>
+        <a:xfrm>
+          <a:off x="0" y="0"/>
+          <a:ext cx="0" cy="0"/>
+          <a:chOff x="0" y="0"/>
+          <a:chExt cx="0" cy="0"/>
+        </a:xfrm>
+      </p:grpSpPr>
       <p:sp>
         <p:nvSpPr>
           <p:cNvPr id="2" name="Rectangle 1"/>
@@ -11546,6 +11480,7 @@
           <a:lstStyle/>
           <a:p>
             <a:pPr algn="ctr"/>
+            <a:endParaRPr/>
           </a:p>
         </p:txBody>
       </p:sp>
@@ -11796,7 +11731,7 @@
 </file>
 
 <file path=ppt/slides/slide20.xml><?xml version="1.0" encoding="utf-8"?>
-<p:sld xmlns:a="http://schemas.openxmlformats.org/drawingml/2006/main" xmlns:p="http://schemas.openxmlformats.org/presentationml/2006/main" xmlns:r="http://schemas.openxmlformats.org/officeDocument/2006/relationships">
+<p:sld xmlns:a="http://schemas.openxmlformats.org/drawingml/2006/main" xmlns:r="http://schemas.openxmlformats.org/officeDocument/2006/relationships" xmlns:p="http://schemas.openxmlformats.org/presentationml/2006/main">
   <p:cSld>
     <p:bg>
       <p:bgPr>
@@ -11812,7 +11747,14 @@
         <p:cNvGrpSpPr/>
         <p:nvPr/>
       </p:nvGrpSpPr>
-      <p:grpSpPr/>
+      <p:grpSpPr>
+        <a:xfrm>
+          <a:off x="0" y="0"/>
+          <a:ext cx="0" cy="0"/>
+          <a:chOff x="0" y="0"/>
+          <a:chExt cx="0" cy="0"/>
+        </a:xfrm>
+      </p:grpSpPr>
       <p:sp>
         <p:nvSpPr>
           <p:cNvPr id="2" name="Rectangle 1"/>
@@ -11854,6 +11796,7 @@
           <a:lstStyle/>
           <a:p>
             <a:pPr algn="ctr"/>
+            <a:endParaRPr/>
           </a:p>
         </p:txBody>
       </p:sp>
@@ -11976,6 +11919,7 @@
           <a:lstStyle/>
           <a:p>
             <a:pPr algn="ctr"/>
+            <a:endParaRPr/>
           </a:p>
         </p:txBody>
       </p:sp>
@@ -12299,7 +12243,7 @@
 </file>
 
 <file path=ppt/slides/slide21.xml><?xml version="1.0" encoding="utf-8"?>
-<p:sld xmlns:a="http://schemas.openxmlformats.org/drawingml/2006/main" xmlns:p="http://schemas.openxmlformats.org/presentationml/2006/main" xmlns:r="http://schemas.openxmlformats.org/officeDocument/2006/relationships">
+<p:sld xmlns:a="http://schemas.openxmlformats.org/drawingml/2006/main" xmlns:r="http://schemas.openxmlformats.org/officeDocument/2006/relationships" xmlns:p="http://schemas.openxmlformats.org/presentationml/2006/main">
   <p:cSld>
     <p:bg>
       <p:bgPr>
@@ -12315,7 +12259,14 @@
         <p:cNvGrpSpPr/>
         <p:nvPr/>
       </p:nvGrpSpPr>
-      <p:grpSpPr/>
+      <p:grpSpPr>
+        <a:xfrm>
+          <a:off x="0" y="0"/>
+          <a:ext cx="0" cy="0"/>
+          <a:chOff x="0" y="0"/>
+          <a:chExt cx="0" cy="0"/>
+        </a:xfrm>
+      </p:grpSpPr>
       <p:sp>
         <p:nvSpPr>
           <p:cNvPr id="2" name="Rectangle 1"/>
@@ -12357,6 +12308,7 @@
           <a:lstStyle/>
           <a:p>
             <a:pPr algn="ctr"/>
+            <a:endParaRPr/>
           </a:p>
         </p:txBody>
       </p:sp>
@@ -12575,6 +12527,7 @@
           <a:lstStyle/>
           <a:p>
             <a:pPr algn="ctr"/>
+            <a:endParaRPr/>
           </a:p>
         </p:txBody>
       </p:sp>
@@ -12619,6 +12572,7 @@
           <a:lstStyle/>
           <a:p>
             <a:pPr algn="ctr"/>
+            <a:endParaRPr/>
           </a:p>
         </p:txBody>
       </p:sp>
@@ -12674,7 +12628,7 @@
 </file>
 
 <file path=ppt/slides/slide22.xml><?xml version="1.0" encoding="utf-8"?>
-<p:sld xmlns:a="http://schemas.openxmlformats.org/drawingml/2006/main" xmlns:p="http://schemas.openxmlformats.org/presentationml/2006/main" xmlns:r="http://schemas.openxmlformats.org/officeDocument/2006/relationships">
+<p:sld xmlns:a="http://schemas.openxmlformats.org/drawingml/2006/main" xmlns:r="http://schemas.openxmlformats.org/officeDocument/2006/relationships" xmlns:p="http://schemas.openxmlformats.org/presentationml/2006/main">
   <p:cSld>
     <p:bg>
       <p:bgPr>
@@ -12690,7 +12644,14 @@
         <p:cNvGrpSpPr/>
         <p:nvPr/>
       </p:nvGrpSpPr>
-      <p:grpSpPr/>
+      <p:grpSpPr>
+        <a:xfrm>
+          <a:off x="0" y="0"/>
+          <a:ext cx="0" cy="0"/>
+          <a:chOff x="0" y="0"/>
+          <a:chExt cx="0" cy="0"/>
+        </a:xfrm>
+      </p:grpSpPr>
       <p:sp>
         <p:nvSpPr>
           <p:cNvPr id="2" name="Rectangle 1"/>
@@ -12732,6 +12693,7 @@
           <a:lstStyle/>
           <a:p>
             <a:pPr algn="ctr"/>
+            <a:endParaRPr/>
           </a:p>
         </p:txBody>
       </p:sp>
@@ -12950,6 +12912,7 @@
           <a:lstStyle/>
           <a:p>
             <a:pPr algn="ctr"/>
+            <a:endParaRPr/>
           </a:p>
         </p:txBody>
       </p:sp>
@@ -12994,6 +12957,7 @@
           <a:lstStyle/>
           <a:p>
             <a:pPr algn="ctr"/>
+            <a:endParaRPr/>
           </a:p>
         </p:txBody>
       </p:sp>
@@ -13049,7 +13013,7 @@
 </file>
 
 <file path=ppt/slides/slide23.xml><?xml version="1.0" encoding="utf-8"?>
-<p:sld xmlns:a="http://schemas.openxmlformats.org/drawingml/2006/main" xmlns:p="http://schemas.openxmlformats.org/presentationml/2006/main" xmlns:r="http://schemas.openxmlformats.org/officeDocument/2006/relationships">
+<p:sld xmlns:a="http://schemas.openxmlformats.org/drawingml/2006/main" xmlns:r="http://schemas.openxmlformats.org/officeDocument/2006/relationships" xmlns:p="http://schemas.openxmlformats.org/presentationml/2006/main">
   <p:cSld>
     <p:bg>
       <p:bgPr>
@@ -13065,7 +13029,14 @@
         <p:cNvGrpSpPr/>
         <p:nvPr/>
       </p:nvGrpSpPr>
-      <p:grpSpPr/>
+      <p:grpSpPr>
+        <a:xfrm>
+          <a:off x="0" y="0"/>
+          <a:ext cx="0" cy="0"/>
+          <a:chOff x="0" y="0"/>
+          <a:chExt cx="0" cy="0"/>
+        </a:xfrm>
+      </p:grpSpPr>
       <p:sp>
         <p:nvSpPr>
           <p:cNvPr id="2" name="Rectangle 1"/>
@@ -13107,6 +13078,7 @@
           <a:lstStyle/>
           <a:p>
             <a:pPr algn="ctr"/>
+            <a:endParaRPr/>
           </a:p>
         </p:txBody>
       </p:sp>
@@ -13309,7 +13281,7 @@
 </file>
 
 <file path=ppt/slides/slide24.xml><?xml version="1.0" encoding="utf-8"?>
-<p:sld xmlns:a="http://schemas.openxmlformats.org/drawingml/2006/main" xmlns:p="http://schemas.openxmlformats.org/presentationml/2006/main" xmlns:r="http://schemas.openxmlformats.org/officeDocument/2006/relationships">
+<p:sld xmlns:a="http://schemas.openxmlformats.org/drawingml/2006/main" xmlns:r="http://schemas.openxmlformats.org/officeDocument/2006/relationships" xmlns:p="http://schemas.openxmlformats.org/presentationml/2006/main">
   <p:cSld>
     <p:bg>
       <p:bgPr>
@@ -13325,7 +13297,14 @@
         <p:cNvGrpSpPr/>
         <p:nvPr/>
       </p:nvGrpSpPr>
-      <p:grpSpPr/>
+      <p:grpSpPr>
+        <a:xfrm>
+          <a:off x="0" y="0"/>
+          <a:ext cx="0" cy="0"/>
+          <a:chOff x="0" y="0"/>
+          <a:chExt cx="0" cy="0"/>
+        </a:xfrm>
+      </p:grpSpPr>
       <p:sp>
         <p:nvSpPr>
           <p:cNvPr id="2" name="Rectangle 1"/>
@@ -13367,6 +13346,7 @@
           <a:lstStyle/>
           <a:p>
             <a:pPr algn="ctr"/>
+            <a:endParaRPr/>
           </a:p>
         </p:txBody>
       </p:sp>
@@ -13489,6 +13469,7 @@
           <a:lstStyle/>
           <a:p>
             <a:pPr algn="ctr"/>
+            <a:endParaRPr/>
           </a:p>
         </p:txBody>
       </p:sp>
@@ -13796,7 +13777,7 @@
 </file>
 
 <file path=ppt/slides/slide25.xml><?xml version="1.0" encoding="utf-8"?>
-<p:sld xmlns:a="http://schemas.openxmlformats.org/drawingml/2006/main" xmlns:p="http://schemas.openxmlformats.org/presentationml/2006/main" xmlns:r="http://schemas.openxmlformats.org/officeDocument/2006/relationships">
+<p:sld xmlns:a="http://schemas.openxmlformats.org/drawingml/2006/main" xmlns:r="http://schemas.openxmlformats.org/officeDocument/2006/relationships" xmlns:p="http://schemas.openxmlformats.org/presentationml/2006/main">
   <p:cSld>
     <p:bg>
       <p:bgPr>
@@ -13812,7 +13793,14 @@
         <p:cNvGrpSpPr/>
         <p:nvPr/>
       </p:nvGrpSpPr>
-      <p:grpSpPr/>
+      <p:grpSpPr>
+        <a:xfrm>
+          <a:off x="0" y="0"/>
+          <a:ext cx="0" cy="0"/>
+          <a:chOff x="0" y="0"/>
+          <a:chExt cx="0" cy="0"/>
+        </a:xfrm>
+      </p:grpSpPr>
       <p:sp>
         <p:nvSpPr>
           <p:cNvPr id="2" name="TextBox 1"/>
@@ -13821,8 +13809,8 @@
         </p:nvSpPr>
         <p:spPr>
           <a:xfrm>
-            <a:off x="822960" y="1371600"/>
-            <a:ext cx="2743200" cy="1371600"/>
+            <a:off x="822959" y="1371600"/>
+            <a:ext cx="3628967" cy="1107996"/>
           </a:xfrm>
           <a:prstGeom prst="rect">
             <a:avLst/>
@@ -13841,7 +13829,7 @@
               </a:spcBef>
             </a:pPr>
             <a:r>
-              <a:rPr sz="6600" b="1">
+              <a:rPr sz="6600" b="1" dirty="0">
                 <a:solidFill>
                   <a:srgbClr val="C0392B"/>
                 </a:solidFill>
@@ -13932,6 +13920,7 @@
           <a:lstStyle/>
           <a:p>
             <a:pPr algn="ctr"/>
+            <a:endParaRPr/>
           </a:p>
         </p:txBody>
       </p:sp>
@@ -14015,7 +14004,7 @@
 </file>
 
 <file path=ppt/slides/slide26.xml><?xml version="1.0" encoding="utf-8"?>
-<p:sld xmlns:a="http://schemas.openxmlformats.org/drawingml/2006/main" xmlns:p="http://schemas.openxmlformats.org/presentationml/2006/main" xmlns:r="http://schemas.openxmlformats.org/officeDocument/2006/relationships">
+<p:sld xmlns:a="http://schemas.openxmlformats.org/drawingml/2006/main" xmlns:r="http://schemas.openxmlformats.org/officeDocument/2006/relationships" xmlns:p="http://schemas.openxmlformats.org/presentationml/2006/main">
   <p:cSld>
     <p:bg>
       <p:bgPr>
@@ -14031,7 +14020,14 @@
         <p:cNvGrpSpPr/>
         <p:nvPr/>
       </p:nvGrpSpPr>
-      <p:grpSpPr/>
+      <p:grpSpPr>
+        <a:xfrm>
+          <a:off x="0" y="0"/>
+          <a:ext cx="0" cy="0"/>
+          <a:chOff x="0" y="0"/>
+          <a:chExt cx="0" cy="0"/>
+        </a:xfrm>
+      </p:grpSpPr>
       <p:sp>
         <p:nvSpPr>
           <p:cNvPr id="2" name="Rectangle 1"/>
@@ -14073,6 +14069,7 @@
           <a:lstStyle/>
           <a:p>
             <a:pPr algn="ctr"/>
+            <a:endParaRPr/>
           </a:p>
         </p:txBody>
       </p:sp>
@@ -14291,6 +14288,7 @@
           <a:lstStyle/>
           <a:p>
             <a:pPr algn="ctr"/>
+            <a:endParaRPr/>
           </a:p>
         </p:txBody>
       </p:sp>
@@ -14335,6 +14333,7 @@
           <a:lstStyle/>
           <a:p>
             <a:pPr algn="ctr"/>
+            <a:endParaRPr/>
           </a:p>
         </p:txBody>
       </p:sp>
@@ -14390,7 +14389,7 @@
 </file>
 
 <file path=ppt/slides/slide27.xml><?xml version="1.0" encoding="utf-8"?>
-<p:sld xmlns:a="http://schemas.openxmlformats.org/drawingml/2006/main" xmlns:p="http://schemas.openxmlformats.org/presentationml/2006/main" xmlns:r="http://schemas.openxmlformats.org/officeDocument/2006/relationships">
+<p:sld xmlns:a="http://schemas.openxmlformats.org/drawingml/2006/main" xmlns:r="http://schemas.openxmlformats.org/officeDocument/2006/relationships" xmlns:p="http://schemas.openxmlformats.org/presentationml/2006/main">
   <p:cSld>
     <p:bg>
       <p:bgPr>
@@ -14406,7 +14405,14 @@
         <p:cNvGrpSpPr/>
         <p:nvPr/>
       </p:nvGrpSpPr>
-      <p:grpSpPr/>
+      <p:grpSpPr>
+        <a:xfrm>
+          <a:off x="0" y="0"/>
+          <a:ext cx="0" cy="0"/>
+          <a:chOff x="0" y="0"/>
+          <a:chExt cx="0" cy="0"/>
+        </a:xfrm>
+      </p:grpSpPr>
       <p:sp>
         <p:nvSpPr>
           <p:cNvPr id="2" name="Rectangle 1"/>
@@ -14448,6 +14454,7 @@
           <a:lstStyle/>
           <a:p>
             <a:pPr algn="ctr"/>
+            <a:endParaRPr/>
           </a:p>
         </p:txBody>
       </p:sp>
@@ -14570,6 +14577,7 @@
           <a:lstStyle/>
           <a:p>
             <a:pPr algn="ctr"/>
+            <a:endParaRPr/>
           </a:p>
         </p:txBody>
       </p:sp>
@@ -14909,7 +14917,7 @@
 </file>
 
 <file path=ppt/slides/slide28.xml><?xml version="1.0" encoding="utf-8"?>
-<p:sld xmlns:a="http://schemas.openxmlformats.org/drawingml/2006/main" xmlns:p="http://schemas.openxmlformats.org/presentationml/2006/main" xmlns:r="http://schemas.openxmlformats.org/officeDocument/2006/relationships">
+<p:sld xmlns:a="http://schemas.openxmlformats.org/drawingml/2006/main" xmlns:r="http://schemas.openxmlformats.org/officeDocument/2006/relationships" xmlns:p="http://schemas.openxmlformats.org/presentationml/2006/main">
   <p:cSld>
     <p:bg>
       <p:bgPr>
@@ -14925,7 +14933,14 @@
         <p:cNvGrpSpPr/>
         <p:nvPr/>
       </p:nvGrpSpPr>
-      <p:grpSpPr/>
+      <p:grpSpPr>
+        <a:xfrm>
+          <a:off x="0" y="0"/>
+          <a:ext cx="0" cy="0"/>
+          <a:chOff x="0" y="0"/>
+          <a:chExt cx="0" cy="0"/>
+        </a:xfrm>
+      </p:grpSpPr>
       <p:sp>
         <p:nvSpPr>
           <p:cNvPr id="2" name="Rectangle 1"/>
@@ -14967,6 +14982,7 @@
           <a:lstStyle/>
           <a:p>
             <a:pPr algn="ctr"/>
+            <a:endParaRPr/>
           </a:p>
         </p:txBody>
       </p:sp>
@@ -15153,7 +15169,7 @@
 </file>
 
 <file path=ppt/slides/slide29.xml><?xml version="1.0" encoding="utf-8"?>
-<p:sld xmlns:a="http://schemas.openxmlformats.org/drawingml/2006/main" xmlns:p="http://schemas.openxmlformats.org/presentationml/2006/main" xmlns:r="http://schemas.openxmlformats.org/officeDocument/2006/relationships">
+<p:sld xmlns:a="http://schemas.openxmlformats.org/drawingml/2006/main" xmlns:r="http://schemas.openxmlformats.org/officeDocument/2006/relationships" xmlns:p="http://schemas.openxmlformats.org/presentationml/2006/main">
   <p:cSld>
     <p:bg>
       <p:bgPr>
@@ -15169,7 +15185,14 @@
         <p:cNvGrpSpPr/>
         <p:nvPr/>
       </p:nvGrpSpPr>
-      <p:grpSpPr/>
+      <p:grpSpPr>
+        <a:xfrm>
+          <a:off x="0" y="0"/>
+          <a:ext cx="0" cy="0"/>
+          <a:chOff x="0" y="0"/>
+          <a:chExt cx="0" cy="0"/>
+        </a:xfrm>
+      </p:grpSpPr>
       <p:sp>
         <p:nvSpPr>
           <p:cNvPr id="2" name="Rectangle 1"/>
@@ -15211,6 +15234,7 @@
           <a:lstStyle/>
           <a:p>
             <a:pPr algn="ctr"/>
+            <a:endParaRPr/>
           </a:p>
         </p:txBody>
       </p:sp>
@@ -15333,6 +15357,7 @@
           <a:lstStyle/>
           <a:p>
             <a:pPr algn="ctr"/>
+            <a:endParaRPr/>
           </a:p>
         </p:txBody>
       </p:sp>
@@ -15688,7 +15713,7 @@
 </file>
 
 <file path=ppt/slides/slide3.xml><?xml version="1.0" encoding="utf-8"?>
-<p:sld xmlns:a="http://schemas.openxmlformats.org/drawingml/2006/main" xmlns:p="http://schemas.openxmlformats.org/presentationml/2006/main" xmlns:r="http://schemas.openxmlformats.org/officeDocument/2006/relationships">
+<p:sld xmlns:a="http://schemas.openxmlformats.org/drawingml/2006/main" xmlns:r="http://schemas.openxmlformats.org/officeDocument/2006/relationships" xmlns:p="http://schemas.openxmlformats.org/presentationml/2006/main">
   <p:cSld>
     <p:bg>
       <p:bgPr>
@@ -15704,7 +15729,14 @@
         <p:cNvGrpSpPr/>
         <p:nvPr/>
       </p:nvGrpSpPr>
-      <p:grpSpPr/>
+      <p:grpSpPr>
+        <a:xfrm>
+          <a:off x="0" y="0"/>
+          <a:ext cx="0" cy="0"/>
+          <a:chOff x="0" y="0"/>
+          <a:chExt cx="0" cy="0"/>
+        </a:xfrm>
+      </p:grpSpPr>
       <p:sp>
         <p:nvSpPr>
           <p:cNvPr id="2" name="Rectangle 1"/>
@@ -15746,6 +15778,7 @@
           <a:lstStyle/>
           <a:p>
             <a:pPr algn="ctr"/>
+            <a:endParaRPr/>
           </a:p>
         </p:txBody>
       </p:sp>
@@ -15932,7 +15965,7 @@
 </file>
 
 <file path=ppt/slides/slide30.xml><?xml version="1.0" encoding="utf-8"?>
-<p:sld xmlns:a="http://schemas.openxmlformats.org/drawingml/2006/main" xmlns:p="http://schemas.openxmlformats.org/presentationml/2006/main" xmlns:r="http://schemas.openxmlformats.org/officeDocument/2006/relationships">
+<p:sld xmlns:a="http://schemas.openxmlformats.org/drawingml/2006/main" xmlns:r="http://schemas.openxmlformats.org/officeDocument/2006/relationships" xmlns:p="http://schemas.openxmlformats.org/presentationml/2006/main">
   <p:cSld>
     <p:bg>
       <p:bgPr>
@@ -15948,7 +15981,14 @@
         <p:cNvGrpSpPr/>
         <p:nvPr/>
       </p:nvGrpSpPr>
-      <p:grpSpPr/>
+      <p:grpSpPr>
+        <a:xfrm>
+          <a:off x="0" y="0"/>
+          <a:ext cx="0" cy="0"/>
+          <a:chOff x="0" y="0"/>
+          <a:chExt cx="0" cy="0"/>
+        </a:xfrm>
+      </p:grpSpPr>
       <p:sp>
         <p:nvSpPr>
           <p:cNvPr id="2" name="TextBox 1"/>
@@ -15958,7 +15998,7 @@
         <p:spPr>
           <a:xfrm>
             <a:off x="822960" y="1371600"/>
-            <a:ext cx="2743200" cy="1371600"/>
+            <a:ext cx="4114800" cy="2123658"/>
           </a:xfrm>
           <a:prstGeom prst="rect">
             <a:avLst/>
@@ -15977,7 +16017,7 @@
               </a:spcBef>
             </a:pPr>
             <a:r>
-              <a:rPr sz="6600" b="1">
+              <a:rPr sz="6600" b="1" dirty="0">
                 <a:solidFill>
                   <a:srgbClr val="C0392B"/>
                 </a:solidFill>
@@ -16068,6 +16108,7 @@
           <a:lstStyle/>
           <a:p>
             <a:pPr algn="ctr"/>
+            <a:endParaRPr/>
           </a:p>
         </p:txBody>
       </p:sp>
@@ -16151,7 +16192,7 @@
 </file>
 
 <file path=ppt/slides/slide31.xml><?xml version="1.0" encoding="utf-8"?>
-<p:sld xmlns:a="http://schemas.openxmlformats.org/drawingml/2006/main" xmlns:p="http://schemas.openxmlformats.org/presentationml/2006/main" xmlns:r="http://schemas.openxmlformats.org/officeDocument/2006/relationships">
+<p:sld xmlns:a="http://schemas.openxmlformats.org/drawingml/2006/main" xmlns:r="http://schemas.openxmlformats.org/officeDocument/2006/relationships" xmlns:p="http://schemas.openxmlformats.org/presentationml/2006/main">
   <p:cSld>
     <p:bg>
       <p:bgPr>
@@ -16167,7 +16208,14 @@
         <p:cNvGrpSpPr/>
         <p:nvPr/>
       </p:nvGrpSpPr>
-      <p:grpSpPr/>
+      <p:grpSpPr>
+        <a:xfrm>
+          <a:off x="0" y="0"/>
+          <a:ext cx="0" cy="0"/>
+          <a:chOff x="0" y="0"/>
+          <a:chExt cx="0" cy="0"/>
+        </a:xfrm>
+      </p:grpSpPr>
       <p:sp>
         <p:nvSpPr>
           <p:cNvPr id="2" name="Rectangle 1"/>
@@ -16209,6 +16257,7 @@
           <a:lstStyle/>
           <a:p>
             <a:pPr algn="ctr"/>
+            <a:endParaRPr/>
           </a:p>
         </p:txBody>
       </p:sp>
@@ -16427,6 +16476,7 @@
           <a:lstStyle/>
           <a:p>
             <a:pPr algn="ctr"/>
+            <a:endParaRPr/>
           </a:p>
         </p:txBody>
       </p:sp>
@@ -16471,6 +16521,7 @@
           <a:lstStyle/>
           <a:p>
             <a:pPr algn="ctr"/>
+            <a:endParaRPr/>
           </a:p>
         </p:txBody>
       </p:sp>
@@ -16526,7 +16577,7 @@
 </file>
 
 <file path=ppt/slides/slide32.xml><?xml version="1.0" encoding="utf-8"?>
-<p:sld xmlns:a="http://schemas.openxmlformats.org/drawingml/2006/main" xmlns:p="http://schemas.openxmlformats.org/presentationml/2006/main" xmlns:r="http://schemas.openxmlformats.org/officeDocument/2006/relationships">
+<p:sld xmlns:a="http://schemas.openxmlformats.org/drawingml/2006/main" xmlns:r="http://schemas.openxmlformats.org/officeDocument/2006/relationships" xmlns:p="http://schemas.openxmlformats.org/presentationml/2006/main">
   <p:cSld>
     <p:bg>
       <p:bgPr>
@@ -16542,7 +16593,14 @@
         <p:cNvGrpSpPr/>
         <p:nvPr/>
       </p:nvGrpSpPr>
-      <p:grpSpPr/>
+      <p:grpSpPr>
+        <a:xfrm>
+          <a:off x="0" y="0"/>
+          <a:ext cx="0" cy="0"/>
+          <a:chOff x="0" y="0"/>
+          <a:chExt cx="0" cy="0"/>
+        </a:xfrm>
+      </p:grpSpPr>
       <p:sp>
         <p:nvSpPr>
           <p:cNvPr id="2" name="Rectangle 1"/>
@@ -16584,6 +16642,7 @@
           <a:lstStyle/>
           <a:p>
             <a:pPr algn="ctr"/>
+            <a:endParaRPr/>
           </a:p>
         </p:txBody>
       </p:sp>
@@ -16706,6 +16765,7 @@
           <a:lstStyle/>
           <a:p>
             <a:pPr algn="ctr"/>
+            <a:endParaRPr/>
           </a:p>
         </p:txBody>
       </p:sp>
@@ -17013,7 +17073,7 @@
 </file>
 
 <file path=ppt/slides/slide33.xml><?xml version="1.0" encoding="utf-8"?>
-<p:sld xmlns:a="http://schemas.openxmlformats.org/drawingml/2006/main" xmlns:p="http://schemas.openxmlformats.org/presentationml/2006/main" xmlns:r="http://schemas.openxmlformats.org/officeDocument/2006/relationships">
+<p:sld xmlns:a="http://schemas.openxmlformats.org/drawingml/2006/main" xmlns:r="http://schemas.openxmlformats.org/officeDocument/2006/relationships" xmlns:p="http://schemas.openxmlformats.org/presentationml/2006/main">
   <p:cSld>
     <p:bg>
       <p:bgPr>
@@ -17029,7 +17089,14 @@
         <p:cNvGrpSpPr/>
         <p:nvPr/>
       </p:nvGrpSpPr>
-      <p:grpSpPr/>
+      <p:grpSpPr>
+        <a:xfrm>
+          <a:off x="0" y="0"/>
+          <a:ext cx="0" cy="0"/>
+          <a:chOff x="0" y="0"/>
+          <a:chExt cx="0" cy="0"/>
+        </a:xfrm>
+      </p:grpSpPr>
       <p:sp>
         <p:nvSpPr>
           <p:cNvPr id="2" name="Rectangle 1"/>
@@ -17071,6 +17138,7 @@
           <a:lstStyle/>
           <a:p>
             <a:pPr algn="ctr"/>
+            <a:endParaRPr/>
           </a:p>
         </p:txBody>
       </p:sp>
@@ -17289,6 +17357,7 @@
           <a:lstStyle/>
           <a:p>
             <a:pPr algn="ctr"/>
+            <a:endParaRPr/>
           </a:p>
         </p:txBody>
       </p:sp>
@@ -17333,6 +17402,7 @@
           <a:lstStyle/>
           <a:p>
             <a:pPr algn="ctr"/>
+            <a:endParaRPr/>
           </a:p>
         </p:txBody>
       </p:sp>
@@ -17388,7 +17458,7 @@
 </file>
 
 <file path=ppt/slides/slide34.xml><?xml version="1.0" encoding="utf-8"?>
-<p:sld xmlns:a="http://schemas.openxmlformats.org/drawingml/2006/main" xmlns:p="http://schemas.openxmlformats.org/presentationml/2006/main" xmlns:r="http://schemas.openxmlformats.org/officeDocument/2006/relationships">
+<p:sld xmlns:a="http://schemas.openxmlformats.org/drawingml/2006/main" xmlns:r="http://schemas.openxmlformats.org/officeDocument/2006/relationships" xmlns:p="http://schemas.openxmlformats.org/presentationml/2006/main">
   <p:cSld>
     <p:bg>
       <p:bgPr>
@@ -17404,7 +17474,14 @@
         <p:cNvGrpSpPr/>
         <p:nvPr/>
       </p:nvGrpSpPr>
-      <p:grpSpPr/>
+      <p:grpSpPr>
+        <a:xfrm>
+          <a:off x="0" y="0"/>
+          <a:ext cx="0" cy="0"/>
+          <a:chOff x="0" y="0"/>
+          <a:chExt cx="0" cy="0"/>
+        </a:xfrm>
+      </p:grpSpPr>
       <p:sp>
         <p:nvSpPr>
           <p:cNvPr id="2" name="Rectangle 1"/>
@@ -17446,6 +17523,7 @@
           <a:lstStyle/>
           <a:p>
             <a:pPr algn="ctr"/>
+            <a:endParaRPr/>
           </a:p>
         </p:txBody>
       </p:sp>
@@ -17568,6 +17646,7 @@
           <a:lstStyle/>
           <a:p>
             <a:pPr algn="ctr"/>
+            <a:endParaRPr/>
           </a:p>
         </p:txBody>
       </p:sp>
@@ -17955,7 +18034,7 @@
 </file>
 
 <file path=ppt/slides/slide35.xml><?xml version="1.0" encoding="utf-8"?>
-<p:sld xmlns:a="http://schemas.openxmlformats.org/drawingml/2006/main" xmlns:p="http://schemas.openxmlformats.org/presentationml/2006/main" xmlns:r="http://schemas.openxmlformats.org/officeDocument/2006/relationships">
+<p:sld xmlns:a="http://schemas.openxmlformats.org/drawingml/2006/main" xmlns:r="http://schemas.openxmlformats.org/officeDocument/2006/relationships" xmlns:p="http://schemas.openxmlformats.org/presentationml/2006/main">
   <p:cSld>
     <p:bg>
       <p:bgPr>
@@ -17971,7 +18050,14 @@
         <p:cNvGrpSpPr/>
         <p:nvPr/>
       </p:nvGrpSpPr>
-      <p:grpSpPr/>
+      <p:grpSpPr>
+        <a:xfrm>
+          <a:off x="0" y="0"/>
+          <a:ext cx="0" cy="0"/>
+          <a:chOff x="0" y="0"/>
+          <a:chExt cx="0" cy="0"/>
+        </a:xfrm>
+      </p:grpSpPr>
       <p:sp>
         <p:nvSpPr>
           <p:cNvPr id="2" name="Rectangle 1"/>
@@ -18013,6 +18099,7 @@
           <a:lstStyle/>
           <a:p>
             <a:pPr algn="ctr"/>
+            <a:endParaRPr/>
           </a:p>
         </p:txBody>
       </p:sp>
@@ -18231,6 +18318,7 @@
           <a:lstStyle/>
           <a:p>
             <a:pPr algn="ctr"/>
+            <a:endParaRPr/>
           </a:p>
         </p:txBody>
       </p:sp>
@@ -18275,6 +18363,7 @@
           <a:lstStyle/>
           <a:p>
             <a:pPr algn="ctr"/>
+            <a:endParaRPr/>
           </a:p>
         </p:txBody>
       </p:sp>
@@ -18330,7 +18419,7 @@
 </file>
 
 <file path=ppt/slides/slide36.xml><?xml version="1.0" encoding="utf-8"?>
-<p:sld xmlns:a="http://schemas.openxmlformats.org/drawingml/2006/main" xmlns:p="http://schemas.openxmlformats.org/presentationml/2006/main" xmlns:r="http://schemas.openxmlformats.org/officeDocument/2006/relationships">
+<p:sld xmlns:a="http://schemas.openxmlformats.org/drawingml/2006/main" xmlns:r="http://schemas.openxmlformats.org/officeDocument/2006/relationships" xmlns:p="http://schemas.openxmlformats.org/presentationml/2006/main">
   <p:cSld>
     <p:bg>
       <p:bgPr>
@@ -18346,7 +18435,14 @@
         <p:cNvGrpSpPr/>
         <p:nvPr/>
       </p:nvGrpSpPr>
-      <p:grpSpPr/>
+      <p:grpSpPr>
+        <a:xfrm>
+          <a:off x="0" y="0"/>
+          <a:ext cx="0" cy="0"/>
+          <a:chOff x="0" y="0"/>
+          <a:chExt cx="0" cy="0"/>
+        </a:xfrm>
+      </p:grpSpPr>
       <p:sp>
         <p:nvSpPr>
           <p:cNvPr id="2" name="Rectangle 1"/>
@@ -18388,6 +18484,7 @@
           <a:lstStyle/>
           <a:p>
             <a:pPr algn="ctr"/>
+            <a:endParaRPr/>
           </a:p>
         </p:txBody>
       </p:sp>
@@ -18510,6 +18607,7 @@
           <a:lstStyle/>
           <a:p>
             <a:pPr algn="ctr"/>
+            <a:endParaRPr/>
           </a:p>
         </p:txBody>
       </p:sp>
@@ -18881,7 +18979,7 @@
 </file>
 
 <file path=ppt/slides/slide37.xml><?xml version="1.0" encoding="utf-8"?>
-<p:sld xmlns:a="http://schemas.openxmlformats.org/drawingml/2006/main" xmlns:p="http://schemas.openxmlformats.org/presentationml/2006/main" xmlns:r="http://schemas.openxmlformats.org/officeDocument/2006/relationships">
+<p:sld xmlns:a="http://schemas.openxmlformats.org/drawingml/2006/main" xmlns:r="http://schemas.openxmlformats.org/officeDocument/2006/relationships" xmlns:p="http://schemas.openxmlformats.org/presentationml/2006/main">
   <p:cSld>
     <p:bg>
       <p:bgPr>
@@ -18897,7 +18995,14 @@
         <p:cNvGrpSpPr/>
         <p:nvPr/>
       </p:nvGrpSpPr>
-      <p:grpSpPr/>
+      <p:grpSpPr>
+        <a:xfrm>
+          <a:off x="0" y="0"/>
+          <a:ext cx="0" cy="0"/>
+          <a:chOff x="0" y="0"/>
+          <a:chExt cx="0" cy="0"/>
+        </a:xfrm>
+      </p:grpSpPr>
       <p:sp>
         <p:nvSpPr>
           <p:cNvPr id="2" name="TextBox 1"/>
@@ -18906,8 +19011,8 @@
         </p:nvSpPr>
         <p:spPr>
           <a:xfrm>
-            <a:off x="822960" y="1371600"/>
-            <a:ext cx="2743200" cy="1371600"/>
+            <a:off x="822959" y="1371600"/>
+            <a:ext cx="5143732" cy="1107996"/>
           </a:xfrm>
           <a:prstGeom prst="rect">
             <a:avLst/>
@@ -18926,7 +19031,7 @@
               </a:spcBef>
             </a:pPr>
             <a:r>
-              <a:rPr sz="6600" b="1">
+              <a:rPr sz="6600" b="1" dirty="0">
                 <a:solidFill>
                   <a:srgbClr val="C0392B"/>
                 </a:solidFill>
@@ -18946,7 +19051,7 @@
         <p:spPr>
           <a:xfrm>
             <a:off x="822960" y="2743200"/>
-            <a:ext cx="10515600" cy="1097280"/>
+            <a:ext cx="10515600" cy="615553"/>
           </a:xfrm>
           <a:prstGeom prst="rect">
             <a:avLst/>
@@ -18965,14 +19070,56 @@
               </a:spcBef>
             </a:pPr>
             <a:r>
-              <a:rPr sz="3400" b="1">
+              <a:rPr lang="en-US" sz="3400" b="1" dirty="0">
                 <a:solidFill>
                   <a:srgbClr val="FFFFFF"/>
                 </a:solidFill>
                 <a:latin typeface="Malgun Gothic"/>
               </a:rPr>
-              <a:t>스코프 · 조건문 · 연산자</a:t>
-            </a:r>
+              <a:t>Scope</a:t>
+            </a:r>
+            <a:r>
+              <a:rPr sz="3400" b="1" dirty="0">
+                <a:solidFill>
+                  <a:srgbClr val="FFFFFF"/>
+                </a:solidFill>
+                <a:latin typeface="Malgun Gothic"/>
+              </a:rPr>
+              <a:t> · </a:t>
+            </a:r>
+            <a:r>
+              <a:rPr sz="3400" b="1" dirty="0" err="1">
+                <a:solidFill>
+                  <a:srgbClr val="FFFFFF"/>
+                </a:solidFill>
+                <a:latin typeface="Malgun Gothic"/>
+              </a:rPr>
+              <a:t>조건문</a:t>
+            </a:r>
+            <a:r>
+              <a:rPr sz="3400" b="1" dirty="0">
+                <a:solidFill>
+                  <a:srgbClr val="FFFFFF"/>
+                </a:solidFill>
+                <a:latin typeface="Malgun Gothic"/>
+              </a:rPr>
+              <a:t> · </a:t>
+            </a:r>
+            <a:r>
+              <a:rPr sz="3400" b="1" dirty="0" err="1">
+                <a:solidFill>
+                  <a:srgbClr val="FFFFFF"/>
+                </a:solidFill>
+                <a:latin typeface="Malgun Gothic"/>
+              </a:rPr>
+              <a:t>연산자</a:t>
+            </a:r>
+            <a:endParaRPr sz="3400" b="1" dirty="0">
+              <a:solidFill>
+                <a:srgbClr val="FFFFFF"/>
+              </a:solidFill>
+              <a:latin typeface="Malgun Gothic"/>
+            </a:endParaRPr>
           </a:p>
         </p:txBody>
       </p:sp>
@@ -19017,6 +19164,7 @@
           <a:lstStyle/>
           <a:p>
             <a:pPr algn="ctr"/>
+            <a:endParaRPr/>
           </a:p>
         </p:txBody>
       </p:sp>
@@ -19100,7 +19248,7 @@
 </file>
 
 <file path=ppt/slides/slide38.xml><?xml version="1.0" encoding="utf-8"?>
-<p:sld xmlns:a="http://schemas.openxmlformats.org/drawingml/2006/main" xmlns:p="http://schemas.openxmlformats.org/presentationml/2006/main" xmlns:r="http://schemas.openxmlformats.org/officeDocument/2006/relationships">
+<p:sld xmlns:a="http://schemas.openxmlformats.org/drawingml/2006/main" xmlns:r="http://schemas.openxmlformats.org/officeDocument/2006/relationships" xmlns:p="http://schemas.openxmlformats.org/presentationml/2006/main">
   <p:cSld>
     <p:bg>
       <p:bgPr>
@@ -19116,7 +19264,14 @@
         <p:cNvGrpSpPr/>
         <p:nvPr/>
       </p:nvGrpSpPr>
-      <p:grpSpPr/>
+      <p:grpSpPr>
+        <a:xfrm>
+          <a:off x="0" y="0"/>
+          <a:ext cx="0" cy="0"/>
+          <a:chOff x="0" y="0"/>
+          <a:chExt cx="0" cy="0"/>
+        </a:xfrm>
+      </p:grpSpPr>
       <p:sp>
         <p:nvSpPr>
           <p:cNvPr id="2" name="Rectangle 1"/>
@@ -19158,6 +19313,7 @@
           <a:lstStyle/>
           <a:p>
             <a:pPr algn="ctr"/>
+            <a:endParaRPr/>
           </a:p>
         </p:txBody>
       </p:sp>
@@ -19360,7 +19516,7 @@
 </file>
 
 <file path=ppt/slides/slide39.xml><?xml version="1.0" encoding="utf-8"?>
-<p:sld xmlns:a="http://schemas.openxmlformats.org/drawingml/2006/main" xmlns:p="http://schemas.openxmlformats.org/presentationml/2006/main" xmlns:r="http://schemas.openxmlformats.org/officeDocument/2006/relationships">
+<p:sld xmlns:a="http://schemas.openxmlformats.org/drawingml/2006/main" xmlns:r="http://schemas.openxmlformats.org/officeDocument/2006/relationships" xmlns:p="http://schemas.openxmlformats.org/presentationml/2006/main">
   <p:cSld>
     <p:bg>
       <p:bgPr>
@@ -19376,7 +19532,14 @@
         <p:cNvGrpSpPr/>
         <p:nvPr/>
       </p:nvGrpSpPr>
-      <p:grpSpPr/>
+      <p:grpSpPr>
+        <a:xfrm>
+          <a:off x="0" y="0"/>
+          <a:ext cx="0" cy="0"/>
+          <a:chOff x="0" y="0"/>
+          <a:chExt cx="0" cy="0"/>
+        </a:xfrm>
+      </p:grpSpPr>
       <p:sp>
         <p:nvSpPr>
           <p:cNvPr id="2" name="Rectangle 1"/>
@@ -19418,6 +19581,7 @@
           <a:lstStyle/>
           <a:p>
             <a:pPr algn="ctr"/>
+            <a:endParaRPr/>
           </a:p>
         </p:txBody>
       </p:sp>
@@ -19540,6 +19704,7 @@
           <a:lstStyle/>
           <a:p>
             <a:pPr algn="ctr"/>
+            <a:endParaRPr/>
           </a:p>
         </p:txBody>
       </p:sp>
@@ -19895,7 +20060,7 @@
 </file>
 
 <file path=ppt/slides/slide4.xml><?xml version="1.0" encoding="utf-8"?>
-<p:sld xmlns:a="http://schemas.openxmlformats.org/drawingml/2006/main" xmlns:p="http://schemas.openxmlformats.org/presentationml/2006/main" xmlns:r="http://schemas.openxmlformats.org/officeDocument/2006/relationships">
+<p:sld xmlns:a="http://schemas.openxmlformats.org/drawingml/2006/main" xmlns:r="http://schemas.openxmlformats.org/officeDocument/2006/relationships" xmlns:p="http://schemas.openxmlformats.org/presentationml/2006/main">
   <p:cSld>
     <p:bg>
       <p:bgPr>
@@ -19911,7 +20076,14 @@
         <p:cNvGrpSpPr/>
         <p:nvPr/>
       </p:nvGrpSpPr>
-      <p:grpSpPr/>
+      <p:grpSpPr>
+        <a:xfrm>
+          <a:off x="0" y="0"/>
+          <a:ext cx="0" cy="0"/>
+          <a:chOff x="0" y="0"/>
+          <a:chExt cx="0" cy="0"/>
+        </a:xfrm>
+      </p:grpSpPr>
       <p:sp>
         <p:nvSpPr>
           <p:cNvPr id="2" name="TextBox 1"/>
@@ -20031,6 +20203,7 @@
           <a:lstStyle/>
           <a:p>
             <a:pPr algn="ctr"/>
+            <a:endParaRPr/>
           </a:p>
         </p:txBody>
       </p:sp>
@@ -20114,7 +20287,7 @@
 </file>
 
 <file path=ppt/slides/slide40.xml><?xml version="1.0" encoding="utf-8"?>
-<p:sld xmlns:a="http://schemas.openxmlformats.org/drawingml/2006/main" xmlns:p="http://schemas.openxmlformats.org/presentationml/2006/main" xmlns:r="http://schemas.openxmlformats.org/officeDocument/2006/relationships">
+<p:sld xmlns:a="http://schemas.openxmlformats.org/drawingml/2006/main" xmlns:r="http://schemas.openxmlformats.org/officeDocument/2006/relationships" xmlns:p="http://schemas.openxmlformats.org/presentationml/2006/main">
   <p:cSld>
     <p:bg>
       <p:bgPr>
@@ -20130,7 +20303,14 @@
         <p:cNvGrpSpPr/>
         <p:nvPr/>
       </p:nvGrpSpPr>
-      <p:grpSpPr/>
+      <p:grpSpPr>
+        <a:xfrm>
+          <a:off x="0" y="0"/>
+          <a:ext cx="0" cy="0"/>
+          <a:chOff x="0" y="0"/>
+          <a:chExt cx="0" cy="0"/>
+        </a:xfrm>
+      </p:grpSpPr>
       <p:sp>
         <p:nvSpPr>
           <p:cNvPr id="2" name="Rectangle 1"/>
@@ -20172,6 +20352,7 @@
           <a:lstStyle/>
           <a:p>
             <a:pPr algn="ctr"/>
+            <a:endParaRPr/>
           </a:p>
         </p:txBody>
       </p:sp>
@@ -20374,7 +20555,7 @@
 </file>
 
 <file path=ppt/slides/slide41.xml><?xml version="1.0" encoding="utf-8"?>
-<p:sld xmlns:a="http://schemas.openxmlformats.org/drawingml/2006/main" xmlns:p="http://schemas.openxmlformats.org/presentationml/2006/main" xmlns:r="http://schemas.openxmlformats.org/officeDocument/2006/relationships">
+<p:sld xmlns:a="http://schemas.openxmlformats.org/drawingml/2006/main" xmlns:r="http://schemas.openxmlformats.org/officeDocument/2006/relationships" xmlns:p="http://schemas.openxmlformats.org/presentationml/2006/main">
   <p:cSld>
     <p:bg>
       <p:bgPr>
@@ -20390,7 +20571,14 @@
         <p:cNvGrpSpPr/>
         <p:nvPr/>
       </p:nvGrpSpPr>
-      <p:grpSpPr/>
+      <p:grpSpPr>
+        <a:xfrm>
+          <a:off x="0" y="0"/>
+          <a:ext cx="0" cy="0"/>
+          <a:chOff x="0" y="0"/>
+          <a:chExt cx="0" cy="0"/>
+        </a:xfrm>
+      </p:grpSpPr>
       <p:sp>
         <p:nvSpPr>
           <p:cNvPr id="2" name="Rectangle 1"/>
@@ -20432,6 +20620,7 @@
           <a:lstStyle/>
           <a:p>
             <a:pPr algn="ctr"/>
+            <a:endParaRPr/>
           </a:p>
         </p:txBody>
       </p:sp>
@@ -20554,6 +20743,7 @@
           <a:lstStyle/>
           <a:p>
             <a:pPr algn="ctr"/>
+            <a:endParaRPr/>
           </a:p>
         </p:txBody>
       </p:sp>
@@ -20957,7 +21147,7 @@
 </file>
 
 <file path=ppt/slides/slide42.xml><?xml version="1.0" encoding="utf-8"?>
-<p:sld xmlns:a="http://schemas.openxmlformats.org/drawingml/2006/main" xmlns:p="http://schemas.openxmlformats.org/presentationml/2006/main" xmlns:r="http://schemas.openxmlformats.org/officeDocument/2006/relationships">
+<p:sld xmlns:a="http://schemas.openxmlformats.org/drawingml/2006/main" xmlns:r="http://schemas.openxmlformats.org/officeDocument/2006/relationships" xmlns:p="http://schemas.openxmlformats.org/presentationml/2006/main">
   <p:cSld>
     <p:bg>
       <p:bgPr>
@@ -20973,7 +21163,14 @@
         <p:cNvGrpSpPr/>
         <p:nvPr/>
       </p:nvGrpSpPr>
-      <p:grpSpPr/>
+      <p:grpSpPr>
+        <a:xfrm>
+          <a:off x="0" y="0"/>
+          <a:ext cx="0" cy="0"/>
+          <a:chOff x="0" y="0"/>
+          <a:chExt cx="0" cy="0"/>
+        </a:xfrm>
+      </p:grpSpPr>
       <p:sp>
         <p:nvSpPr>
           <p:cNvPr id="2" name="Rectangle 1"/>
@@ -21015,6 +21212,7 @@
           <a:lstStyle/>
           <a:p>
             <a:pPr algn="ctr"/>
+            <a:endParaRPr/>
           </a:p>
         </p:txBody>
       </p:sp>
@@ -21233,6 +21431,7 @@
           <a:lstStyle/>
           <a:p>
             <a:pPr algn="ctr"/>
+            <a:endParaRPr/>
           </a:p>
         </p:txBody>
       </p:sp>
@@ -21277,6 +21476,7 @@
           <a:lstStyle/>
           <a:p>
             <a:pPr algn="ctr"/>
+            <a:endParaRPr/>
           </a:p>
         </p:txBody>
       </p:sp>
@@ -21332,7 +21532,7 @@
 </file>
 
 <file path=ppt/slides/slide43.xml><?xml version="1.0" encoding="utf-8"?>
-<p:sld xmlns:a="http://schemas.openxmlformats.org/drawingml/2006/main" xmlns:p="http://schemas.openxmlformats.org/presentationml/2006/main" xmlns:r="http://schemas.openxmlformats.org/officeDocument/2006/relationships">
+<p:sld xmlns:a="http://schemas.openxmlformats.org/drawingml/2006/main" xmlns:r="http://schemas.openxmlformats.org/officeDocument/2006/relationships" xmlns:p="http://schemas.openxmlformats.org/presentationml/2006/main">
   <p:cSld>
     <p:bg>
       <p:bgPr>
@@ -21348,7 +21548,14 @@
         <p:cNvGrpSpPr/>
         <p:nvPr/>
       </p:nvGrpSpPr>
-      <p:grpSpPr/>
+      <p:grpSpPr>
+        <a:xfrm>
+          <a:off x="0" y="0"/>
+          <a:ext cx="0" cy="0"/>
+          <a:chOff x="0" y="0"/>
+          <a:chExt cx="0" cy="0"/>
+        </a:xfrm>
+      </p:grpSpPr>
       <p:sp>
         <p:nvSpPr>
           <p:cNvPr id="2" name="Rectangle 1"/>
@@ -21390,6 +21597,7 @@
           <a:lstStyle/>
           <a:p>
             <a:pPr algn="ctr"/>
+            <a:endParaRPr/>
           </a:p>
         </p:txBody>
       </p:sp>
@@ -21608,6 +21816,7 @@
           <a:lstStyle/>
           <a:p>
             <a:pPr algn="ctr"/>
+            <a:endParaRPr/>
           </a:p>
         </p:txBody>
       </p:sp>
@@ -21652,6 +21861,7 @@
           <a:lstStyle/>
           <a:p>
             <a:pPr algn="ctr"/>
+            <a:endParaRPr/>
           </a:p>
         </p:txBody>
       </p:sp>
@@ -21707,7 +21917,7 @@
 </file>
 
 <file path=ppt/slides/slide44.xml><?xml version="1.0" encoding="utf-8"?>
-<p:sld xmlns:a="http://schemas.openxmlformats.org/drawingml/2006/main" xmlns:p="http://schemas.openxmlformats.org/presentationml/2006/main" xmlns:r="http://schemas.openxmlformats.org/officeDocument/2006/relationships">
+<p:sld xmlns:a="http://schemas.openxmlformats.org/drawingml/2006/main" xmlns:r="http://schemas.openxmlformats.org/officeDocument/2006/relationships" xmlns:p="http://schemas.openxmlformats.org/presentationml/2006/main">
   <p:cSld>
     <p:bg>
       <p:bgPr>
@@ -21723,7 +21933,14 @@
         <p:cNvGrpSpPr/>
         <p:nvPr/>
       </p:nvGrpSpPr>
-      <p:grpSpPr/>
+      <p:grpSpPr>
+        <a:xfrm>
+          <a:off x="0" y="0"/>
+          <a:ext cx="0" cy="0"/>
+          <a:chOff x="0" y="0"/>
+          <a:chExt cx="0" cy="0"/>
+        </a:xfrm>
+      </p:grpSpPr>
       <p:sp>
         <p:nvSpPr>
           <p:cNvPr id="2" name="Rectangle 1"/>
@@ -21765,6 +21982,7 @@
           <a:lstStyle/>
           <a:p>
             <a:pPr algn="ctr"/>
+            <a:endParaRPr/>
           </a:p>
         </p:txBody>
       </p:sp>
@@ -21887,6 +22105,7 @@
           <a:lstStyle/>
           <a:p>
             <a:pPr algn="ctr"/>
+            <a:endParaRPr/>
           </a:p>
         </p:txBody>
       </p:sp>
@@ -22322,7 +22541,7 @@
 </file>
 
 <file path=ppt/slides/slide45.xml><?xml version="1.0" encoding="utf-8"?>
-<p:sld xmlns:a="http://schemas.openxmlformats.org/drawingml/2006/main" xmlns:p="http://schemas.openxmlformats.org/presentationml/2006/main" xmlns:r="http://schemas.openxmlformats.org/officeDocument/2006/relationships">
+<p:sld xmlns:a="http://schemas.openxmlformats.org/drawingml/2006/main" xmlns:r="http://schemas.openxmlformats.org/officeDocument/2006/relationships" xmlns:p="http://schemas.openxmlformats.org/presentationml/2006/main">
   <p:cSld>
     <p:bg>
       <p:bgPr>
@@ -22338,7 +22557,14 @@
         <p:cNvGrpSpPr/>
         <p:nvPr/>
       </p:nvGrpSpPr>
-      <p:grpSpPr/>
+      <p:grpSpPr>
+        <a:xfrm>
+          <a:off x="0" y="0"/>
+          <a:ext cx="0" cy="0"/>
+          <a:chOff x="0" y="0"/>
+          <a:chExt cx="0" cy="0"/>
+        </a:xfrm>
+      </p:grpSpPr>
       <p:sp>
         <p:nvSpPr>
           <p:cNvPr id="2" name="Rectangle 1"/>
@@ -22380,6 +22606,7 @@
           <a:lstStyle/>
           <a:p>
             <a:pPr algn="ctr"/>
+            <a:endParaRPr/>
           </a:p>
         </p:txBody>
       </p:sp>
@@ -22582,7 +22809,7 @@
 </file>
 
 <file path=ppt/slides/slide46.xml><?xml version="1.0" encoding="utf-8"?>
-<p:sld xmlns:a="http://schemas.openxmlformats.org/drawingml/2006/main" xmlns:p="http://schemas.openxmlformats.org/presentationml/2006/main" xmlns:r="http://schemas.openxmlformats.org/officeDocument/2006/relationships">
+<p:sld xmlns:a="http://schemas.openxmlformats.org/drawingml/2006/main" xmlns:r="http://schemas.openxmlformats.org/officeDocument/2006/relationships" xmlns:p="http://schemas.openxmlformats.org/presentationml/2006/main">
   <p:cSld>
     <p:bg>
       <p:bgPr>
@@ -22598,7 +22825,14 @@
         <p:cNvGrpSpPr/>
         <p:nvPr/>
       </p:nvGrpSpPr>
-      <p:grpSpPr/>
+      <p:grpSpPr>
+        <a:xfrm>
+          <a:off x="0" y="0"/>
+          <a:ext cx="0" cy="0"/>
+          <a:chOff x="0" y="0"/>
+          <a:chExt cx="0" cy="0"/>
+        </a:xfrm>
+      </p:grpSpPr>
       <p:sp>
         <p:nvSpPr>
           <p:cNvPr id="2" name="TextBox 1"/>
@@ -22718,6 +22952,7 @@
           <a:lstStyle/>
           <a:p>
             <a:pPr algn="ctr"/>
+            <a:endParaRPr/>
           </a:p>
         </p:txBody>
       </p:sp>
@@ -22801,7 +23036,7 @@
 </file>
 
 <file path=ppt/slides/slide47.xml><?xml version="1.0" encoding="utf-8"?>
-<p:sld xmlns:a="http://schemas.openxmlformats.org/drawingml/2006/main" xmlns:p="http://schemas.openxmlformats.org/presentationml/2006/main" xmlns:r="http://schemas.openxmlformats.org/officeDocument/2006/relationships">
+<p:sld xmlns:a="http://schemas.openxmlformats.org/drawingml/2006/main" xmlns:r="http://schemas.openxmlformats.org/officeDocument/2006/relationships" xmlns:p="http://schemas.openxmlformats.org/presentationml/2006/main">
   <p:cSld>
     <p:bg>
       <p:bgPr>
@@ -22817,7 +23052,14 @@
         <p:cNvGrpSpPr/>
         <p:nvPr/>
       </p:nvGrpSpPr>
-      <p:grpSpPr/>
+      <p:grpSpPr>
+        <a:xfrm>
+          <a:off x="0" y="0"/>
+          <a:ext cx="0" cy="0"/>
+          <a:chOff x="0" y="0"/>
+          <a:chExt cx="0" cy="0"/>
+        </a:xfrm>
+      </p:grpSpPr>
       <p:sp>
         <p:nvSpPr>
           <p:cNvPr id="2" name="Rectangle 1"/>
@@ -22859,6 +23101,7 @@
           <a:lstStyle/>
           <a:p>
             <a:pPr algn="ctr"/>
+            <a:endParaRPr/>
           </a:p>
         </p:txBody>
       </p:sp>
@@ -23077,7 +23320,7 @@
 </file>
 
 <file path=ppt/slides/slide48.xml><?xml version="1.0" encoding="utf-8"?>
-<p:sld xmlns:a="http://schemas.openxmlformats.org/drawingml/2006/main" xmlns:p="http://schemas.openxmlformats.org/presentationml/2006/main" xmlns:r="http://schemas.openxmlformats.org/officeDocument/2006/relationships">
+<p:sld xmlns:a="http://schemas.openxmlformats.org/drawingml/2006/main" xmlns:r="http://schemas.openxmlformats.org/officeDocument/2006/relationships" xmlns:p="http://schemas.openxmlformats.org/presentationml/2006/main">
   <p:cSld>
     <p:bg>
       <p:bgPr>
@@ -23093,7 +23336,14 @@
         <p:cNvGrpSpPr/>
         <p:nvPr/>
       </p:nvGrpSpPr>
-      <p:grpSpPr/>
+      <p:grpSpPr>
+        <a:xfrm>
+          <a:off x="0" y="0"/>
+          <a:ext cx="0" cy="0"/>
+          <a:chOff x="0" y="0"/>
+          <a:chExt cx="0" cy="0"/>
+        </a:xfrm>
+      </p:grpSpPr>
       <p:sp>
         <p:nvSpPr>
           <p:cNvPr id="2" name="Rectangle 1"/>
@@ -23135,6 +23385,7 @@
           <a:lstStyle/>
           <a:p>
             <a:pPr algn="ctr"/>
+            <a:endParaRPr/>
           </a:p>
         </p:txBody>
       </p:sp>
@@ -23257,6 +23508,7 @@
           <a:lstStyle/>
           <a:p>
             <a:pPr algn="ctr"/>
+            <a:endParaRPr/>
           </a:p>
         </p:txBody>
       </p:sp>
@@ -23644,7 +23896,7 @@
 </file>
 
 <file path=ppt/slides/slide49.xml><?xml version="1.0" encoding="utf-8"?>
-<p:sld xmlns:a="http://schemas.openxmlformats.org/drawingml/2006/main" xmlns:p="http://schemas.openxmlformats.org/presentationml/2006/main" xmlns:r="http://schemas.openxmlformats.org/officeDocument/2006/relationships">
+<p:sld xmlns:a="http://schemas.openxmlformats.org/drawingml/2006/main" xmlns:r="http://schemas.openxmlformats.org/officeDocument/2006/relationships" xmlns:p="http://schemas.openxmlformats.org/presentationml/2006/main">
   <p:cSld>
     <p:bg>
       <p:bgPr>
@@ -23660,7 +23912,14 @@
         <p:cNvGrpSpPr/>
         <p:nvPr/>
       </p:nvGrpSpPr>
-      <p:grpSpPr/>
+      <p:grpSpPr>
+        <a:xfrm>
+          <a:off x="0" y="0"/>
+          <a:ext cx="0" cy="0"/>
+          <a:chOff x="0" y="0"/>
+          <a:chExt cx="0" cy="0"/>
+        </a:xfrm>
+      </p:grpSpPr>
       <p:sp>
         <p:nvSpPr>
           <p:cNvPr id="2" name="Rectangle 1"/>
@@ -23702,6 +23961,7 @@
           <a:lstStyle/>
           <a:p>
             <a:pPr algn="ctr"/>
+            <a:endParaRPr/>
           </a:p>
         </p:txBody>
       </p:sp>
@@ -23824,6 +24084,7 @@
           <a:lstStyle/>
           <a:p>
             <a:pPr algn="ctr"/>
+            <a:endParaRPr/>
           </a:p>
         </p:txBody>
       </p:sp>
@@ -24243,7 +24504,7 @@
 </file>
 
 <file path=ppt/slides/slide5.xml><?xml version="1.0" encoding="utf-8"?>
-<p:sld xmlns:a="http://schemas.openxmlformats.org/drawingml/2006/main" xmlns:p="http://schemas.openxmlformats.org/presentationml/2006/main" xmlns:r="http://schemas.openxmlformats.org/officeDocument/2006/relationships">
+<p:sld xmlns:a="http://schemas.openxmlformats.org/drawingml/2006/main" xmlns:r="http://schemas.openxmlformats.org/officeDocument/2006/relationships" xmlns:p="http://schemas.openxmlformats.org/presentationml/2006/main">
   <p:cSld>
     <p:bg>
       <p:bgPr>
@@ -24259,7 +24520,14 @@
         <p:cNvGrpSpPr/>
         <p:nvPr/>
       </p:nvGrpSpPr>
-      <p:grpSpPr/>
+      <p:grpSpPr>
+        <a:xfrm>
+          <a:off x="0" y="0"/>
+          <a:ext cx="0" cy="0"/>
+          <a:chOff x="0" y="0"/>
+          <a:chExt cx="0" cy="0"/>
+        </a:xfrm>
+      </p:grpSpPr>
       <p:sp>
         <p:nvSpPr>
           <p:cNvPr id="2" name="Rectangle 1"/>
@@ -24301,6 +24569,7 @@
           <a:lstStyle/>
           <a:p>
             <a:pPr algn="ctr"/>
+            <a:endParaRPr/>
           </a:p>
         </p:txBody>
       </p:sp>
@@ -24519,6 +24788,7 @@
           <a:lstStyle/>
           <a:p>
             <a:pPr algn="ctr"/>
+            <a:endParaRPr/>
           </a:p>
         </p:txBody>
       </p:sp>
@@ -24563,6 +24833,7 @@
           <a:lstStyle/>
           <a:p>
             <a:pPr algn="ctr"/>
+            <a:endParaRPr/>
           </a:p>
         </p:txBody>
       </p:sp>
@@ -24618,7 +24889,7 @@
 </file>
 
 <file path=ppt/slides/slide50.xml><?xml version="1.0" encoding="utf-8"?>
-<p:sld xmlns:a="http://schemas.openxmlformats.org/drawingml/2006/main" xmlns:p="http://schemas.openxmlformats.org/presentationml/2006/main" xmlns:r="http://schemas.openxmlformats.org/officeDocument/2006/relationships">
+<p:sld xmlns:a="http://schemas.openxmlformats.org/drawingml/2006/main" xmlns:r="http://schemas.openxmlformats.org/officeDocument/2006/relationships" xmlns:p="http://schemas.openxmlformats.org/presentationml/2006/main">
   <p:cSld>
     <p:bg>
       <p:bgPr>
@@ -24634,7 +24905,14 @@
         <p:cNvGrpSpPr/>
         <p:nvPr/>
       </p:nvGrpSpPr>
-      <p:grpSpPr/>
+      <p:grpSpPr>
+        <a:xfrm>
+          <a:off x="0" y="0"/>
+          <a:ext cx="0" cy="0"/>
+          <a:chOff x="0" y="0"/>
+          <a:chExt cx="0" cy="0"/>
+        </a:xfrm>
+      </p:grpSpPr>
       <p:sp>
         <p:nvSpPr>
           <p:cNvPr id="2" name="Rectangle 1"/>
@@ -24676,6 +24954,7 @@
           <a:lstStyle/>
           <a:p>
             <a:pPr algn="ctr"/>
+            <a:endParaRPr/>
           </a:p>
         </p:txBody>
       </p:sp>
@@ -24910,6 +25189,7 @@
           <a:lstStyle/>
           <a:p>
             <a:pPr algn="ctr"/>
+            <a:endParaRPr/>
           </a:p>
         </p:txBody>
       </p:sp>
@@ -24954,6 +25234,7 @@
           <a:lstStyle/>
           <a:p>
             <a:pPr algn="ctr"/>
+            <a:endParaRPr/>
           </a:p>
         </p:txBody>
       </p:sp>
@@ -25009,7 +25290,7 @@
 </file>
 
 <file path=ppt/slides/slide51.xml><?xml version="1.0" encoding="utf-8"?>
-<p:sld xmlns:a="http://schemas.openxmlformats.org/drawingml/2006/main" xmlns:p="http://schemas.openxmlformats.org/presentationml/2006/main" xmlns:r="http://schemas.openxmlformats.org/officeDocument/2006/relationships">
+<p:sld xmlns:a="http://schemas.openxmlformats.org/drawingml/2006/main" xmlns:r="http://schemas.openxmlformats.org/officeDocument/2006/relationships" xmlns:p="http://schemas.openxmlformats.org/presentationml/2006/main">
   <p:cSld>
     <p:bg>
       <p:bgPr>
@@ -25025,7 +25306,14 @@
         <p:cNvGrpSpPr/>
         <p:nvPr/>
       </p:nvGrpSpPr>
-      <p:grpSpPr/>
+      <p:grpSpPr>
+        <a:xfrm>
+          <a:off x="0" y="0"/>
+          <a:ext cx="0" cy="0"/>
+          <a:chOff x="0" y="0"/>
+          <a:chExt cx="0" cy="0"/>
+        </a:xfrm>
+      </p:grpSpPr>
       <p:sp>
         <p:nvSpPr>
           <p:cNvPr id="2" name="Rectangle 1"/>
@@ -25067,6 +25355,7 @@
           <a:lstStyle/>
           <a:p>
             <a:pPr algn="ctr"/>
+            <a:endParaRPr/>
           </a:p>
         </p:txBody>
       </p:sp>
@@ -25237,7 +25526,7 @@
 </file>
 
 <file path=ppt/slides/slide52.xml><?xml version="1.0" encoding="utf-8"?>
-<p:sld xmlns:a="http://schemas.openxmlformats.org/drawingml/2006/main" xmlns:p="http://schemas.openxmlformats.org/presentationml/2006/main" xmlns:r="http://schemas.openxmlformats.org/officeDocument/2006/relationships">
+<p:sld xmlns:a="http://schemas.openxmlformats.org/drawingml/2006/main" xmlns:r="http://schemas.openxmlformats.org/officeDocument/2006/relationships" xmlns:p="http://schemas.openxmlformats.org/presentationml/2006/main">
   <p:cSld>
     <p:bg>
       <p:bgPr>
@@ -25253,7 +25542,14 @@
         <p:cNvGrpSpPr/>
         <p:nvPr/>
       </p:nvGrpSpPr>
-      <p:grpSpPr/>
+      <p:grpSpPr>
+        <a:xfrm>
+          <a:off x="0" y="0"/>
+          <a:ext cx="0" cy="0"/>
+          <a:chOff x="0" y="0"/>
+          <a:chExt cx="0" cy="0"/>
+        </a:xfrm>
+      </p:grpSpPr>
       <p:sp>
         <p:nvSpPr>
           <p:cNvPr id="2" name="Rectangle 1"/>
@@ -25295,6 +25591,7 @@
           <a:lstStyle/>
           <a:p>
             <a:pPr algn="ctr"/>
+            <a:endParaRPr/>
           </a:p>
         </p:txBody>
       </p:sp>
@@ -25465,7 +25762,7 @@
 </file>
 
 <file path=ppt/slides/slide53.xml><?xml version="1.0" encoding="utf-8"?>
-<p:sld xmlns:a="http://schemas.openxmlformats.org/drawingml/2006/main" xmlns:p="http://schemas.openxmlformats.org/presentationml/2006/main" xmlns:r="http://schemas.openxmlformats.org/officeDocument/2006/relationships">
+<p:sld xmlns:a="http://schemas.openxmlformats.org/drawingml/2006/main" xmlns:r="http://schemas.openxmlformats.org/officeDocument/2006/relationships" xmlns:p="http://schemas.openxmlformats.org/presentationml/2006/main">
   <p:cSld>
     <p:bg>
       <p:bgPr>
@@ -25481,7 +25778,14 @@
         <p:cNvGrpSpPr/>
         <p:nvPr/>
       </p:nvGrpSpPr>
-      <p:grpSpPr/>
+      <p:grpSpPr>
+        <a:xfrm>
+          <a:off x="0" y="0"/>
+          <a:ext cx="0" cy="0"/>
+          <a:chOff x="0" y="0"/>
+          <a:chExt cx="0" cy="0"/>
+        </a:xfrm>
+      </p:grpSpPr>
       <p:sp>
         <p:nvSpPr>
           <p:cNvPr id="2" name="Rectangle 1"/>
@@ -25523,6 +25827,7 @@
           <a:lstStyle/>
           <a:p>
             <a:pPr algn="ctr"/>
+            <a:endParaRPr/>
           </a:p>
         </p:txBody>
       </p:sp>
@@ -25741,7 +26046,7 @@
 </file>
 
 <file path=ppt/slides/slide54.xml><?xml version="1.0" encoding="utf-8"?>
-<p:sld xmlns:a="http://schemas.openxmlformats.org/drawingml/2006/main" xmlns:p="http://schemas.openxmlformats.org/presentationml/2006/main" xmlns:r="http://schemas.openxmlformats.org/officeDocument/2006/relationships">
+<p:sld xmlns:a="http://schemas.openxmlformats.org/drawingml/2006/main" xmlns:r="http://schemas.openxmlformats.org/officeDocument/2006/relationships" xmlns:p="http://schemas.openxmlformats.org/presentationml/2006/main">
   <p:cSld>
     <p:bg>
       <p:bgPr>
@@ -25757,7 +26062,14 @@
         <p:cNvGrpSpPr/>
         <p:nvPr/>
       </p:nvGrpSpPr>
-      <p:grpSpPr/>
+      <p:grpSpPr>
+        <a:xfrm>
+          <a:off x="0" y="0"/>
+          <a:ext cx="0" cy="0"/>
+          <a:chOff x="0" y="0"/>
+          <a:chExt cx="0" cy="0"/>
+        </a:xfrm>
+      </p:grpSpPr>
       <p:sp>
         <p:nvSpPr>
           <p:cNvPr id="2" name="Rectangle 1"/>
@@ -25799,6 +26111,7 @@
           <a:lstStyle/>
           <a:p>
             <a:pPr algn="ctr"/>
+            <a:endParaRPr/>
           </a:p>
         </p:txBody>
       </p:sp>
@@ -25849,8 +26162,8 @@
         </p:nvSpPr>
         <p:spPr>
           <a:xfrm>
-            <a:off x="640080" y="1234440"/>
-            <a:ext cx="10881360" cy="4937760"/>
+            <a:off x="594360" y="1308331"/>
+            <a:ext cx="10881360" cy="3206006"/>
           </a:xfrm>
           <a:prstGeom prst="rect">
             <a:avLst/>
@@ -25869,14 +26182,65 @@
               </a:spcBef>
             </a:pPr>
             <a:r>
-              <a:rPr sz="1800" b="0">
+              <a:rPr sz="1800" b="0" dirty="0">
                 <a:solidFill>
                   <a:srgbClr val="202830"/>
                 </a:solidFill>
                 <a:latin typeface="Malgun Gothic"/>
               </a:rPr>
-              <a:t>•  실습 01 — Anonymous Block 구조(DECLARE/BEGIN/EXCEPTION/END) 확인</a:t>
-            </a:r>
+              <a:t>•  </a:t>
+            </a:r>
+            <a:r>
+              <a:rPr sz="1800" b="0" dirty="0" err="1">
+                <a:solidFill>
+                  <a:srgbClr val="202830"/>
+                </a:solidFill>
+                <a:latin typeface="Malgun Gothic"/>
+              </a:rPr>
+              <a:t>실습</a:t>
+            </a:r>
+            <a:r>
+              <a:rPr sz="1800" b="0" dirty="0">
+                <a:solidFill>
+                  <a:srgbClr val="202830"/>
+                </a:solidFill>
+                <a:latin typeface="Malgun Gothic"/>
+              </a:rPr>
+              <a:t> 01 — Anonymous Block </a:t>
+            </a:r>
+            <a:r>
+              <a:rPr sz="1800" b="0" dirty="0" err="1">
+                <a:solidFill>
+                  <a:srgbClr val="202830"/>
+                </a:solidFill>
+                <a:latin typeface="Malgun Gothic"/>
+              </a:rPr>
+              <a:t>구조</a:t>
+            </a:r>
+            <a:r>
+              <a:rPr sz="1800" b="0" dirty="0">
+                <a:solidFill>
+                  <a:srgbClr val="202830"/>
+                </a:solidFill>
+                <a:latin typeface="Malgun Gothic"/>
+              </a:rPr>
+              <a:t>(DECLARE/BEGIN/EXCEPTION/END) </a:t>
+            </a:r>
+            <a:r>
+              <a:rPr sz="1800" b="0" dirty="0" err="1">
+                <a:solidFill>
+                  <a:srgbClr val="202830"/>
+                </a:solidFill>
+                <a:latin typeface="Malgun Gothic"/>
+              </a:rPr>
+              <a:t>확인</a:t>
+            </a:r>
+            <a:endParaRPr sz="1800" b="0" dirty="0">
+              <a:solidFill>
+                <a:srgbClr val="202830"/>
+              </a:solidFill>
+              <a:latin typeface="Malgun Gothic"/>
+            </a:endParaRPr>
           </a:p>
           <a:p>
             <a:pPr>
@@ -25885,14 +26249,83 @@
               </a:spcBef>
             </a:pPr>
             <a:r>
-              <a:rPr sz="1800" b="0">
+              <a:rPr sz="1800" b="0" dirty="0">
                 <a:solidFill>
                   <a:srgbClr val="202830"/>
                 </a:solidFill>
                 <a:latin typeface="Malgun Gothic"/>
               </a:rPr>
-              <a:t>•  실습 02 — 변수 선언과 %TYPE/%ROWTYPE 활용</a:t>
-            </a:r>
+              <a:t>•  </a:t>
+            </a:r>
+            <a:r>
+              <a:rPr sz="1800" b="0" dirty="0" err="1">
+                <a:solidFill>
+                  <a:srgbClr val="202830"/>
+                </a:solidFill>
+                <a:latin typeface="Malgun Gothic"/>
+              </a:rPr>
+              <a:t>실습</a:t>
+            </a:r>
+            <a:r>
+              <a:rPr sz="1800" b="0" dirty="0">
+                <a:solidFill>
+                  <a:srgbClr val="202830"/>
+                </a:solidFill>
+                <a:latin typeface="Malgun Gothic"/>
+              </a:rPr>
+              <a:t> 02 — </a:t>
+            </a:r>
+            <a:r>
+              <a:rPr sz="1800" b="0" dirty="0" err="1">
+                <a:solidFill>
+                  <a:srgbClr val="202830"/>
+                </a:solidFill>
+                <a:latin typeface="Malgun Gothic"/>
+              </a:rPr>
+              <a:t>변수</a:t>
+            </a:r>
+            <a:r>
+              <a:rPr sz="1800" b="0" dirty="0">
+                <a:solidFill>
+                  <a:srgbClr val="202830"/>
+                </a:solidFill>
+                <a:latin typeface="Malgun Gothic"/>
+              </a:rPr>
+              <a:t> </a:t>
+            </a:r>
+            <a:r>
+              <a:rPr sz="1800" b="0" dirty="0" err="1">
+                <a:solidFill>
+                  <a:srgbClr val="202830"/>
+                </a:solidFill>
+                <a:latin typeface="Malgun Gothic"/>
+              </a:rPr>
+              <a:t>선언과</a:t>
+            </a:r>
+            <a:r>
+              <a:rPr sz="1800" b="0" dirty="0">
+                <a:solidFill>
+                  <a:srgbClr val="202830"/>
+                </a:solidFill>
+                <a:latin typeface="Malgun Gothic"/>
+              </a:rPr>
+              <a:t> %TYPE/%ROWTYPE </a:t>
+            </a:r>
+            <a:r>
+              <a:rPr sz="1800" b="0" dirty="0" err="1">
+                <a:solidFill>
+                  <a:srgbClr val="202830"/>
+                </a:solidFill>
+                <a:latin typeface="Malgun Gothic"/>
+              </a:rPr>
+              <a:t>활용</a:t>
+            </a:r>
+            <a:endParaRPr sz="1800" b="0" dirty="0">
+              <a:solidFill>
+                <a:srgbClr val="202830"/>
+              </a:solidFill>
+              <a:latin typeface="Malgun Gothic"/>
+            </a:endParaRPr>
           </a:p>
           <a:p>
             <a:pPr>
@@ -25901,14 +26334,101 @@
               </a:spcBef>
             </a:pPr>
             <a:r>
-              <a:rPr sz="1800" b="0">
+              <a:rPr sz="1800" b="0" dirty="0">
                 <a:solidFill>
                   <a:srgbClr val="202830"/>
                 </a:solidFill>
                 <a:latin typeface="Malgun Gothic"/>
               </a:rPr>
-              <a:t>•  실습 03 — SELECT INTO로 단일 행 조회 및 NO_DATA_FOUND 처리</a:t>
-            </a:r>
+              <a:t>•  </a:t>
+            </a:r>
+            <a:r>
+              <a:rPr sz="1800" b="0" dirty="0" err="1">
+                <a:solidFill>
+                  <a:srgbClr val="202830"/>
+                </a:solidFill>
+                <a:latin typeface="Malgun Gothic"/>
+              </a:rPr>
+              <a:t>실습</a:t>
+            </a:r>
+            <a:r>
+              <a:rPr sz="1800" b="0" dirty="0">
+                <a:solidFill>
+                  <a:srgbClr val="202830"/>
+                </a:solidFill>
+                <a:latin typeface="Malgun Gothic"/>
+              </a:rPr>
+              <a:t> 03 — SELECT </a:t>
+            </a:r>
+            <a:r>
+              <a:rPr sz="1800" b="0" dirty="0" err="1">
+                <a:solidFill>
+                  <a:srgbClr val="202830"/>
+                </a:solidFill>
+                <a:latin typeface="Malgun Gothic"/>
+              </a:rPr>
+              <a:t>INTO로</a:t>
+            </a:r>
+            <a:r>
+              <a:rPr sz="1800" b="0" dirty="0">
+                <a:solidFill>
+                  <a:srgbClr val="202830"/>
+                </a:solidFill>
+                <a:latin typeface="Malgun Gothic"/>
+              </a:rPr>
+              <a:t> </a:t>
+            </a:r>
+            <a:r>
+              <a:rPr sz="1800" b="0" dirty="0" err="1">
+                <a:solidFill>
+                  <a:srgbClr val="202830"/>
+                </a:solidFill>
+                <a:latin typeface="Malgun Gothic"/>
+              </a:rPr>
+              <a:t>단일</a:t>
+            </a:r>
+            <a:r>
+              <a:rPr sz="1800" b="0" dirty="0">
+                <a:solidFill>
+                  <a:srgbClr val="202830"/>
+                </a:solidFill>
+                <a:latin typeface="Malgun Gothic"/>
+              </a:rPr>
+              <a:t> 행 </a:t>
+            </a:r>
+            <a:r>
+              <a:rPr sz="1800" b="0" dirty="0" err="1">
+                <a:solidFill>
+                  <a:srgbClr val="202830"/>
+                </a:solidFill>
+                <a:latin typeface="Malgun Gothic"/>
+              </a:rPr>
+              <a:t>조회</a:t>
+            </a:r>
+            <a:r>
+              <a:rPr sz="1800" b="0" dirty="0">
+                <a:solidFill>
+                  <a:srgbClr val="202830"/>
+                </a:solidFill>
+                <a:latin typeface="Malgun Gothic"/>
+              </a:rPr>
+              <a:t> 및 NO_DATA_FOUND </a:t>
+            </a:r>
+            <a:r>
+              <a:rPr sz="1800" b="0" dirty="0" err="1">
+                <a:solidFill>
+                  <a:srgbClr val="202830"/>
+                </a:solidFill>
+                <a:latin typeface="Malgun Gothic"/>
+              </a:rPr>
+              <a:t>처리</a:t>
+            </a:r>
+            <a:endParaRPr sz="1800" b="0" dirty="0">
+              <a:solidFill>
+                <a:srgbClr val="202830"/>
+              </a:solidFill>
+              <a:latin typeface="Malgun Gothic"/>
+            </a:endParaRPr>
           </a:p>
           <a:p>
             <a:pPr>
@@ -25917,14 +26437,83 @@
               </a:spcBef>
             </a:pPr>
             <a:r>
-              <a:rPr sz="1800" b="0">
+              <a:rPr sz="1800" b="0" dirty="0">
                 <a:solidFill>
                   <a:srgbClr val="202830"/>
                 </a:solidFill>
                 <a:latin typeface="Malgun Gothic"/>
               </a:rPr>
-              <a:t>•  실습 04 — DBMS_OUTPUT.PUT_LINE을 이용한 출력</a:t>
-            </a:r>
+              <a:t>•  </a:t>
+            </a:r>
+            <a:r>
+              <a:rPr sz="1800" b="0" dirty="0" err="1">
+                <a:solidFill>
+                  <a:srgbClr val="202830"/>
+                </a:solidFill>
+                <a:latin typeface="Malgun Gothic"/>
+              </a:rPr>
+              <a:t>실습</a:t>
+            </a:r>
+            <a:r>
+              <a:rPr sz="1800" b="0" dirty="0">
+                <a:solidFill>
+                  <a:srgbClr val="202830"/>
+                </a:solidFill>
+                <a:latin typeface="Malgun Gothic"/>
+              </a:rPr>
+              <a:t> 04 — </a:t>
+            </a:r>
+            <a:r>
+              <a:rPr sz="1800" b="0" dirty="0" err="1">
+                <a:solidFill>
+                  <a:srgbClr val="202830"/>
+                </a:solidFill>
+                <a:latin typeface="Malgun Gothic"/>
+              </a:rPr>
+              <a:t>DBMS_OUTPUT.PUT_LINE을</a:t>
+            </a:r>
+            <a:r>
+              <a:rPr sz="1800" b="0" dirty="0">
+                <a:solidFill>
+                  <a:srgbClr val="202830"/>
+                </a:solidFill>
+                <a:latin typeface="Malgun Gothic"/>
+              </a:rPr>
+              <a:t> </a:t>
+            </a:r>
+            <a:r>
+              <a:rPr sz="1800" b="0" dirty="0" err="1">
+                <a:solidFill>
+                  <a:srgbClr val="202830"/>
+                </a:solidFill>
+                <a:latin typeface="Malgun Gothic"/>
+              </a:rPr>
+              <a:t>이용한</a:t>
+            </a:r>
+            <a:r>
+              <a:rPr sz="1800" b="0" dirty="0">
+                <a:solidFill>
+                  <a:srgbClr val="202830"/>
+                </a:solidFill>
+                <a:latin typeface="Malgun Gothic"/>
+              </a:rPr>
+              <a:t> </a:t>
+            </a:r>
+            <a:r>
+              <a:rPr sz="1800" b="0" dirty="0" err="1">
+                <a:solidFill>
+                  <a:srgbClr val="202830"/>
+                </a:solidFill>
+                <a:latin typeface="Malgun Gothic"/>
+              </a:rPr>
+              <a:t>출력</a:t>
+            </a:r>
+            <a:endParaRPr sz="1800" b="0" dirty="0">
+              <a:solidFill>
+                <a:srgbClr val="202830"/>
+              </a:solidFill>
+              <a:latin typeface="Malgun Gothic"/>
+            </a:endParaRPr>
           </a:p>
           <a:p>
             <a:pPr>
@@ -25933,14 +26522,83 @@
               </a:spcBef>
             </a:pPr>
             <a:r>
-              <a:rPr sz="1800" b="0">
+              <a:rPr sz="1800" b="0" dirty="0">
                 <a:solidFill>
                   <a:srgbClr val="202830"/>
                 </a:solidFill>
                 <a:latin typeface="Malgun Gothic"/>
               </a:rPr>
-              <a:t>•  실습 05 — IF문과 CASE문 활용</a:t>
-            </a:r>
+              <a:t>•  </a:t>
+            </a:r>
+            <a:r>
+              <a:rPr sz="1800" b="0" dirty="0" err="1">
+                <a:solidFill>
+                  <a:srgbClr val="202830"/>
+                </a:solidFill>
+                <a:latin typeface="Malgun Gothic"/>
+              </a:rPr>
+              <a:t>실습</a:t>
+            </a:r>
+            <a:r>
+              <a:rPr sz="1800" b="0" dirty="0">
+                <a:solidFill>
+                  <a:srgbClr val="202830"/>
+                </a:solidFill>
+                <a:latin typeface="Malgun Gothic"/>
+              </a:rPr>
+              <a:t> 05 — </a:t>
+            </a:r>
+            <a:r>
+              <a:rPr sz="1800" b="0" dirty="0" err="1">
+                <a:solidFill>
+                  <a:srgbClr val="202830"/>
+                </a:solidFill>
+                <a:latin typeface="Malgun Gothic"/>
+              </a:rPr>
+              <a:t>IF문과</a:t>
+            </a:r>
+            <a:r>
+              <a:rPr sz="1800" b="0" dirty="0">
+                <a:solidFill>
+                  <a:srgbClr val="202830"/>
+                </a:solidFill>
+                <a:latin typeface="Malgun Gothic"/>
+              </a:rPr>
+              <a:t> </a:t>
+            </a:r>
+            <a:r>
+              <a:rPr sz="1800" b="0" dirty="0" err="1">
+                <a:solidFill>
+                  <a:srgbClr val="202830"/>
+                </a:solidFill>
+                <a:latin typeface="Malgun Gothic"/>
+              </a:rPr>
+              <a:t>CASE문</a:t>
+            </a:r>
+            <a:r>
+              <a:rPr sz="1800" b="0" dirty="0">
+                <a:solidFill>
+                  <a:srgbClr val="202830"/>
+                </a:solidFill>
+                <a:latin typeface="Malgun Gothic"/>
+              </a:rPr>
+              <a:t> </a:t>
+            </a:r>
+            <a:r>
+              <a:rPr sz="1800" b="0" dirty="0" err="1">
+                <a:solidFill>
+                  <a:srgbClr val="202830"/>
+                </a:solidFill>
+                <a:latin typeface="Malgun Gothic"/>
+              </a:rPr>
+              <a:t>활용</a:t>
+            </a:r>
+            <a:endParaRPr sz="1800" b="0" dirty="0">
+              <a:solidFill>
+                <a:srgbClr val="202830"/>
+              </a:solidFill>
+              <a:latin typeface="Malgun Gothic"/>
+            </a:endParaRPr>
           </a:p>
           <a:p>
             <a:pPr>
@@ -25949,14 +26607,137 @@
               </a:spcBef>
             </a:pPr>
             <a:r>
-              <a:rPr sz="1800" b="0">
+              <a:rPr sz="1800" b="0" dirty="0">
                 <a:solidFill>
                   <a:srgbClr val="202830"/>
                 </a:solidFill>
                 <a:latin typeface="Malgun Gothic"/>
               </a:rPr>
-              <a:t>•  실습 06 — 상수 선언 및 스코프(중첩 블록) 확인</a:t>
-            </a:r>
+              <a:t>•  </a:t>
+            </a:r>
+            <a:r>
+              <a:rPr sz="1800" b="0" dirty="0" err="1">
+                <a:solidFill>
+                  <a:srgbClr val="202830"/>
+                </a:solidFill>
+                <a:latin typeface="Malgun Gothic"/>
+              </a:rPr>
+              <a:t>실습</a:t>
+            </a:r>
+            <a:r>
+              <a:rPr sz="1800" b="0" dirty="0">
+                <a:solidFill>
+                  <a:srgbClr val="202830"/>
+                </a:solidFill>
+                <a:latin typeface="Malgun Gothic"/>
+              </a:rPr>
+              <a:t> 06 — </a:t>
+            </a:r>
+            <a:r>
+              <a:rPr sz="1800" b="0" dirty="0" err="1">
+                <a:solidFill>
+                  <a:srgbClr val="202830"/>
+                </a:solidFill>
+                <a:latin typeface="Malgun Gothic"/>
+              </a:rPr>
+              <a:t>상수</a:t>
+            </a:r>
+            <a:r>
+              <a:rPr sz="1800" b="0" dirty="0">
+                <a:solidFill>
+                  <a:srgbClr val="202830"/>
+                </a:solidFill>
+                <a:latin typeface="Malgun Gothic"/>
+              </a:rPr>
+              <a:t> </a:t>
+            </a:r>
+            <a:r>
+              <a:rPr sz="1800" b="0" dirty="0" err="1">
+                <a:solidFill>
+                  <a:srgbClr val="202830"/>
+                </a:solidFill>
+                <a:latin typeface="Malgun Gothic"/>
+              </a:rPr>
+              <a:t>선언</a:t>
+            </a:r>
+            <a:r>
+              <a:rPr sz="1800" b="0" dirty="0">
+                <a:solidFill>
+                  <a:srgbClr val="202830"/>
+                </a:solidFill>
+                <a:latin typeface="Malgun Gothic"/>
+              </a:rPr>
+              <a:t> 및 </a:t>
+            </a:r>
+            <a:r>
+              <a:rPr sz="1800" b="0" dirty="0" err="1">
+                <a:solidFill>
+                  <a:srgbClr val="202830"/>
+                </a:solidFill>
+                <a:latin typeface="Malgun Gothic"/>
+              </a:rPr>
+              <a:t>스코프</a:t>
+            </a:r>
+            <a:r>
+              <a:rPr sz="1800" b="0" dirty="0">
+                <a:solidFill>
+                  <a:srgbClr val="202830"/>
+                </a:solidFill>
+                <a:latin typeface="Malgun Gothic"/>
+              </a:rPr>
+              <a:t>(</a:t>
+            </a:r>
+            <a:r>
+              <a:rPr sz="1800" b="0" dirty="0" err="1">
+                <a:solidFill>
+                  <a:srgbClr val="202830"/>
+                </a:solidFill>
+                <a:latin typeface="Malgun Gothic"/>
+              </a:rPr>
+              <a:t>중첩</a:t>
+            </a:r>
+            <a:r>
+              <a:rPr sz="1800" b="0" dirty="0">
+                <a:solidFill>
+                  <a:srgbClr val="202830"/>
+                </a:solidFill>
+                <a:latin typeface="Malgun Gothic"/>
+              </a:rPr>
+              <a:t> </a:t>
+            </a:r>
+            <a:r>
+              <a:rPr sz="1800" b="0" dirty="0" err="1">
+                <a:solidFill>
+                  <a:srgbClr val="202830"/>
+                </a:solidFill>
+                <a:latin typeface="Malgun Gothic"/>
+              </a:rPr>
+              <a:t>블록</a:t>
+            </a:r>
+            <a:r>
+              <a:rPr sz="1800" b="0" dirty="0">
+                <a:solidFill>
+                  <a:srgbClr val="202830"/>
+                </a:solidFill>
+                <a:latin typeface="Malgun Gothic"/>
+              </a:rPr>
+              <a:t>) </a:t>
+            </a:r>
+            <a:r>
+              <a:rPr sz="1800" b="0" dirty="0" err="1">
+                <a:solidFill>
+                  <a:srgbClr val="202830"/>
+                </a:solidFill>
+                <a:latin typeface="Malgun Gothic"/>
+              </a:rPr>
+              <a:t>확인</a:t>
+            </a:r>
+            <a:endParaRPr sz="1800" b="0" dirty="0">
+              <a:solidFill>
+                <a:srgbClr val="202830"/>
+              </a:solidFill>
+              <a:latin typeface="Malgun Gothic"/>
+            </a:endParaRPr>
           </a:p>
           <a:p>
             <a:pPr>
@@ -25965,14 +26746,191 @@
               </a:spcBef>
             </a:pPr>
             <a:r>
-              <a:rPr sz="1800" b="0">
+              <a:rPr sz="1800" b="0" dirty="0">
                 <a:solidFill>
                   <a:srgbClr val="202830"/>
                 </a:solidFill>
                 <a:latin typeface="Malgun Gothic"/>
               </a:rPr>
-              <a:t>•  모든 실습은 HR 계정으로 수행하며, 각 실습에 '오류 → 원인 → 수정' 흐름이 포함된다</a:t>
-            </a:r>
+              <a:t>•  </a:t>
+            </a:r>
+            <a:r>
+              <a:rPr sz="1800" b="0" dirty="0" err="1">
+                <a:solidFill>
+                  <a:srgbClr val="202830"/>
+                </a:solidFill>
+                <a:latin typeface="Malgun Gothic"/>
+              </a:rPr>
+              <a:t>모든</a:t>
+            </a:r>
+            <a:r>
+              <a:rPr sz="1800" b="0" dirty="0">
+                <a:solidFill>
+                  <a:srgbClr val="202830"/>
+                </a:solidFill>
+                <a:latin typeface="Malgun Gothic"/>
+              </a:rPr>
+              <a:t> </a:t>
+            </a:r>
+            <a:r>
+              <a:rPr sz="1800" b="0" dirty="0" err="1">
+                <a:solidFill>
+                  <a:srgbClr val="202830"/>
+                </a:solidFill>
+                <a:latin typeface="Malgun Gothic"/>
+              </a:rPr>
+              <a:t>실습은</a:t>
+            </a:r>
+            <a:r>
+              <a:rPr sz="1800" b="0" dirty="0">
+                <a:solidFill>
+                  <a:srgbClr val="202830"/>
+                </a:solidFill>
+                <a:latin typeface="Malgun Gothic"/>
+              </a:rPr>
+              <a:t> HR </a:t>
+            </a:r>
+            <a:r>
+              <a:rPr sz="1800" b="0" dirty="0" err="1">
+                <a:solidFill>
+                  <a:srgbClr val="202830"/>
+                </a:solidFill>
+                <a:latin typeface="Malgun Gothic"/>
+              </a:rPr>
+              <a:t>계정으로</a:t>
+            </a:r>
+            <a:r>
+              <a:rPr sz="1800" b="0" dirty="0">
+                <a:solidFill>
+                  <a:srgbClr val="202830"/>
+                </a:solidFill>
+                <a:latin typeface="Malgun Gothic"/>
+              </a:rPr>
+              <a:t> </a:t>
+            </a:r>
+            <a:r>
+              <a:rPr sz="1800" b="0" dirty="0" err="1">
+                <a:solidFill>
+                  <a:srgbClr val="202830"/>
+                </a:solidFill>
+                <a:latin typeface="Malgun Gothic"/>
+              </a:rPr>
+              <a:t>수행하며</a:t>
+            </a:r>
+            <a:r>
+              <a:rPr sz="1800" b="0" dirty="0">
+                <a:solidFill>
+                  <a:srgbClr val="202830"/>
+                </a:solidFill>
+                <a:latin typeface="Malgun Gothic"/>
+              </a:rPr>
+              <a:t>, 각 </a:t>
+            </a:r>
+            <a:r>
+              <a:rPr sz="1800" b="0" dirty="0" err="1">
+                <a:solidFill>
+                  <a:srgbClr val="202830"/>
+                </a:solidFill>
+                <a:latin typeface="Malgun Gothic"/>
+              </a:rPr>
+              <a:t>실습에</a:t>
+            </a:r>
+            <a:r>
+              <a:rPr sz="1800" b="0" dirty="0">
+                <a:solidFill>
+                  <a:srgbClr val="202830"/>
+                </a:solidFill>
+                <a:latin typeface="Malgun Gothic"/>
+              </a:rPr>
+              <a:t> '</a:t>
+            </a:r>
+            <a:r>
+              <a:rPr sz="1800" b="0" dirty="0" err="1">
+                <a:solidFill>
+                  <a:srgbClr val="202830"/>
+                </a:solidFill>
+                <a:latin typeface="Malgun Gothic"/>
+              </a:rPr>
+              <a:t>오류</a:t>
+            </a:r>
+            <a:r>
+              <a:rPr sz="1800" b="0" dirty="0">
+                <a:solidFill>
+                  <a:srgbClr val="202830"/>
+                </a:solidFill>
+                <a:latin typeface="Malgun Gothic"/>
+              </a:rPr>
+              <a:t> → </a:t>
+            </a:r>
+            <a:r>
+              <a:rPr sz="1800" b="0" dirty="0" err="1">
+                <a:solidFill>
+                  <a:srgbClr val="202830"/>
+                </a:solidFill>
+                <a:latin typeface="Malgun Gothic"/>
+              </a:rPr>
+              <a:t>원인</a:t>
+            </a:r>
+            <a:r>
+              <a:rPr sz="1800" b="0" dirty="0">
+                <a:solidFill>
+                  <a:srgbClr val="202830"/>
+                </a:solidFill>
+                <a:latin typeface="Malgun Gothic"/>
+              </a:rPr>
+              <a:t> → </a:t>
+            </a:r>
+            <a:r>
+              <a:rPr sz="1800" b="0" dirty="0" err="1">
+                <a:solidFill>
+                  <a:srgbClr val="202830"/>
+                </a:solidFill>
+                <a:latin typeface="Malgun Gothic"/>
+              </a:rPr>
+              <a:t>수정</a:t>
+            </a:r>
+            <a:r>
+              <a:rPr sz="1800" b="0" dirty="0">
+                <a:solidFill>
+                  <a:srgbClr val="202830"/>
+                </a:solidFill>
+                <a:latin typeface="Malgun Gothic"/>
+              </a:rPr>
+              <a:t>' </a:t>
+            </a:r>
+            <a:r>
+              <a:rPr sz="1800" b="0" dirty="0" err="1">
+                <a:solidFill>
+                  <a:srgbClr val="202830"/>
+                </a:solidFill>
+                <a:latin typeface="Malgun Gothic"/>
+              </a:rPr>
+              <a:t>흐름이</a:t>
+            </a:r>
+            <a:r>
+              <a:rPr sz="1800" b="0" dirty="0">
+                <a:solidFill>
+                  <a:srgbClr val="202830"/>
+                </a:solidFill>
+                <a:latin typeface="Malgun Gothic"/>
+              </a:rPr>
+              <a:t> </a:t>
+            </a:r>
+            <a:r>
+              <a:rPr sz="1800" b="0" dirty="0" err="1">
+                <a:solidFill>
+                  <a:srgbClr val="202830"/>
+                </a:solidFill>
+                <a:latin typeface="Malgun Gothic"/>
+              </a:rPr>
+              <a:t>포함된다</a:t>
+            </a:r>
+            <a:endParaRPr sz="1800" b="0" dirty="0">
+              <a:solidFill>
+                <a:srgbClr val="202830"/>
+              </a:solidFill>
+              <a:latin typeface="Malgun Gothic"/>
+            </a:endParaRPr>
           </a:p>
           <a:p>
             <a:pPr>
@@ -25980,15 +26938,12 @@
                 <a:spcPts val="1000"/>
               </a:spcBef>
             </a:pPr>
-            <a:r>
-              <a:rPr sz="1800" b="0">
-                <a:solidFill>
-                  <a:srgbClr val="202830"/>
-                </a:solidFill>
-                <a:latin typeface="Malgun Gothic"/>
-              </a:rPr>
-              <a:t>•  실습 후 객관식 50문항(하20·중20·상10) + 추가 서술형 20문항으로 점검</a:t>
-            </a:r>
+            <a:endParaRPr sz="1800" b="0" dirty="0">
+              <a:solidFill>
+                <a:srgbClr val="202830"/>
+              </a:solidFill>
+              <a:latin typeface="Malgun Gothic"/>
+            </a:endParaRPr>
           </a:p>
         </p:txBody>
       </p:sp>
@@ -26001,7 +26956,7 @@
 </file>
 
 <file path=ppt/slides/slide6.xml><?xml version="1.0" encoding="utf-8"?>
-<p:sld xmlns:a="http://schemas.openxmlformats.org/drawingml/2006/main" xmlns:p="http://schemas.openxmlformats.org/presentationml/2006/main" xmlns:r="http://schemas.openxmlformats.org/officeDocument/2006/relationships">
+<p:sld xmlns:a="http://schemas.openxmlformats.org/drawingml/2006/main" xmlns:r="http://schemas.openxmlformats.org/officeDocument/2006/relationships" xmlns:p="http://schemas.openxmlformats.org/presentationml/2006/main">
   <p:cSld>
     <p:bg>
       <p:bgPr>
@@ -26017,7 +26972,14 @@
         <p:cNvGrpSpPr/>
         <p:nvPr/>
       </p:nvGrpSpPr>
-      <p:grpSpPr/>
+      <p:grpSpPr>
+        <a:xfrm>
+          <a:off x="0" y="0"/>
+          <a:ext cx="0" cy="0"/>
+          <a:chOff x="0" y="0"/>
+          <a:chExt cx="0" cy="0"/>
+        </a:xfrm>
+      </p:grpSpPr>
       <p:sp>
         <p:nvSpPr>
           <p:cNvPr id="2" name="Rectangle 1"/>
@@ -26059,6 +27021,7 @@
           <a:lstStyle/>
           <a:p>
             <a:pPr algn="ctr"/>
+            <a:endParaRPr/>
           </a:p>
         </p:txBody>
       </p:sp>
@@ -26277,7 +27240,7 @@
 </file>
 
 <file path=ppt/slides/slide7.xml><?xml version="1.0" encoding="utf-8"?>
-<p:sld xmlns:a="http://schemas.openxmlformats.org/drawingml/2006/main" xmlns:p="http://schemas.openxmlformats.org/presentationml/2006/main" xmlns:r="http://schemas.openxmlformats.org/officeDocument/2006/relationships">
+<p:sld xmlns:a="http://schemas.openxmlformats.org/drawingml/2006/main" xmlns:r="http://schemas.openxmlformats.org/officeDocument/2006/relationships" xmlns:p="http://schemas.openxmlformats.org/presentationml/2006/main">
   <p:cSld>
     <p:bg>
       <p:bgPr>
@@ -26293,7 +27256,14 @@
         <p:cNvGrpSpPr/>
         <p:nvPr/>
       </p:nvGrpSpPr>
-      <p:grpSpPr/>
+      <p:grpSpPr>
+        <a:xfrm>
+          <a:off x="0" y="0"/>
+          <a:ext cx="0" cy="0"/>
+          <a:chOff x="0" y="0"/>
+          <a:chExt cx="0" cy="0"/>
+        </a:xfrm>
+      </p:grpSpPr>
       <p:sp>
         <p:nvSpPr>
           <p:cNvPr id="2" name="Rectangle 1"/>
@@ -26335,6 +27305,7 @@
           <a:lstStyle/>
           <a:p>
             <a:pPr algn="ctr"/>
+            <a:endParaRPr/>
           </a:p>
         </p:txBody>
       </p:sp>
@@ -26569,6 +27540,7 @@
           <a:lstStyle/>
           <a:p>
             <a:pPr algn="ctr"/>
+            <a:endParaRPr/>
           </a:p>
         </p:txBody>
       </p:sp>
@@ -26613,6 +27585,7 @@
           <a:lstStyle/>
           <a:p>
             <a:pPr algn="ctr"/>
+            <a:endParaRPr/>
           </a:p>
         </p:txBody>
       </p:sp>
@@ -26668,7 +27641,7 @@
 </file>
 
 <file path=ppt/slides/slide8.xml><?xml version="1.0" encoding="utf-8"?>
-<p:sld xmlns:a="http://schemas.openxmlformats.org/drawingml/2006/main" xmlns:p="http://schemas.openxmlformats.org/presentationml/2006/main" xmlns:r="http://schemas.openxmlformats.org/officeDocument/2006/relationships">
+<p:sld xmlns:a="http://schemas.openxmlformats.org/drawingml/2006/main" xmlns:r="http://schemas.openxmlformats.org/officeDocument/2006/relationships" xmlns:p="http://schemas.openxmlformats.org/presentationml/2006/main">
   <p:cSld>
     <p:bg>
       <p:bgPr>
@@ -26684,7 +27657,14 @@
         <p:cNvGrpSpPr/>
         <p:nvPr/>
       </p:nvGrpSpPr>
-      <p:grpSpPr/>
+      <p:grpSpPr>
+        <a:xfrm>
+          <a:off x="0" y="0"/>
+          <a:ext cx="0" cy="0"/>
+          <a:chOff x="0" y="0"/>
+          <a:chExt cx="0" cy="0"/>
+        </a:xfrm>
+      </p:grpSpPr>
       <p:sp>
         <p:nvSpPr>
           <p:cNvPr id="2" name="TextBox 1"/>
@@ -26694,7 +27674,7 @@
         <p:spPr>
           <a:xfrm>
             <a:off x="822960" y="1371600"/>
-            <a:ext cx="2743200" cy="1371600"/>
+            <a:ext cx="3896822" cy="1107996"/>
           </a:xfrm>
           <a:prstGeom prst="rect">
             <a:avLst/>
@@ -26713,7 +27693,7 @@
               </a:spcBef>
             </a:pPr>
             <a:r>
-              <a:rPr sz="6600" b="1">
+              <a:rPr sz="6600" b="1" dirty="0">
                 <a:solidFill>
                   <a:srgbClr val="C0392B"/>
                 </a:solidFill>
@@ -26752,14 +27732,74 @@
               </a:spcBef>
             </a:pPr>
             <a:r>
-              <a:rPr sz="3400" b="1">
+              <a:rPr sz="3400" b="1" dirty="0" err="1">
                 <a:solidFill>
                   <a:srgbClr val="FFFFFF"/>
                 </a:solidFill>
                 <a:latin typeface="Malgun Gothic"/>
               </a:rPr>
-              <a:t>블록 구조와 실행 방법</a:t>
-            </a:r>
+              <a:t>블록</a:t>
+            </a:r>
+            <a:r>
+              <a:rPr sz="3400" b="1" dirty="0">
+                <a:solidFill>
+                  <a:srgbClr val="FFFFFF"/>
+                </a:solidFill>
+                <a:latin typeface="Malgun Gothic"/>
+              </a:rPr>
+              <a:t> </a:t>
+            </a:r>
+            <a:r>
+              <a:rPr sz="3400" b="1" dirty="0" err="1">
+                <a:solidFill>
+                  <a:srgbClr val="FFFFFF"/>
+                </a:solidFill>
+                <a:latin typeface="Malgun Gothic"/>
+              </a:rPr>
+              <a:t>구조와</a:t>
+            </a:r>
+            <a:r>
+              <a:rPr sz="3400" b="1" dirty="0">
+                <a:solidFill>
+                  <a:srgbClr val="FFFFFF"/>
+                </a:solidFill>
+                <a:latin typeface="Malgun Gothic"/>
+              </a:rPr>
+              <a:t> </a:t>
+            </a:r>
+            <a:r>
+              <a:rPr sz="3400" b="1" dirty="0" err="1">
+                <a:solidFill>
+                  <a:srgbClr val="FFFFFF"/>
+                </a:solidFill>
+                <a:latin typeface="Malgun Gothic"/>
+              </a:rPr>
+              <a:t>실행</a:t>
+            </a:r>
+            <a:r>
+              <a:rPr sz="3400" b="1" dirty="0">
+                <a:solidFill>
+                  <a:srgbClr val="FFFFFF"/>
+                </a:solidFill>
+                <a:latin typeface="Malgun Gothic"/>
+              </a:rPr>
+              <a:t> </a:t>
+            </a:r>
+            <a:r>
+              <a:rPr sz="3400" b="1" dirty="0" err="1">
+                <a:solidFill>
+                  <a:srgbClr val="FFFFFF"/>
+                </a:solidFill>
+                <a:latin typeface="Malgun Gothic"/>
+              </a:rPr>
+              <a:t>방법</a:t>
+            </a:r>
+            <a:endParaRPr sz="3400" b="1" dirty="0">
+              <a:solidFill>
+                <a:srgbClr val="FFFFFF"/>
+              </a:solidFill>
+              <a:latin typeface="Malgun Gothic"/>
+            </a:endParaRPr>
           </a:p>
         </p:txBody>
       </p:sp>
@@ -26804,6 +27844,7 @@
           <a:lstStyle/>
           <a:p>
             <a:pPr algn="ctr"/>
+            <a:endParaRPr/>
           </a:p>
         </p:txBody>
       </p:sp>
@@ -26887,7 +27928,7 @@
 </file>
 
 <file path=ppt/slides/slide9.xml><?xml version="1.0" encoding="utf-8"?>
-<p:sld xmlns:a="http://schemas.openxmlformats.org/drawingml/2006/main" xmlns:p="http://schemas.openxmlformats.org/presentationml/2006/main" xmlns:r="http://schemas.openxmlformats.org/officeDocument/2006/relationships">
+<p:sld xmlns:a="http://schemas.openxmlformats.org/drawingml/2006/main" xmlns:r="http://schemas.openxmlformats.org/officeDocument/2006/relationships" xmlns:p="http://schemas.openxmlformats.org/presentationml/2006/main">
   <p:cSld>
     <p:bg>
       <p:bgPr>
@@ -26903,7 +27944,14 @@
         <p:cNvGrpSpPr/>
         <p:nvPr/>
       </p:nvGrpSpPr>
-      <p:grpSpPr/>
+      <p:grpSpPr>
+        <a:xfrm>
+          <a:off x="0" y="0"/>
+          <a:ext cx="0" cy="0"/>
+          <a:chOff x="0" y="0"/>
+          <a:chExt cx="0" cy="0"/>
+        </a:xfrm>
+      </p:grpSpPr>
       <p:sp>
         <p:nvSpPr>
           <p:cNvPr id="2" name="Rectangle 1"/>
@@ -26945,6 +27993,7 @@
           <a:lstStyle/>
           <a:p>
             <a:pPr algn="ctr"/>
+            <a:endParaRPr/>
           </a:p>
         </p:txBody>
       </p:sp>
@@ -27147,6 +28196,7 @@
           <a:lstStyle/>
           <a:p>
             <a:pPr algn="ctr"/>
+            <a:endParaRPr/>
           </a:p>
         </p:txBody>
       </p:sp>
@@ -27191,6 +28241,7 @@
           <a:lstStyle/>
           <a:p>
             <a:pPr algn="ctr"/>
+            <a:endParaRPr/>
           </a:p>
         </p:txBody>
       </p:sp>
@@ -27566,7 +28617,7 @@
 </file>
 
 <file path=ppt/theme/theme2.xml><?xml version="1.0" encoding="utf-8"?>
-<a:theme xmlns:a="http://schemas.openxmlformats.org/drawingml/2006/main" name="Office Theme">
+<a:theme xmlns:a="http://schemas.openxmlformats.org/drawingml/2006/main" name="Office 테마">
   <a:themeElements>
     <a:clrScheme name="Office">
       <a:dk1>
@@ -27576,44 +28627,44 @@
         <a:sysClr val="window" lastClr="FFFFFF"/>
       </a:lt1>
       <a:dk2>
-        <a:srgbClr val="1F497D"/>
+        <a:srgbClr val="0E2841"/>
       </a:dk2>
       <a:lt2>
-        <a:srgbClr val="EEECE1"/>
+        <a:srgbClr val="E8E8E8"/>
       </a:lt2>
       <a:accent1>
-        <a:srgbClr val="4F81BD"/>
+        <a:srgbClr val="156082"/>
       </a:accent1>
       <a:accent2>
-        <a:srgbClr val="C0504D"/>
+        <a:srgbClr val="E97132"/>
       </a:accent2>
       <a:accent3>
-        <a:srgbClr val="9BBB59"/>
+        <a:srgbClr val="196B24"/>
       </a:accent3>
       <a:accent4>
-        <a:srgbClr val="8064A2"/>
+        <a:srgbClr val="0F9ED5"/>
       </a:accent4>
       <a:accent5>
-        <a:srgbClr val="4BACC6"/>
+        <a:srgbClr val="A02B93"/>
       </a:accent5>
       <a:accent6>
-        <a:srgbClr val="F79646"/>
+        <a:srgbClr val="4EA72E"/>
       </a:accent6>
       <a:hlink>
-        <a:srgbClr val="0000FF"/>
+        <a:srgbClr val="467886"/>
       </a:hlink>
       <a:folHlink>
-        <a:srgbClr val="800080"/>
+        <a:srgbClr val="96607D"/>
       </a:folHlink>
     </a:clrScheme>
     <a:fontScheme name="Office">
       <a:majorFont>
-        <a:latin typeface="Calibri"/>
+        <a:latin typeface="맑은 고딕" panose="02110004020202020204"/>
         <a:ea typeface=""/>
         <a:cs typeface=""/>
-        <a:font script="Jpan" typeface="ＭＳ Ｐゴシック"/>
+        <a:font script="Jpan" typeface="游ゴシック Light"/>
         <a:font script="Hang" typeface="맑은 고딕"/>
-        <a:font script="Hans" typeface="宋体"/>
+        <a:font script="Hans" typeface="等线 Light"/>
         <a:font script="Hant" typeface="新細明體"/>
         <a:font script="Arab" typeface="Times New Roman"/>
         <a:font script="Hebr" typeface="Times New Roman"/>
@@ -27641,14 +28692,31 @@
         <a:font script="Viet" typeface="Times New Roman"/>
         <a:font script="Uigh" typeface="Microsoft Uighur"/>
         <a:font script="Geor" typeface="Sylfaen"/>
+        <a:font script="Armn" typeface="Arial"/>
+        <a:font script="Bugi" typeface="Leelawadee UI"/>
+        <a:font script="Bopo" typeface="Microsoft JhengHei"/>
+        <a:font script="Java" typeface="Javanese Text"/>
+        <a:font script="Lisu" typeface="Segoe UI"/>
+        <a:font script="Mymr" typeface="Myanmar Text"/>
+        <a:font script="Nkoo" typeface="Ebrima"/>
+        <a:font script="Olck" typeface="Nirmala UI"/>
+        <a:font script="Osma" typeface="Ebrima"/>
+        <a:font script="Phag" typeface="Phagspa"/>
+        <a:font script="Syrn" typeface="Estrangelo Edessa"/>
+        <a:font script="Syrj" typeface="Estrangelo Edessa"/>
+        <a:font script="Syre" typeface="Estrangelo Edessa"/>
+        <a:font script="Sora" typeface="Nirmala UI"/>
+        <a:font script="Tale" typeface="Microsoft Tai Le"/>
+        <a:font script="Talu" typeface="Microsoft New Tai Lue"/>
+        <a:font script="Tfng" typeface="Ebrima"/>
       </a:majorFont>
       <a:minorFont>
-        <a:latin typeface="Calibri"/>
+        <a:latin typeface="맑은 고딕" panose="02110004020202020204"/>
         <a:ea typeface=""/>
         <a:cs typeface=""/>
-        <a:font script="Jpan" typeface="ＭＳ Ｐゴシック"/>
+        <a:font script="Jpan" typeface="游ゴシック"/>
         <a:font script="Hang" typeface="맑은 고딕"/>
-        <a:font script="Hans" typeface="宋体"/>
+        <a:font script="Hans" typeface="等线"/>
         <a:font script="Hant" typeface="新細明體"/>
         <a:font script="Arab" typeface="Arial"/>
         <a:font script="Hebr" typeface="Arial"/>
@@ -27676,6 +28744,23 @@
         <a:font script="Viet" typeface="Arial"/>
         <a:font script="Uigh" typeface="Microsoft Uighur"/>
         <a:font script="Geor" typeface="Sylfaen"/>
+        <a:font script="Armn" typeface="Arial"/>
+        <a:font script="Bugi" typeface="Leelawadee UI"/>
+        <a:font script="Bopo" typeface="Microsoft JhengHei"/>
+        <a:font script="Java" typeface="Javanese Text"/>
+        <a:font script="Lisu" typeface="Segoe UI"/>
+        <a:font script="Mymr" typeface="Myanmar Text"/>
+        <a:font script="Nkoo" typeface="Ebrima"/>
+        <a:font script="Olck" typeface="Nirmala UI"/>
+        <a:font script="Osma" typeface="Ebrima"/>
+        <a:font script="Phag" typeface="Phagspa"/>
+        <a:font script="Syrn" typeface="Estrangelo Edessa"/>
+        <a:font script="Syrj" typeface="Estrangelo Edessa"/>
+        <a:font script="Syre" typeface="Estrangelo Edessa"/>
+        <a:font script="Sora" typeface="Nirmala UI"/>
+        <a:font script="Tale" typeface="Microsoft Tai Le"/>
+        <a:font script="Talu" typeface="Microsoft New Tai Lue"/>
+        <a:font script="Tfng" typeface="Ebrima"/>
       </a:minorFont>
     </a:fontScheme>
     <a:fmtScheme name="Office">
@@ -27687,180 +28772,136 @@
           <a:gsLst>
             <a:gs pos="0">
               <a:schemeClr val="phClr">
-                <a:tint val="50000"/>
-                <a:satMod val="300000"/>
+                <a:lumMod val="110000"/>
+                <a:satMod val="105000"/>
+                <a:tint val="67000"/>
               </a:schemeClr>
             </a:gs>
-            <a:gs pos="35000">
+            <a:gs pos="50000">
               <a:schemeClr val="phClr">
-                <a:tint val="37000"/>
-                <a:satMod val="300000"/>
+                <a:lumMod val="105000"/>
+                <a:satMod val="103000"/>
+                <a:tint val="73000"/>
               </a:schemeClr>
             </a:gs>
             <a:gs pos="100000">
               <a:schemeClr val="phClr">
-                <a:tint val="15000"/>
-                <a:satMod val="350000"/>
+                <a:lumMod val="105000"/>
+                <a:satMod val="109000"/>
+                <a:tint val="81000"/>
               </a:schemeClr>
             </a:gs>
           </a:gsLst>
-          <a:lin ang="16200000" scaled="1"/>
+          <a:lin ang="5400000" scaled="0"/>
         </a:gradFill>
         <a:gradFill rotWithShape="1">
           <a:gsLst>
             <a:gs pos="0">
               <a:schemeClr val="phClr">
-                <a:tint val="100000"/>
+                <a:satMod val="103000"/>
+                <a:lumMod val="102000"/>
+                <a:tint val="94000"/>
+              </a:schemeClr>
+            </a:gs>
+            <a:gs pos="50000">
+              <a:schemeClr val="phClr">
+                <a:satMod val="110000"/>
+                <a:lumMod val="100000"/>
                 <a:shade val="100000"/>
-                <a:satMod val="130000"/>
               </a:schemeClr>
             </a:gs>
             <a:gs pos="100000">
               <a:schemeClr val="phClr">
-                <a:tint val="50000"/>
-                <a:shade val="100000"/>
-                <a:satMod val="350000"/>
+                <a:lumMod val="99000"/>
+                <a:satMod val="120000"/>
+                <a:shade val="78000"/>
               </a:schemeClr>
             </a:gs>
           </a:gsLst>
-          <a:lin ang="16200000" scaled="0"/>
+          <a:lin ang="5400000" scaled="0"/>
         </a:gradFill>
       </a:fillStyleLst>
       <a:lnStyleLst>
-        <a:ln w="9525" cap="flat" cmpd="sng" algn="ctr">
+        <a:ln w="12700" cap="flat" cmpd="sng" algn="ctr">
           <a:solidFill>
-            <a:schemeClr val="phClr">
-              <a:shade val="95000"/>
-              <a:satMod val="105000"/>
-            </a:schemeClr>
+            <a:schemeClr val="phClr"/>
           </a:solidFill>
           <a:prstDash val="solid"/>
+          <a:miter lim="800000"/>
+        </a:ln>
+        <a:ln w="19050" cap="flat" cmpd="sng" algn="ctr">
+          <a:solidFill>
+            <a:schemeClr val="phClr"/>
+          </a:solidFill>
+          <a:prstDash val="solid"/>
+          <a:miter lim="800000"/>
         </a:ln>
         <a:ln w="25400" cap="flat" cmpd="sng" algn="ctr">
           <a:solidFill>
             <a:schemeClr val="phClr"/>
           </a:solidFill>
           <a:prstDash val="solid"/>
-        </a:ln>
-        <a:ln w="38100" cap="flat" cmpd="sng" algn="ctr">
-          <a:solidFill>
-            <a:schemeClr val="phClr"/>
-          </a:solidFill>
-          <a:prstDash val="solid"/>
+          <a:miter lim="800000"/>
         </a:ln>
       </a:lnStyleLst>
       <a:effectStyleLst>
         <a:effectStyle>
+          <a:effectLst/>
+        </a:effectStyle>
+        <a:effectStyle>
+          <a:effectLst/>
+        </a:effectStyle>
+        <a:effectStyle>
           <a:effectLst>
-            <a:outerShdw blurRad="40000" dist="20000" dir="5400000" rotWithShape="0">
+            <a:outerShdw blurRad="57150" dist="19050" dir="5400000" algn="ctr" rotWithShape="0">
               <a:srgbClr val="000000">
-                <a:alpha val="38000"/>
+                <a:alpha val="63000"/>
               </a:srgbClr>
             </a:outerShdw>
           </a:effectLst>
-        </a:effectStyle>
-        <a:effectStyle>
-          <a:effectLst>
-            <a:outerShdw blurRad="40000" dist="23000" dir="5400000" rotWithShape="0">
-              <a:srgbClr val="000000">
-                <a:alpha val="35000"/>
-              </a:srgbClr>
-            </a:outerShdw>
-          </a:effectLst>
-        </a:effectStyle>
-        <a:effectStyle>
-          <a:effectLst>
-            <a:outerShdw blurRad="40000" dist="23000" dir="5400000" rotWithShape="0">
-              <a:srgbClr val="000000">
-                <a:alpha val="35000"/>
-              </a:srgbClr>
-            </a:outerShdw>
-          </a:effectLst>
-          <a:scene3d>
-            <a:camera prst="orthographicFront">
-              <a:rot lat="0" lon="0" rev="0"/>
-            </a:camera>
-            <a:lightRig rig="threePt" dir="t">
-              <a:rot lat="0" lon="0" rev="1200000"/>
-            </a:lightRig>
-          </a:scene3d>
-          <a:sp3d>
-            <a:bevelT w="63500" h="25400"/>
-          </a:sp3d>
         </a:effectStyle>
       </a:effectStyleLst>
       <a:bgFillStyleLst>
         <a:solidFill>
           <a:schemeClr val="phClr"/>
         </a:solidFill>
+        <a:solidFill>
+          <a:schemeClr val="phClr">
+            <a:tint val="95000"/>
+            <a:satMod val="170000"/>
+          </a:schemeClr>
+        </a:solidFill>
         <a:gradFill rotWithShape="1">
           <a:gsLst>
             <a:gs pos="0">
               <a:schemeClr val="phClr">
-                <a:tint val="40000"/>
-                <a:satMod val="350000"/>
+                <a:tint val="93000"/>
+                <a:satMod val="150000"/>
+                <a:shade val="98000"/>
+                <a:lumMod val="102000"/>
               </a:schemeClr>
             </a:gs>
-            <a:gs pos="40000">
+            <a:gs pos="50000">
               <a:schemeClr val="phClr">
-                <a:tint val="45000"/>
-                <a:shade val="99000"/>
-                <a:satMod val="350000"/>
+                <a:tint val="98000"/>
+                <a:satMod val="130000"/>
+                <a:shade val="90000"/>
+                <a:lumMod val="103000"/>
               </a:schemeClr>
             </a:gs>
             <a:gs pos="100000">
               <a:schemeClr val="phClr">
-                <a:shade val="20000"/>
-                <a:satMod val="255000"/>
+                <a:shade val="63000"/>
+                <a:satMod val="120000"/>
               </a:schemeClr>
             </a:gs>
           </a:gsLst>
-          <a:path path="circle">
-            <a:fillToRect l="50000" t="-80000" r="50000" b="180000"/>
-          </a:path>
-        </a:gradFill>
-        <a:gradFill rotWithShape="1">
-          <a:gsLst>
-            <a:gs pos="0">
-              <a:schemeClr val="phClr">
-                <a:tint val="80000"/>
-                <a:satMod val="300000"/>
-              </a:schemeClr>
-            </a:gs>
-            <a:gs pos="100000">
-              <a:schemeClr val="phClr">
-                <a:shade val="30000"/>
-                <a:satMod val="200000"/>
-              </a:schemeClr>
-            </a:gs>
-          </a:gsLst>
-          <a:path path="circle">
-            <a:fillToRect l="50000" t="50000" r="50000" b="50000"/>
-          </a:path>
+          <a:lin ang="5400000" scaled="0"/>
         </a:gradFill>
       </a:bgFillStyleLst>
     </a:fmtScheme>
   </a:themeElements>
   <a:objectDefaults>
-    <a:spDef>
-      <a:spPr/>
-      <a:bodyPr/>
-      <a:lstStyle/>
-      <a:style>
-        <a:lnRef idx="1">
-          <a:schemeClr val="accent1"/>
-        </a:lnRef>
-        <a:fillRef idx="3">
-          <a:schemeClr val="accent1"/>
-        </a:fillRef>
-        <a:effectRef idx="2">
-          <a:schemeClr val="accent1"/>
-        </a:effectRef>
-        <a:fontRef idx="minor">
-          <a:schemeClr val="lt1"/>
-        </a:fontRef>
-      </a:style>
-    </a:spDef>
     <a:lnDef>
       <a:spPr/>
       <a:bodyPr/>
@@ -27882,5 +28923,10 @@
     </a:lnDef>
   </a:objectDefaults>
   <a:extraClrSchemeLst/>
+  <a:extLst>
+    <a:ext uri="{05A4C25C-085E-4340-85A3-A5531E510DB2}">
+      <thm15:themeFamily xmlns:thm15="http://schemas.microsoft.com/office/thememl/2012/main" name="Office Theme" id="{2E142A2C-CD16-42D6-873A-C26D2A0506FA}" vid="{1BDDFF52-6CD6-40A5-AB3C-68EB2F1E4D0A}"/>
+    </a:ext>
+  </a:extLst>
 </a:theme>
 </file>